--- a/slides/day 2/D2C2_DL_CNN.pptx
+++ b/slides/day 2/D2C2_DL_CNN.pptx
@@ -5,7 +5,7 @@
     <p:sldMasterId id="2147483648" r:id="rId1"/>
   </p:sldMasterIdLst>
   <p:notesMasterIdLst>
-    <p:notesMasterId r:id="rId33"/>
+    <p:notesMasterId r:id="rId35"/>
   </p:notesMasterIdLst>
   <p:sldIdLst>
     <p:sldId id="256" r:id="rId2"/>
@@ -23,22 +23,24 @@
     <p:sldId id="303" r:id="rId14"/>
     <p:sldId id="304" r:id="rId15"/>
     <p:sldId id="305" r:id="rId16"/>
-    <p:sldId id="306" r:id="rId17"/>
-    <p:sldId id="298" r:id="rId18"/>
-    <p:sldId id="307" r:id="rId19"/>
-    <p:sldId id="308" r:id="rId20"/>
-    <p:sldId id="309" r:id="rId21"/>
-    <p:sldId id="311" r:id="rId22"/>
-    <p:sldId id="312" r:id="rId23"/>
-    <p:sldId id="314" r:id="rId24"/>
-    <p:sldId id="315" r:id="rId25"/>
-    <p:sldId id="316" r:id="rId26"/>
-    <p:sldId id="317" r:id="rId27"/>
-    <p:sldId id="318" r:id="rId28"/>
-    <p:sldId id="319" r:id="rId29"/>
-    <p:sldId id="285" r:id="rId30"/>
-    <p:sldId id="321" r:id="rId31"/>
-    <p:sldId id="322" r:id="rId32"/>
+    <p:sldId id="323" r:id="rId17"/>
+    <p:sldId id="306" r:id="rId18"/>
+    <p:sldId id="298" r:id="rId19"/>
+    <p:sldId id="307" r:id="rId20"/>
+    <p:sldId id="308" r:id="rId21"/>
+    <p:sldId id="309" r:id="rId22"/>
+    <p:sldId id="311" r:id="rId23"/>
+    <p:sldId id="324" r:id="rId24"/>
+    <p:sldId id="312" r:id="rId25"/>
+    <p:sldId id="314" r:id="rId26"/>
+    <p:sldId id="315" r:id="rId27"/>
+    <p:sldId id="316" r:id="rId28"/>
+    <p:sldId id="317" r:id="rId29"/>
+    <p:sldId id="318" r:id="rId30"/>
+    <p:sldId id="319" r:id="rId31"/>
+    <p:sldId id="285" r:id="rId32"/>
+    <p:sldId id="321" r:id="rId33"/>
+    <p:sldId id="322" r:id="rId34"/>
   </p:sldIdLst>
   <p:sldSz cx="12192000" cy="6858000"/>
   <p:notesSz cx="6858000" cy="9144000"/>
@@ -227,7 +229,7 @@
           <a:p>
             <a:fld id="{FF5685EE-3D40-0A4E-BB88-46887330FC0A}" type="datetimeFigureOut">
               <a:rPr lang="en-US" smtClean="0"/>
-              <a:t>10/6/25</a:t>
+              <a:t>2/18/26</a:t>
             </a:fld>
             <a:endParaRPr lang="en-US"/>
           </a:p>
@@ -631,82 +633,55 @@
           <a:lstStyle/>
           <a:p>
             <a:r>
-              <a:rPr lang="en-IE" dirty="0"/>
-              <a:t>Skip connections (also called </a:t>
-            </a:r>
-            <a:r>
-              <a:rPr lang="en-IE" b="1" dirty="0"/>
-              <a:t>residual connections</a:t>
-            </a:r>
-            <a:r>
-              <a:rPr lang="en-IE" dirty="0"/>
-              <a:t>) are links in a neural network that </a:t>
-            </a:r>
-            <a:r>
-              <a:rPr lang="en-IE" b="1" dirty="0"/>
-              <a:t>bypass one or more layers</a:t>
-            </a:r>
-            <a:r>
-              <a:rPr lang="en-IE" dirty="0"/>
-              <a:t> and feed the input of a layer directly into a later layer.</a:t>
-            </a:r>
-          </a:p>
-          <a:p>
-            <a:r>
-              <a:rPr lang="en-IE" dirty="0"/>
-              <a:t>Instead of passing data strictly layer by layer in sequence, you "skip over" intermediate transformations and add (or sometimes concatenate) the earlier signal to the later output.</a:t>
-            </a:r>
-          </a:p>
-          <a:p>
-            <a:endParaRPr lang="en-US" dirty="0"/>
-          </a:p>
-          <a:p>
-            <a:r>
-              <a:rPr lang="en-IE" b="1" dirty="0"/>
-              <a:t>Why are they used?</a:t>
-            </a:r>
-          </a:p>
-          <a:p>
-            <a:r>
-              <a:rPr lang="en-IE" b="1" dirty="0"/>
-              <a:t>Solve vanishing gradient problem</a:t>
-            </a:r>
-            <a:br>
-              <a:rPr lang="en-IE" dirty="0"/>
-            </a:br>
-            <a:r>
-              <a:rPr lang="en-IE" dirty="0"/>
-              <a:t>By providing a shorter path for gradients during backpropagation, skip connections help signals propagate more effectively in very deep networks.</a:t>
-            </a:r>
-          </a:p>
-          <a:p>
-            <a:r>
-              <a:rPr lang="en-IE" b="1" dirty="0"/>
-              <a:t>Stabilize training</a:t>
-            </a:r>
-            <a:br>
-              <a:rPr lang="en-IE" dirty="0"/>
-            </a:br>
-            <a:r>
-              <a:rPr lang="en-IE" dirty="0"/>
-              <a:t>They make optimization easier because the network can "choose" to learn the identity function (just pass information forward) if deeper transformations are not useful.</a:t>
-            </a:r>
-          </a:p>
-          <a:p>
-            <a:r>
-              <a:rPr lang="en-IE" b="1" dirty="0"/>
-              <a:t>Improve accuracy</a:t>
-            </a:r>
-            <a:br>
-              <a:rPr lang="en-IE" dirty="0"/>
-            </a:br>
-            <a:r>
-              <a:rPr lang="en-IE" dirty="0"/>
-              <a:t>They allow the model to combine both low-level and high-level features, which is especially useful in computer vision and sequence models.</a:t>
-            </a:r>
-          </a:p>
-          <a:p>
-            <a:endParaRPr lang="en-US" dirty="0"/>
+              <a:rPr lang="en-IE" sz="1200" b="1" kern="1200" dirty="0">
+                <a:solidFill>
+                  <a:schemeClr val="tx1"/>
+                </a:solidFill>
+                <a:effectLst/>
+                <a:latin typeface="+mn-lt"/>
+                <a:ea typeface="+mn-ea"/>
+                <a:cs typeface="+mn-cs"/>
+              </a:rPr>
+              <a:t>R</a:t>
+            </a:r>
+            <a:r>
+              <a:rPr lang="en-IE" sz="1200" kern="1200" dirty="0">
+                <a:solidFill>
+                  <a:schemeClr val="tx1"/>
+                </a:solidFill>
+                <a:effectLst/>
+                <a:latin typeface="+mn-lt"/>
+                <a:ea typeface="+mn-ea"/>
+                <a:cs typeface="+mn-cs"/>
+              </a:rPr>
+              <a:t>earrange the formula $(W - F + 2P)/S + 1 = L_{out}$. </a:t>
+            </a:r>
+          </a:p>
+          <a:p>
+            <a:r>
+              <a:rPr lang="en-IE" sz="1200" b="1" kern="1200" dirty="0">
+                <a:solidFill>
+                  <a:schemeClr val="tx1"/>
+                </a:solidFill>
+                <a:effectLst/>
+                <a:latin typeface="+mn-lt"/>
+                <a:ea typeface="+mn-ea"/>
+                <a:cs typeface="+mn-cs"/>
+              </a:rPr>
+              <a:t>Answer:</a:t>
+            </a:r>
+            <a:r>
+              <a:rPr lang="en-IE" sz="1200" kern="1200" dirty="0">
+                <a:solidFill>
+                  <a:schemeClr val="tx1"/>
+                </a:solidFill>
+                <a:effectLst/>
+                <a:latin typeface="+mn-lt"/>
+                <a:ea typeface="+mn-ea"/>
+                <a:cs typeface="+mn-cs"/>
+              </a:rPr>
+              <a:t> $P=1$. $(10 - 3 + 2)/1 + 1 = 10$.</a:t>
+            </a:r>
           </a:p>
           <a:p>
             <a:endParaRPr lang="en-US" dirty="0"/>
@@ -730,7 +705,456 @@
           <a:p>
             <a:fld id="{30752F2A-FA59-1746-ABA5-28C394E5ED08}" type="slidenum">
               <a:rPr lang="en-US" smtClean="0"/>
-              <a:t>28</a:t>
+              <a:t>15</a:t>
+            </a:fld>
+            <a:endParaRPr lang="en-US"/>
+          </a:p>
+        </p:txBody>
+      </p:sp>
+    </p:spTree>
+    <p:extLst>
+      <p:ext uri="{BB962C8B-B14F-4D97-AF65-F5344CB8AC3E}">
+        <p14:creationId xmlns:p14="http://schemas.microsoft.com/office/powerpoint/2010/main" val="3119613363"/>
+      </p:ext>
+    </p:extLst>
+  </p:cSld>
+  <p:clrMapOvr>
+    <a:masterClrMapping/>
+  </p:clrMapOvr>
+</p:notes>
+</file>
+
+<file path=ppt/notesSlides/notesSlide3.xml><?xml version="1.0" encoding="utf-8"?>
+<p:notes xmlns:a="http://schemas.openxmlformats.org/drawingml/2006/main" xmlns:r="http://schemas.openxmlformats.org/officeDocument/2006/relationships" xmlns:p="http://schemas.openxmlformats.org/presentationml/2006/main">
+  <p:cSld>
+    <p:spTree>
+      <p:nvGrpSpPr>
+        <p:cNvPr id="1" name=""/>
+        <p:cNvGrpSpPr/>
+        <p:nvPr/>
+      </p:nvGrpSpPr>
+      <p:grpSpPr>
+        <a:xfrm>
+          <a:off x="0" y="0"/>
+          <a:ext cx="0" cy="0"/>
+          <a:chOff x="0" y="0"/>
+          <a:chExt cx="0" cy="0"/>
+        </a:xfrm>
+      </p:grpSpPr>
+      <p:sp>
+        <p:nvSpPr>
+          <p:cNvPr id="2" name="Slide Image Placeholder 1"/>
+          <p:cNvSpPr>
+            <a:spLocks noGrp="1" noRot="1" noChangeAspect="1"/>
+          </p:cNvSpPr>
+          <p:nvPr>
+            <p:ph type="sldImg"/>
+          </p:nvPr>
+        </p:nvSpPr>
+        <p:spPr/>
+      </p:sp>
+      <p:sp>
+        <p:nvSpPr>
+          <p:cNvPr id="3" name="Notes Placeholder 2"/>
+          <p:cNvSpPr>
+            <a:spLocks noGrp="1"/>
+          </p:cNvSpPr>
+          <p:nvPr>
+            <p:ph type="body" idx="1"/>
+          </p:nvPr>
+        </p:nvSpPr>
+        <p:spPr/>
+        <p:txBody>
+          <a:bodyPr/>
+          <a:lstStyle/>
+          <a:p>
+            <a:r>
+              <a:rPr lang="en-US"/>
+              <a:t>Do not modify the notes in this section to avoid tampering with the Poll Everywhere activity.
+More info at polleverywhere.com/support
+Using the formula provided in the slides, if you have an input signal of length $$W=10$$, a filter size $$F=3$$, padding $$P=1$$, and a stride $$S=2$$, what is the resulting output length?</a:t>
+            </a:r>
+          </a:p>
+          <a:p>
+            <a:r>
+              <a:rPr lang="en-US"/>
+              <a:t>https://www.polleverywhere.com/multiple_choice_polls/1uZ6evtXdAIw089vxb3JZ?state=opened&amp;flow=Default&amp;onscreen=persist</a:t>
+            </a:r>
+          </a:p>
+        </p:txBody>
+      </p:sp>
+      <p:sp>
+        <p:nvSpPr>
+          <p:cNvPr id="4" name="Slide Number Placeholder 3"/>
+          <p:cNvSpPr>
+            <a:spLocks noGrp="1"/>
+          </p:cNvSpPr>
+          <p:nvPr>
+            <p:ph type="sldNum" sz="quarter" idx="5"/>
+          </p:nvPr>
+        </p:nvSpPr>
+        <p:spPr/>
+        <p:txBody>
+          <a:bodyPr/>
+          <a:lstStyle/>
+          <a:p>
+            <a:fld id="{30752F2A-FA59-1746-ABA5-28C394E5ED08}" type="slidenum">
+              <a:rPr lang="en-US" smtClean="0"/>
+              <a:t>16</a:t>
+            </a:fld>
+            <a:endParaRPr lang="en-US"/>
+          </a:p>
+        </p:txBody>
+      </p:sp>
+    </p:spTree>
+    <p:extLst>
+      <p:ext uri="{BB962C8B-B14F-4D97-AF65-F5344CB8AC3E}">
+        <p14:creationId xmlns:p14="http://schemas.microsoft.com/office/powerpoint/2010/main" val="3424355100"/>
+      </p:ext>
+    </p:extLst>
+  </p:cSld>
+  <p:clrMapOvr>
+    <a:masterClrMapping/>
+  </p:clrMapOvr>
+</p:notes>
+</file>
+
+<file path=ppt/notesSlides/notesSlide4.xml><?xml version="1.0" encoding="utf-8"?>
+<p:notes xmlns:a="http://schemas.openxmlformats.org/drawingml/2006/main" xmlns:r="http://schemas.openxmlformats.org/officeDocument/2006/relationships" xmlns:p="http://schemas.openxmlformats.org/presentationml/2006/main">
+  <p:cSld>
+    <p:spTree>
+      <p:nvGrpSpPr>
+        <p:cNvPr id="1" name=""/>
+        <p:cNvGrpSpPr/>
+        <p:nvPr/>
+      </p:nvGrpSpPr>
+      <p:grpSpPr>
+        <a:xfrm>
+          <a:off x="0" y="0"/>
+          <a:ext cx="0" cy="0"/>
+          <a:chOff x="0" y="0"/>
+          <a:chExt cx="0" cy="0"/>
+        </a:xfrm>
+      </p:grpSpPr>
+      <p:sp>
+        <p:nvSpPr>
+          <p:cNvPr id="2" name="Slide Image Placeholder 1"/>
+          <p:cNvSpPr>
+            <a:spLocks noGrp="1" noRot="1" noChangeAspect="1"/>
+          </p:cNvSpPr>
+          <p:nvPr>
+            <p:ph type="sldImg"/>
+          </p:nvPr>
+        </p:nvSpPr>
+        <p:spPr/>
+      </p:sp>
+      <p:sp>
+        <p:nvSpPr>
+          <p:cNvPr id="3" name="Notes Placeholder 2"/>
+          <p:cNvSpPr>
+            <a:spLocks noGrp="1"/>
+          </p:cNvSpPr>
+          <p:nvPr>
+            <p:ph type="body" idx="1"/>
+          </p:nvPr>
+        </p:nvSpPr>
+        <p:spPr/>
+        <p:txBody>
+          <a:bodyPr/>
+          <a:lstStyle/>
+          <a:p>
+            <a:r>
+              <a:rPr lang="en-IE" sz="1200" kern="1200" dirty="0">
+                <a:solidFill>
+                  <a:schemeClr val="tx1"/>
+                </a:solidFill>
+                <a:effectLst/>
+                <a:latin typeface="+mn-lt"/>
+                <a:ea typeface="+mn-ea"/>
+                <a:cs typeface="+mn-cs"/>
+              </a:rPr>
+              <a:t>ach filter must match the input depth ($3 \times 3 \times 3 = 27$ parameters per filter). With 10 filters, that is $27 \times 10 = 270$</a:t>
+            </a:r>
+            <a:endParaRPr lang="en-US" dirty="0"/>
+          </a:p>
+        </p:txBody>
+      </p:sp>
+      <p:sp>
+        <p:nvSpPr>
+          <p:cNvPr id="4" name="Slide Number Placeholder 3"/>
+          <p:cNvSpPr>
+            <a:spLocks noGrp="1"/>
+          </p:cNvSpPr>
+          <p:nvPr>
+            <p:ph type="sldNum" sz="quarter" idx="5"/>
+          </p:nvPr>
+        </p:nvSpPr>
+        <p:spPr/>
+        <p:txBody>
+          <a:bodyPr/>
+          <a:lstStyle/>
+          <a:p>
+            <a:fld id="{30752F2A-FA59-1746-ABA5-28C394E5ED08}" type="slidenum">
+              <a:rPr lang="en-US" smtClean="0"/>
+              <a:t>22</a:t>
+            </a:fld>
+            <a:endParaRPr lang="en-US"/>
+          </a:p>
+        </p:txBody>
+      </p:sp>
+    </p:spTree>
+    <p:extLst>
+      <p:ext uri="{BB962C8B-B14F-4D97-AF65-F5344CB8AC3E}">
+        <p14:creationId xmlns:p14="http://schemas.microsoft.com/office/powerpoint/2010/main" val="3914574290"/>
+      </p:ext>
+    </p:extLst>
+  </p:cSld>
+  <p:clrMapOvr>
+    <a:masterClrMapping/>
+  </p:clrMapOvr>
+</p:notes>
+</file>
+
+<file path=ppt/notesSlides/notesSlide5.xml><?xml version="1.0" encoding="utf-8"?>
+<p:notes xmlns:a="http://schemas.openxmlformats.org/drawingml/2006/main" xmlns:r="http://schemas.openxmlformats.org/officeDocument/2006/relationships" xmlns:p="http://schemas.openxmlformats.org/presentationml/2006/main">
+  <p:cSld>
+    <p:spTree>
+      <p:nvGrpSpPr>
+        <p:cNvPr id="1" name=""/>
+        <p:cNvGrpSpPr/>
+        <p:nvPr/>
+      </p:nvGrpSpPr>
+      <p:grpSpPr>
+        <a:xfrm>
+          <a:off x="0" y="0"/>
+          <a:ext cx="0" cy="0"/>
+          <a:chOff x="0" y="0"/>
+          <a:chExt cx="0" cy="0"/>
+        </a:xfrm>
+      </p:grpSpPr>
+      <p:sp>
+        <p:nvSpPr>
+          <p:cNvPr id="2" name="Slide Image Placeholder 1"/>
+          <p:cNvSpPr>
+            <a:spLocks noGrp="1" noRot="1" noChangeAspect="1"/>
+          </p:cNvSpPr>
+          <p:nvPr>
+            <p:ph type="sldImg"/>
+          </p:nvPr>
+        </p:nvSpPr>
+        <p:spPr/>
+      </p:sp>
+      <p:sp>
+        <p:nvSpPr>
+          <p:cNvPr id="3" name="Notes Placeholder 2"/>
+          <p:cNvSpPr>
+            <a:spLocks noGrp="1"/>
+          </p:cNvSpPr>
+          <p:nvPr>
+            <p:ph type="body" idx="1"/>
+          </p:nvPr>
+        </p:nvSpPr>
+        <p:spPr/>
+        <p:txBody>
+          <a:bodyPr/>
+          <a:lstStyle/>
+          <a:p>
+            <a:r>
+              <a:rPr lang="en-US"/>
+              <a:t>Do not modify the notes in this section to avoid tampering with the Poll Everywhere activity.
+More info at polleverywhere.com/support
+You are processing an RGB image (3 channels) using a convolutional layer with 10 filters, each of size $$3 \times 3$$. Ignoring biases, how many total learnable parameters are in this layer?</a:t>
+            </a:r>
+          </a:p>
+          <a:p>
+            <a:r>
+              <a:rPr lang="en-US"/>
+              <a:t>https://www.polleverywhere.com/multiple_choice_polls/P5YHvumIcxuIb8NyWtIP2?state=opened&amp;flow=Default&amp;onscreen=persist</a:t>
+            </a:r>
+          </a:p>
+        </p:txBody>
+      </p:sp>
+      <p:sp>
+        <p:nvSpPr>
+          <p:cNvPr id="4" name="Slide Number Placeholder 3"/>
+          <p:cNvSpPr>
+            <a:spLocks noGrp="1"/>
+          </p:cNvSpPr>
+          <p:nvPr>
+            <p:ph type="sldNum" sz="quarter" idx="5"/>
+          </p:nvPr>
+        </p:nvSpPr>
+        <p:spPr/>
+        <p:txBody>
+          <a:bodyPr/>
+          <a:lstStyle/>
+          <a:p>
+            <a:fld id="{30752F2A-FA59-1746-ABA5-28C394E5ED08}" type="slidenum">
+              <a:rPr lang="en-US" smtClean="0"/>
+              <a:t>23</a:t>
+            </a:fld>
+            <a:endParaRPr lang="en-US"/>
+          </a:p>
+        </p:txBody>
+      </p:sp>
+    </p:spTree>
+    <p:extLst>
+      <p:ext uri="{BB962C8B-B14F-4D97-AF65-F5344CB8AC3E}">
+        <p14:creationId xmlns:p14="http://schemas.microsoft.com/office/powerpoint/2010/main" val="30686038"/>
+      </p:ext>
+    </p:extLst>
+  </p:cSld>
+  <p:clrMapOvr>
+    <a:masterClrMapping/>
+  </p:clrMapOvr>
+</p:notes>
+</file>
+
+<file path=ppt/notesSlides/notesSlide6.xml><?xml version="1.0" encoding="utf-8"?>
+<p:notes xmlns:a="http://schemas.openxmlformats.org/drawingml/2006/main" xmlns:r="http://schemas.openxmlformats.org/officeDocument/2006/relationships" xmlns:p="http://schemas.openxmlformats.org/presentationml/2006/main">
+  <p:cSld>
+    <p:spTree>
+      <p:nvGrpSpPr>
+        <p:cNvPr id="1" name=""/>
+        <p:cNvGrpSpPr/>
+        <p:nvPr/>
+      </p:nvGrpSpPr>
+      <p:grpSpPr>
+        <a:xfrm>
+          <a:off x="0" y="0"/>
+          <a:ext cx="0" cy="0"/>
+          <a:chOff x="0" y="0"/>
+          <a:chExt cx="0" cy="0"/>
+        </a:xfrm>
+      </p:grpSpPr>
+      <p:sp>
+        <p:nvSpPr>
+          <p:cNvPr id="2" name="Slide Image Placeholder 1"/>
+          <p:cNvSpPr>
+            <a:spLocks noGrp="1" noRot="1" noChangeAspect="1"/>
+          </p:cNvSpPr>
+          <p:nvPr>
+            <p:ph type="sldImg"/>
+          </p:nvPr>
+        </p:nvSpPr>
+        <p:spPr/>
+      </p:sp>
+      <p:sp>
+        <p:nvSpPr>
+          <p:cNvPr id="3" name="Notes Placeholder 2"/>
+          <p:cNvSpPr>
+            <a:spLocks noGrp="1"/>
+          </p:cNvSpPr>
+          <p:nvPr>
+            <p:ph type="body" idx="1"/>
+          </p:nvPr>
+        </p:nvSpPr>
+        <p:spPr/>
+        <p:txBody>
+          <a:bodyPr/>
+          <a:lstStyle/>
+          <a:p>
+            <a:r>
+              <a:rPr lang="en-IE" dirty="0"/>
+              <a:t>Skip connections (also called </a:t>
+            </a:r>
+            <a:r>
+              <a:rPr lang="en-IE" b="1" dirty="0"/>
+              <a:t>residual connections</a:t>
+            </a:r>
+            <a:r>
+              <a:rPr lang="en-IE" dirty="0"/>
+              <a:t>) are links in a neural network that </a:t>
+            </a:r>
+            <a:r>
+              <a:rPr lang="en-IE" b="1" dirty="0"/>
+              <a:t>bypass one or more layers</a:t>
+            </a:r>
+            <a:r>
+              <a:rPr lang="en-IE" dirty="0"/>
+              <a:t> and feed the input of a layer directly into a later layer.</a:t>
+            </a:r>
+          </a:p>
+          <a:p>
+            <a:r>
+              <a:rPr lang="en-IE" dirty="0"/>
+              <a:t>Instead of passing data strictly layer by layer in sequence, you "skip over" intermediate transformations and add (or sometimes concatenate) the earlier signal to the later output.</a:t>
+            </a:r>
+          </a:p>
+          <a:p>
+            <a:endParaRPr lang="en-US" dirty="0"/>
+          </a:p>
+          <a:p>
+            <a:r>
+              <a:rPr lang="en-IE" b="1" dirty="0"/>
+              <a:t>Why are they used?</a:t>
+            </a:r>
+          </a:p>
+          <a:p>
+            <a:r>
+              <a:rPr lang="en-IE" b="1" dirty="0"/>
+              <a:t>Solve vanishing gradient problem</a:t>
+            </a:r>
+            <a:br>
+              <a:rPr lang="en-IE" dirty="0"/>
+            </a:br>
+            <a:r>
+              <a:rPr lang="en-IE" dirty="0"/>
+              <a:t>By providing a shorter path for gradients during backpropagation, skip connections help signals propagate more effectively in very deep networks.</a:t>
+            </a:r>
+          </a:p>
+          <a:p>
+            <a:r>
+              <a:rPr lang="en-IE" b="1" dirty="0"/>
+              <a:t>Stabilize training</a:t>
+            </a:r>
+            <a:br>
+              <a:rPr lang="en-IE" dirty="0"/>
+            </a:br>
+            <a:r>
+              <a:rPr lang="en-IE" dirty="0"/>
+              <a:t>They make optimization easier because the network can "choose" to learn the identity function (just pass information forward) if deeper transformations are not useful.</a:t>
+            </a:r>
+          </a:p>
+          <a:p>
+            <a:r>
+              <a:rPr lang="en-IE" b="1" dirty="0"/>
+              <a:t>Improve accuracy</a:t>
+            </a:r>
+            <a:br>
+              <a:rPr lang="en-IE" dirty="0"/>
+            </a:br>
+            <a:r>
+              <a:rPr lang="en-IE" dirty="0"/>
+              <a:t>They allow the model to combine both low-level and high-level features, which is especially useful in computer vision and sequence models.</a:t>
+            </a:r>
+          </a:p>
+          <a:p>
+            <a:endParaRPr lang="en-US" dirty="0"/>
+          </a:p>
+          <a:p>
+            <a:endParaRPr lang="en-US" dirty="0"/>
+          </a:p>
+        </p:txBody>
+      </p:sp>
+      <p:sp>
+        <p:nvSpPr>
+          <p:cNvPr id="4" name="Slide Number Placeholder 3"/>
+          <p:cNvSpPr>
+            <a:spLocks noGrp="1"/>
+          </p:cNvSpPr>
+          <p:nvPr>
+            <p:ph type="sldNum" sz="quarter" idx="5"/>
+          </p:nvPr>
+        </p:nvSpPr>
+        <p:spPr/>
+        <p:txBody>
+          <a:bodyPr/>
+          <a:lstStyle/>
+          <a:p>
+            <a:fld id="{30752F2A-FA59-1746-ABA5-28C394E5ED08}" type="slidenum">
+              <a:rPr lang="en-US" smtClean="0"/>
+              <a:t>30</a:t>
             </a:fld>
             <a:endParaRPr lang="en-US"/>
           </a:p>
@@ -865,7 +1289,7 @@
           <a:p>
             <a:fld id="{8402DD8C-B513-A24F-856F-6B1204A1084C}" type="datetime3">
               <a:rPr lang="en-IE" smtClean="0"/>
-              <a:t>6 October 2025</a:t>
+              <a:t>18 February 2026</a:t>
             </a:fld>
             <a:endParaRPr lang="en-US" dirty="0"/>
           </a:p>
@@ -1576,6 +2000,199 @@
 </p:sldLayout>
 </file>
 
+<file path=ppt/slideLayouts/slideLayout13.xml><?xml version="1.0" encoding="utf-8"?>
+<p:sldLayout xmlns:a="http://schemas.openxmlformats.org/drawingml/2006/main" xmlns:r="http://schemas.openxmlformats.org/officeDocument/2006/relationships" xmlns:p="http://schemas.openxmlformats.org/presentationml/2006/main" type="title" preserve="1">
+  <p:cSld name="1_Title Slide">
+    <p:spTree>
+      <p:nvGrpSpPr>
+        <p:cNvPr id="1" name=""/>
+        <p:cNvGrpSpPr/>
+        <p:nvPr/>
+      </p:nvGrpSpPr>
+      <p:grpSpPr>
+        <a:xfrm>
+          <a:off x="0" y="0"/>
+          <a:ext cx="0" cy="0"/>
+          <a:chOff x="0" y="0"/>
+          <a:chExt cx="0" cy="0"/>
+        </a:xfrm>
+      </p:grpSpPr>
+      <p:sp>
+        <p:nvSpPr>
+          <p:cNvPr id="2" name="Title 1">
+            <a:extLst>
+              <a:ext uri="{FF2B5EF4-FFF2-40B4-BE49-F238E27FC236}">
+                <a16:creationId xmlns:a16="http://schemas.microsoft.com/office/drawing/2014/main" id="{56A5ED75-DB6D-1A29-BC06-A549DB21555C}"/>
+              </a:ext>
+            </a:extLst>
+          </p:cNvPr>
+          <p:cNvSpPr>
+            <a:spLocks noGrp="1"/>
+          </p:cNvSpPr>
+          <p:nvPr>
+            <p:ph type="ctrTitle"/>
+          </p:nvPr>
+        </p:nvSpPr>
+        <p:spPr>
+          <a:xfrm>
+            <a:off x="1524000" y="1122363"/>
+            <a:ext cx="9144000" cy="2387600"/>
+          </a:xfrm>
+        </p:spPr>
+        <p:txBody>
+          <a:bodyPr anchor="b"/>
+          <a:lstStyle>
+            <a:lvl1pPr algn="ctr">
+              <a:defRPr sz="6000"/>
+            </a:lvl1pPr>
+          </a:lstStyle>
+          <a:p>
+            <a:r>
+              <a:rPr lang="en-GB"/>
+              <a:t>Click to edit Master title style</a:t>
+            </a:r>
+            <a:endParaRPr lang="en-US"/>
+          </a:p>
+        </p:txBody>
+      </p:sp>
+      <p:sp>
+        <p:nvSpPr>
+          <p:cNvPr id="3" name="Subtitle 2">
+            <a:extLst>
+              <a:ext uri="{FF2B5EF4-FFF2-40B4-BE49-F238E27FC236}">
+                <a16:creationId xmlns:a16="http://schemas.microsoft.com/office/drawing/2014/main" id="{5D4DEFDD-47E8-7DAE-9DAE-3E6385890F40}"/>
+              </a:ext>
+            </a:extLst>
+          </p:cNvPr>
+          <p:cNvSpPr>
+            <a:spLocks noGrp="1"/>
+          </p:cNvSpPr>
+          <p:nvPr>
+            <p:ph type="subTitle" idx="1"/>
+          </p:nvPr>
+        </p:nvSpPr>
+        <p:spPr>
+          <a:xfrm>
+            <a:off x="1524000" y="3602038"/>
+            <a:ext cx="9144000" cy="1655762"/>
+          </a:xfrm>
+        </p:spPr>
+        <p:txBody>
+          <a:bodyPr/>
+          <a:lstStyle>
+            <a:lvl1pPr marL="0" indent="0" algn="ctr">
+              <a:buNone/>
+              <a:defRPr sz="2400"/>
+            </a:lvl1pPr>
+            <a:lvl2pPr marL="457200" indent="0" algn="ctr">
+              <a:buNone/>
+              <a:defRPr sz="2000"/>
+            </a:lvl2pPr>
+            <a:lvl3pPr marL="914400" indent="0" algn="ctr">
+              <a:buNone/>
+              <a:defRPr sz="1800"/>
+            </a:lvl3pPr>
+            <a:lvl4pPr marL="1371600" indent="0" algn="ctr">
+              <a:buNone/>
+              <a:defRPr sz="1600"/>
+            </a:lvl4pPr>
+            <a:lvl5pPr marL="1828800" indent="0" algn="ctr">
+              <a:buNone/>
+              <a:defRPr sz="1600"/>
+            </a:lvl5pPr>
+            <a:lvl6pPr marL="2286000" indent="0" algn="ctr">
+              <a:buNone/>
+              <a:defRPr sz="1600"/>
+            </a:lvl6pPr>
+            <a:lvl7pPr marL="2743200" indent="0" algn="ctr">
+              <a:buNone/>
+              <a:defRPr sz="1600"/>
+            </a:lvl7pPr>
+            <a:lvl8pPr marL="3200400" indent="0" algn="ctr">
+              <a:buNone/>
+              <a:defRPr sz="1600"/>
+            </a:lvl8pPr>
+            <a:lvl9pPr marL="3657600" indent="0" algn="ctr">
+              <a:buNone/>
+              <a:defRPr sz="1600"/>
+            </a:lvl9pPr>
+          </a:lstStyle>
+          <a:p>
+            <a:r>
+              <a:rPr lang="en-GB"/>
+              <a:t>Click to edit Master subtitle style</a:t>
+            </a:r>
+            <a:endParaRPr lang="en-US"/>
+          </a:p>
+        </p:txBody>
+      </p:sp>
+      <p:sp>
+        <p:nvSpPr>
+          <p:cNvPr id="4" name="Footer Placeholder 3">
+            <a:extLst>
+              <a:ext uri="{FF2B5EF4-FFF2-40B4-BE49-F238E27FC236}">
+                <a16:creationId xmlns:a16="http://schemas.microsoft.com/office/drawing/2014/main" id="{DE4DAE5A-27FB-9318-33A9-CBE924803BCF}"/>
+              </a:ext>
+            </a:extLst>
+          </p:cNvPr>
+          <p:cNvSpPr>
+            <a:spLocks noGrp="1"/>
+          </p:cNvSpPr>
+          <p:nvPr>
+            <p:ph type="ftr" sz="quarter" idx="10"/>
+          </p:nvPr>
+        </p:nvSpPr>
+        <p:spPr/>
+        <p:txBody>
+          <a:bodyPr/>
+          <a:lstStyle/>
+          <a:p>
+            <a:endParaRPr lang="en-US" dirty="0"/>
+          </a:p>
+        </p:txBody>
+      </p:sp>
+      <p:sp>
+        <p:nvSpPr>
+          <p:cNvPr id="5" name="Slide Number Placeholder 4">
+            <a:extLst>
+              <a:ext uri="{FF2B5EF4-FFF2-40B4-BE49-F238E27FC236}">
+                <a16:creationId xmlns:a16="http://schemas.microsoft.com/office/drawing/2014/main" id="{F29E2F0A-44AF-41AC-D8EB-1D44100A7360}"/>
+              </a:ext>
+            </a:extLst>
+          </p:cNvPr>
+          <p:cNvSpPr>
+            <a:spLocks noGrp="1"/>
+          </p:cNvSpPr>
+          <p:nvPr>
+            <p:ph type="sldNum" sz="quarter" idx="11"/>
+          </p:nvPr>
+        </p:nvSpPr>
+        <p:spPr/>
+        <p:txBody>
+          <a:bodyPr/>
+          <a:lstStyle/>
+          <a:p>
+            <a:fld id="{5A064C77-022D-3743-A04E-645624933D1D}" type="slidenum">
+              <a:rPr lang="en-US" smtClean="0"/>
+              <a:t>‹#›</a:t>
+            </a:fld>
+            <a:endParaRPr lang="en-US"/>
+          </a:p>
+        </p:txBody>
+      </p:sp>
+    </p:spTree>
+    <p:extLst>
+      <p:ext uri="{BB962C8B-B14F-4D97-AF65-F5344CB8AC3E}">
+        <p14:creationId xmlns:p14="http://schemas.microsoft.com/office/powerpoint/2010/main" val="1295506662"/>
+      </p:ext>
+    </p:extLst>
+  </p:cSld>
+  <p:clrMapOvr>
+    <a:masterClrMapping/>
+  </p:clrMapOvr>
+</p:sldLayout>
+</file>
+
 <file path=ppt/slideLayouts/slideLayout2.xml><?xml version="1.0" encoding="utf-8"?>
 <p:sldLayout xmlns:a="http://schemas.openxmlformats.org/drawingml/2006/main" xmlns:r="http://schemas.openxmlformats.org/officeDocument/2006/relationships" xmlns:p="http://schemas.openxmlformats.org/presentationml/2006/main" preserve="1" userDrawn="1">
   <p:cSld name="Title Slide">
@@ -1722,7 +2339,7 @@
           <a:p>
             <a:fld id="{84B1C4E6-D34A-5D40-8468-DD831C2F8A2D}" type="datetime3">
               <a:rPr lang="en-IE" smtClean="0"/>
-              <a:t>6 October 2025</a:t>
+              <a:t>18 February 2026</a:t>
             </a:fld>
             <a:endParaRPr lang="en-US" dirty="0"/>
           </a:p>
@@ -1999,7 +2616,7 @@
           <a:p>
             <a:fld id="{C73BD204-E1E8-EA49-A9F1-1BFFFCE3B5E1}" type="datetime3">
               <a:rPr lang="en-IE" smtClean="0"/>
-              <a:t>6 October 2025</a:t>
+              <a:t>18 February 2026</a:t>
             </a:fld>
             <a:endParaRPr lang="en-US" dirty="0"/>
           </a:p>
@@ -3066,7 +3683,7 @@
     <p:bg>
       <p:bgPr>
         <a:blipFill dpi="0" rotWithShape="1">
-          <a:blip r:embed="rId14">
+          <a:blip r:embed="rId15">
             <a:lum/>
           </a:blip>
           <a:srcRect/>
@@ -3309,6 +3926,7 @@
     <p:sldLayoutId id="2147483664" r:id="rId10"/>
     <p:sldLayoutId id="2147483665" r:id="rId11"/>
     <p:sldLayoutId id="2147483666" r:id="rId12"/>
+    <p:sldLayoutId id="2147483667" r:id="rId13"/>
   </p:sldLayoutIdLst>
   <p:hf hdr="0" ftr="0" dt="0"/>
   <p:txStyles>
@@ -3875,31 +4493,31 @@
             </a:r>
             <a:r>
               <a:rPr lang="en-US" dirty="0"/>
-              <a:t> objects in photos (e.g. muffins vs. dogs).</a:t>
+              <a:t> objects in photos (e.g. muffins vs. dogs)</a:t>
             </a:r>
           </a:p>
           <a:p>
             <a:r>
               <a:rPr lang="en-US" dirty="0"/>
-              <a:t>Object detection: locate bounding boxes and labels in scenes.</a:t>
+              <a:t>Object detection: locate bounding boxes and labels in scenes</a:t>
             </a:r>
           </a:p>
           <a:p>
             <a:r>
               <a:rPr lang="en-US" dirty="0"/>
-              <a:t>Semantic segmentation: assign a class to every pixel.</a:t>
+              <a:t>Semantic segmentation: assign a class to every pixel</a:t>
             </a:r>
           </a:p>
           <a:p>
             <a:r>
               <a:rPr lang="en-US" dirty="0"/>
-              <a:t>Audio and speech: 1D convolutions process waveforms for speech recognition.</a:t>
+              <a:t>Audio and speech: 1D convolutions process waveforms for speech recognition</a:t>
             </a:r>
           </a:p>
           <a:p>
             <a:r>
               <a:rPr lang="en-US" dirty="0"/>
-              <a:t>Time series &amp; natural language: sequence models combine convolutions with recurrent layers or transformers.</a:t>
+              <a:t>Time series &amp; natural language: sequence models combine convolutions with recurrent layers or transformers</a:t>
             </a:r>
           </a:p>
         </p:txBody>
@@ -4065,13 +4683,13 @@
               <a:p>
                 <a:r>
                   <a:rPr lang="en-US" dirty="0"/>
-                  <a:t>Convolutional layers exploit local connectivity and parameter sharing.</a:t>
+                  <a:t>Convolutional layers exploit local connectivity and parameter sharing</a:t>
                 </a:r>
               </a:p>
               <a:p>
                 <a:r>
                   <a:rPr lang="en-US" dirty="0"/>
-                  <a:t>Instead of learning a weight for every input pixel, a small filter is applied across the entire input — greatly reducing the number of parameters.</a:t>
+                  <a:t>Instead of learning a weight for every input pixel, a small filter is applied across the entire input — greatly reducing the number of parameters</a:t>
                 </a:r>
               </a:p>
               <a:p>
@@ -4131,7 +4749,7 @@
                 </a14:m>
                 <a:r>
                   <a:rPr lang="en-IE" dirty="0"/>
-                  <a:t> for computational efficiency.</a:t>
+                  <a:t> for computational efficiency</a:t>
                 </a:r>
               </a:p>
               <a:p>
@@ -4296,19 +4914,19 @@
           <a:p>
             <a:r>
               <a:rPr lang="en-US" dirty="0"/>
-              <a:t>A 1D convolution slides a small filter over a 1D signal.</a:t>
+              <a:t>A 1D convolution slides a small filter over a 1D signal</a:t>
             </a:r>
           </a:p>
           <a:p>
             <a:r>
               <a:rPr lang="en-US" dirty="0"/>
-              <a:t>At each position the dot product between the filter and the current window of the signal is computed, producing a new feature.</a:t>
+              <a:t>At each position the dot product between the filter and the current window of the signal is computed, producing a new feature</a:t>
             </a:r>
           </a:p>
           <a:p>
             <a:r>
               <a:rPr lang="en-US" dirty="0"/>
-              <a:t>This operation introduces locality and parameter sharing — the same filter is reused across positions.</a:t>
+              <a:t>This operation introduces locality and parameter sharing — the same filter is reused across positions</a:t>
             </a:r>
           </a:p>
           <a:p>
@@ -5223,13 +5841,13 @@
           <a:p>
             <a:r>
               <a:rPr lang="en-US" dirty="0"/>
-              <a:t>Example: input x = [2, 0, 3, 1, −1], filter w = [1, 0, −1], stride = 1, no padding.</a:t>
+              <a:t>Example: input x = [2, 0, 3, 1, −1], filter w = [1, 0, −1], stride = 1, no padding</a:t>
             </a:r>
           </a:p>
           <a:p>
             <a:r>
               <a:rPr lang="en-US" dirty="0"/>
-              <a:t>The filter slides across the signal and computes a dot product at each position.</a:t>
+              <a:t>The filter slides across the signal and computes a dot product at each position</a:t>
             </a:r>
           </a:p>
           <a:p>
@@ -6198,7 +6816,7 @@
                 </a14:m>
                 <a:r>
                   <a:rPr lang="en-US" dirty="0"/>
-                  <a:t> adds extra zeros to the input to control the output size.</a:t>
+                  <a:t> adds extra zeros to the input to control the output size</a:t>
                 </a:r>
               </a:p>
               <a:p>
@@ -6266,13 +6884,13 @@
                 </a14:m>
                 <a:r>
                   <a:rPr lang="en-US" dirty="0"/>
-                  <a:t>, where W is input length and F is filter length.</a:t>
+                  <a:t>, where W is input length and F is filter length</a:t>
                 </a:r>
               </a:p>
               <a:p>
                 <a:r>
                   <a:rPr lang="en-US" dirty="0"/>
-                  <a:t>In our example: W = 5, F = 3, P = 0, S = 1 → (5 − 3 + 0)/1 + 1 = 3.</a:t>
+                  <a:t>In our example: W = 5, F = 3, P = 0, S = 1 → (5 − 3 + 0)/1 + 1 = 3</a:t>
                 </a:r>
               </a:p>
               <a:p>
@@ -6310,7 +6928,7 @@
                 <a:ext cx="9374204" cy="4149290"/>
               </a:xfrm>
               <a:blipFill>
-                <a:blip r:embed="rId2"/>
+                <a:blip r:embed="rId3"/>
                 <a:stretch>
                   <a:fillRect l="-1218" t="-2439" r="-135"/>
                 </a:stretch>
@@ -7138,7 +7756,7 @@
           <p:cNvPr id="2" name="Title 1">
             <a:extLst>
               <a:ext uri="{FF2B5EF4-FFF2-40B4-BE49-F238E27FC236}">
-                <a16:creationId xmlns:a16="http://schemas.microsoft.com/office/drawing/2014/main" id="{A72028C5-32A6-730E-443D-C3A5118D3AC9}"/>
+                <a16:creationId xmlns:a16="http://schemas.microsoft.com/office/drawing/2014/main" id="{91E16611-9901-7C07-FA66-B7AC3DBC3434}"/>
               </a:ext>
             </a:extLst>
           </p:cNvPr>
@@ -7146,7 +7764,7 @@
             <a:spLocks noGrp="1"/>
           </p:cNvSpPr>
           <p:nvPr>
-            <p:ph type="title"/>
+            <p:ph type="ctrTitle"/>
           </p:nvPr>
         </p:nvSpPr>
         <p:spPr/>
@@ -7154,19 +7772,16 @@
           <a:bodyPr/>
           <a:lstStyle/>
           <a:p>
-            <a:r>
-              <a:rPr lang="en-US" dirty="0"/>
-              <a:t>1D convolution summary</a:t>
-            </a:r>
-          </a:p>
-        </p:txBody>
-      </p:sp>
-      <p:sp>
-        <p:nvSpPr>
-          <p:cNvPr id="3" name="Content Placeholder 2">
-            <a:extLst>
-              <a:ext uri="{FF2B5EF4-FFF2-40B4-BE49-F238E27FC236}">
-                <a16:creationId xmlns:a16="http://schemas.microsoft.com/office/drawing/2014/main" id="{0C9C7F2E-B1FC-02F2-2214-48BFCCEDA4DE}"/>
+            <a:endParaRPr lang="en-US"/>
+          </a:p>
+        </p:txBody>
+      </p:sp>
+      <p:sp>
+        <p:nvSpPr>
+          <p:cNvPr id="3" name="Subtitle 2">
+            <a:extLst>
+              <a:ext uri="{FF2B5EF4-FFF2-40B4-BE49-F238E27FC236}">
+                <a16:creationId xmlns:a16="http://schemas.microsoft.com/office/drawing/2014/main" id="{892BA9F3-AB99-6DBB-4C93-36F0F12DA462}"/>
               </a:ext>
             </a:extLst>
           </p:cNvPr>
@@ -7174,69 +7789,24 @@
             <a:spLocks noGrp="1"/>
           </p:cNvSpPr>
           <p:nvPr>
-            <p:ph idx="1"/>
+            <p:ph type="subTitle" idx="1"/>
           </p:nvPr>
         </p:nvSpPr>
         <p:spPr/>
         <p:txBody>
-          <a:bodyPr>
-            <a:normAutofit lnSpcReduction="10000"/>
-          </a:bodyPr>
-          <a:lstStyle/>
-          <a:p>
-            <a:r>
-              <a:rPr lang="en-US" dirty="0"/>
-              <a:t>Locality: filters look at </a:t>
-            </a:r>
-            <a:r>
-              <a:rPr lang="en-US" dirty="0" err="1"/>
-              <a:t>neighbouring</a:t>
-            </a:r>
-            <a:r>
-              <a:rPr lang="en-US" dirty="0"/>
-              <a:t> elements instead of the entire input.</a:t>
-            </a:r>
-          </a:p>
-          <a:p>
-            <a:r>
-              <a:rPr lang="en-US" dirty="0"/>
-              <a:t>Parameter sharing: one set of weights is reused across the input, reducing parameters.</a:t>
-            </a:r>
-          </a:p>
-          <a:p>
-            <a:r>
-              <a:rPr lang="en-US" dirty="0"/>
-              <a:t>Stride &amp; padding control the output length and allow </a:t>
-            </a:r>
-            <a:r>
-              <a:rPr lang="en-US" dirty="0" err="1"/>
-              <a:t>downsampling</a:t>
-            </a:r>
-            <a:r>
-              <a:rPr lang="en-US" dirty="0"/>
-              <a:t>.</a:t>
-            </a:r>
-          </a:p>
-          <a:p>
-            <a:r>
-              <a:rPr lang="en-US" dirty="0"/>
-              <a:t>The same ideas extend naturally to higher‑dimensional inputs (2D, 3D, etc.).</a:t>
-            </a:r>
-          </a:p>
-          <a:p>
-            <a:r>
-              <a:rPr lang="en-US" dirty="0"/>
-              <a:t>Pooling layers (next slide) reduce the dimension still further</a:t>
-            </a:r>
-          </a:p>
-        </p:txBody>
-      </p:sp>
-      <p:sp>
-        <p:nvSpPr>
-          <p:cNvPr id="5" name="Slide Number Placeholder 4">
-            <a:extLst>
-              <a:ext uri="{FF2B5EF4-FFF2-40B4-BE49-F238E27FC236}">
-                <a16:creationId xmlns:a16="http://schemas.microsoft.com/office/drawing/2014/main" id="{8810056E-6AF4-DDFC-0070-926AAB917C38}"/>
+          <a:bodyPr/>
+          <a:lstStyle/>
+          <a:p>
+            <a:endParaRPr lang="en-US"/>
+          </a:p>
+        </p:txBody>
+      </p:sp>
+      <p:sp>
+        <p:nvSpPr>
+          <p:cNvPr id="4" name="Slide Number Placeholder 3">
+            <a:extLst>
+              <a:ext uri="{FF2B5EF4-FFF2-40B4-BE49-F238E27FC236}">
+                <a16:creationId xmlns:a16="http://schemas.microsoft.com/office/drawing/2014/main" id="{54F05156-4EF3-85F6-A45B-18E52D82F8AD}"/>
               </a:ext>
             </a:extLst>
           </p:cNvPr>
@@ -7244,7 +7814,7 @@
             <a:spLocks noGrp="1"/>
           </p:cNvSpPr>
           <p:nvPr>
-            <p:ph type="sldNum" sz="quarter" idx="12"/>
+            <p:ph type="sldNum" sz="quarter" idx="11"/>
           </p:nvPr>
         </p:nvSpPr>
         <p:spPr/>
@@ -7260,10 +7830,40 @@
           </a:p>
         </p:txBody>
       </p:sp>
+      <p:pic>
+        <p:nvPicPr>
+          <p:cNvPr id="6" name="slide.url=https://www.polleverywhere.com/multiple_choice_polls/1uZ6evtXdAIw089vxb3JZ?state=opened&amp;flow=Default&amp;onscreen=persist">
+            <a:extLst>
+              <a:ext uri="{FF2B5EF4-FFF2-40B4-BE49-F238E27FC236}">
+                <a16:creationId xmlns:a16="http://schemas.microsoft.com/office/drawing/2014/main" id="{9F6975AA-EEF2-6DF4-5D69-8012B695D57D}"/>
+              </a:ext>
+            </a:extLst>
+          </p:cNvPr>
+          <p:cNvPicPr>
+            <a:picLocks/>
+          </p:cNvPicPr>
+          <p:nvPr/>
+        </p:nvPicPr>
+        <p:blipFill>
+          <a:blip r:embed="rId3"/>
+          <a:stretch>
+            <a:fillRect/>
+          </a:stretch>
+        </p:blipFill>
+        <p:spPr>
+          <a:xfrm>
+            <a:off x="63500" y="63500"/>
+            <a:ext cx="12065000" cy="6731000"/>
+          </a:xfrm>
+          <a:prstGeom prst="rect">
+            <a:avLst/>
+          </a:prstGeom>
+        </p:spPr>
+      </p:pic>
     </p:spTree>
     <p:extLst>
       <p:ext uri="{BB962C8B-B14F-4D97-AF65-F5344CB8AC3E}">
-        <p14:creationId xmlns:p14="http://schemas.microsoft.com/office/powerpoint/2010/main" val="2150108687"/>
+        <p14:creationId xmlns:p14="http://schemas.microsoft.com/office/powerpoint/2010/main" val="2591548340"/>
       </p:ext>
     </p:extLst>
   </p:cSld>
@@ -7295,7 +7895,7 @@
           <p:cNvPr id="2" name="Title 1">
             <a:extLst>
               <a:ext uri="{FF2B5EF4-FFF2-40B4-BE49-F238E27FC236}">
-                <a16:creationId xmlns:a16="http://schemas.microsoft.com/office/drawing/2014/main" id="{F2A0BB5D-8484-7D1C-8D08-E797A55A089F}"/>
+                <a16:creationId xmlns:a16="http://schemas.microsoft.com/office/drawing/2014/main" id="{A72028C5-32A6-730E-443D-C3A5118D3AC9}"/>
               </a:ext>
             </a:extLst>
           </p:cNvPr>
@@ -7313,7 +7913,7 @@
           <a:p>
             <a:r>
               <a:rPr lang="en-US" dirty="0"/>
-              <a:t>Another layer type: pooling</a:t>
+              <a:t>1D convolution summary</a:t>
             </a:r>
           </a:p>
         </p:txBody>
@@ -7323,7 +7923,7 @@
           <p:cNvPr id="3" name="Content Placeholder 2">
             <a:extLst>
               <a:ext uri="{FF2B5EF4-FFF2-40B4-BE49-F238E27FC236}">
-                <a16:creationId xmlns:a16="http://schemas.microsoft.com/office/drawing/2014/main" id="{6099C9F0-739C-8590-1636-3F02DFDC5783}"/>
+                <a16:creationId xmlns:a16="http://schemas.microsoft.com/office/drawing/2014/main" id="{0C9C7F2E-B1FC-02F2-2214-48BFCCEDA4DE}"/>
               </a:ext>
             </a:extLst>
           </p:cNvPr>
@@ -7334,1691 +7934,63 @@
             <p:ph idx="1"/>
           </p:nvPr>
         </p:nvSpPr>
-        <p:spPr>
-          <a:xfrm>
-            <a:off x="838200" y="1825625"/>
-            <a:ext cx="5889859" cy="4149290"/>
-          </a:xfrm>
-        </p:spPr>
-        <p:txBody>
-          <a:bodyPr/>
+        <p:spPr/>
+        <p:txBody>
+          <a:bodyPr>
+            <a:normAutofit lnSpcReduction="10000"/>
+          </a:bodyPr>
           <a:lstStyle/>
           <a:p>
             <a:r>
               <a:rPr lang="en-US" dirty="0"/>
-              <a:t>Pooling down-samples feature maps, </a:t>
+              <a:t>Locality: filters look at </a:t>
             </a:r>
             <a:r>
               <a:rPr lang="en-US" dirty="0" err="1"/>
-              <a:t>summarising</a:t>
+              <a:t>neighbouring</a:t>
             </a:r>
             <a:r>
               <a:rPr lang="en-US" dirty="0"/>
-              <a:t> local patches and reducing spatial resolution.</a:t>
+              <a:t> elements instead of the entire input</a:t>
             </a:r>
           </a:p>
           <a:p>
             <a:r>
               <a:rPr lang="en-US" dirty="0"/>
-              <a:t>Two common types are max pooling (take the maximum) and average pooling (take the mean).</a:t>
+              <a:t>Parameter sharing: one set of weights is reused across the input, reducing parameters</a:t>
             </a:r>
           </a:p>
           <a:p>
             <a:r>
               <a:rPr lang="en-US" dirty="0"/>
-              <a:t>Pooling introduces translational invariance by discarding precise positional information.</a:t>
-            </a:r>
-          </a:p>
-          <a:p>
+              <a:t>Stride &amp; padding control the output length and allow </a:t>
+            </a:r>
+            <a:r>
+              <a:rPr lang="en-US" dirty="0" err="1"/>
+              <a:t>downsampling</a:t>
+            </a:r>
             <a:endParaRPr lang="en-US" dirty="0"/>
           </a:p>
           <a:p>
-            <a:endParaRPr lang="en-US" dirty="0"/>
-          </a:p>
-        </p:txBody>
-      </p:sp>
-      <p:sp>
-        <p:nvSpPr>
-          <p:cNvPr id="5" name="Shape 2">
-            <a:extLst>
-              <a:ext uri="{FF2B5EF4-FFF2-40B4-BE49-F238E27FC236}">
-                <a16:creationId xmlns:a16="http://schemas.microsoft.com/office/drawing/2014/main" id="{CBE0C23E-FEBB-0F5B-FEE9-B938000427FD}"/>
-              </a:ext>
-            </a:extLst>
-          </p:cNvPr>
-          <p:cNvSpPr/>
-          <p:nvPr/>
-        </p:nvSpPr>
-        <p:spPr>
-          <a:xfrm>
-            <a:off x="7228573" y="2961373"/>
-            <a:ext cx="426720" cy="426720"/>
-          </a:xfrm>
-          <a:prstGeom prst="rect">
-            <a:avLst/>
-          </a:prstGeom>
-          <a:solidFill>
-            <a:srgbClr val="F5F5F5"/>
-          </a:solidFill>
-          <a:ln w="12700">
-            <a:solidFill>
-              <a:srgbClr val="030A18"/>
-            </a:solidFill>
-            <a:prstDash val="solid"/>
-          </a:ln>
-        </p:spPr>
-        <p:txBody>
-          <a:bodyPr/>
-          <a:lstStyle/>
-          <a:p>
-            <a:endParaRPr sz="2400"/>
-          </a:p>
-        </p:txBody>
-      </p:sp>
-      <p:sp>
-        <p:nvSpPr>
-          <p:cNvPr id="6" name="Text 3">
-            <a:extLst>
-              <a:ext uri="{FF2B5EF4-FFF2-40B4-BE49-F238E27FC236}">
-                <a16:creationId xmlns:a16="http://schemas.microsoft.com/office/drawing/2014/main" id="{FB05D7F7-64FB-80ED-3244-F20602B3E2D4}"/>
-              </a:ext>
-            </a:extLst>
-          </p:cNvPr>
-          <p:cNvSpPr/>
-          <p:nvPr/>
-        </p:nvSpPr>
-        <p:spPr>
-          <a:xfrm>
-            <a:off x="7228573" y="3058909"/>
-            <a:ext cx="426720" cy="243840"/>
-          </a:xfrm>
-          <a:prstGeom prst="rect">
-            <a:avLst/>
-          </a:prstGeom>
-          <a:noFill/>
-          <a:ln/>
-        </p:spPr>
-        <p:txBody>
-          <a:bodyPr wrap="square" rtlCol="0" anchor="ctr"/>
-          <a:lstStyle/>
-          <a:p>
-            <a:pPr algn="ctr"/>
-            <a:r>
-              <a:rPr lang="en-US" sz="1200" dirty="0">
-                <a:solidFill>
-                  <a:srgbClr val="030A18"/>
-                </a:solidFill>
-              </a:rPr>
-              <a:t>2</a:t>
-            </a:r>
-            <a:endParaRPr lang="en-US" sz="1200" dirty="0"/>
-          </a:p>
-        </p:txBody>
-      </p:sp>
-      <p:sp>
-        <p:nvSpPr>
-          <p:cNvPr id="7" name="Shape 4">
-            <a:extLst>
-              <a:ext uri="{FF2B5EF4-FFF2-40B4-BE49-F238E27FC236}">
-                <a16:creationId xmlns:a16="http://schemas.microsoft.com/office/drawing/2014/main" id="{1931C5AF-7E41-C525-3205-85B271E14BD8}"/>
-              </a:ext>
-            </a:extLst>
-          </p:cNvPr>
-          <p:cNvSpPr/>
-          <p:nvPr/>
-        </p:nvSpPr>
-        <p:spPr>
-          <a:xfrm>
-            <a:off x="7655293" y="2961373"/>
-            <a:ext cx="426720" cy="426720"/>
-          </a:xfrm>
-          <a:prstGeom prst="rect">
-            <a:avLst/>
-          </a:prstGeom>
-          <a:solidFill>
-            <a:srgbClr val="F5F5F5"/>
-          </a:solidFill>
-          <a:ln w="12700">
-            <a:solidFill>
-              <a:srgbClr val="030A18"/>
-            </a:solidFill>
-            <a:prstDash val="solid"/>
-          </a:ln>
-        </p:spPr>
-        <p:txBody>
-          <a:bodyPr/>
-          <a:lstStyle/>
-          <a:p>
-            <a:endParaRPr sz="2400"/>
-          </a:p>
-        </p:txBody>
-      </p:sp>
-      <p:sp>
-        <p:nvSpPr>
-          <p:cNvPr id="8" name="Text 5">
-            <a:extLst>
-              <a:ext uri="{FF2B5EF4-FFF2-40B4-BE49-F238E27FC236}">
-                <a16:creationId xmlns:a16="http://schemas.microsoft.com/office/drawing/2014/main" id="{5B867ED8-5B48-08A6-96CF-0D5B4D2D6E84}"/>
-              </a:ext>
-            </a:extLst>
-          </p:cNvPr>
-          <p:cNvSpPr/>
-          <p:nvPr/>
-        </p:nvSpPr>
-        <p:spPr>
-          <a:xfrm>
-            <a:off x="7655293" y="3058909"/>
-            <a:ext cx="426720" cy="243840"/>
-          </a:xfrm>
-          <a:prstGeom prst="rect">
-            <a:avLst/>
-          </a:prstGeom>
-          <a:noFill/>
-          <a:ln/>
-        </p:spPr>
-        <p:txBody>
-          <a:bodyPr wrap="square" rtlCol="0" anchor="ctr"/>
-          <a:lstStyle/>
-          <a:p>
-            <a:pPr algn="ctr"/>
-            <a:r>
-              <a:rPr lang="en-US" sz="1200" dirty="0">
-                <a:solidFill>
-                  <a:srgbClr val="030A18"/>
-                </a:solidFill>
-              </a:rPr>
-              <a:t>1</a:t>
-            </a:r>
-            <a:endParaRPr lang="en-US" sz="1200" dirty="0"/>
-          </a:p>
-        </p:txBody>
-      </p:sp>
-      <p:sp>
-        <p:nvSpPr>
-          <p:cNvPr id="9" name="Shape 6">
-            <a:extLst>
-              <a:ext uri="{FF2B5EF4-FFF2-40B4-BE49-F238E27FC236}">
-                <a16:creationId xmlns:a16="http://schemas.microsoft.com/office/drawing/2014/main" id="{87156E7B-B4D1-D7FF-91E2-5D70CA1128A1}"/>
-              </a:ext>
-            </a:extLst>
-          </p:cNvPr>
-          <p:cNvSpPr/>
-          <p:nvPr/>
-        </p:nvSpPr>
-        <p:spPr>
-          <a:xfrm>
-            <a:off x="8082013" y="2961373"/>
-            <a:ext cx="426720" cy="426720"/>
-          </a:xfrm>
-          <a:prstGeom prst="rect">
-            <a:avLst/>
-          </a:prstGeom>
-          <a:solidFill>
-            <a:srgbClr val="F5F5F5"/>
-          </a:solidFill>
-          <a:ln w="12700">
-            <a:solidFill>
-              <a:srgbClr val="030A18"/>
-            </a:solidFill>
-            <a:prstDash val="solid"/>
-          </a:ln>
-        </p:spPr>
-        <p:txBody>
-          <a:bodyPr/>
-          <a:lstStyle/>
-          <a:p>
-            <a:endParaRPr sz="2400"/>
-          </a:p>
-        </p:txBody>
-      </p:sp>
-      <p:sp>
-        <p:nvSpPr>
-          <p:cNvPr id="10" name="Text 7">
-            <a:extLst>
-              <a:ext uri="{FF2B5EF4-FFF2-40B4-BE49-F238E27FC236}">
-                <a16:creationId xmlns:a16="http://schemas.microsoft.com/office/drawing/2014/main" id="{8DBD23F4-327B-5850-98BA-75E406418CA3}"/>
-              </a:ext>
-            </a:extLst>
-          </p:cNvPr>
-          <p:cNvSpPr/>
-          <p:nvPr/>
-        </p:nvSpPr>
-        <p:spPr>
-          <a:xfrm>
-            <a:off x="8082013" y="3058909"/>
-            <a:ext cx="426720" cy="243840"/>
-          </a:xfrm>
-          <a:prstGeom prst="rect">
-            <a:avLst/>
-          </a:prstGeom>
-          <a:noFill/>
-          <a:ln/>
-        </p:spPr>
-        <p:txBody>
-          <a:bodyPr wrap="square" rtlCol="0" anchor="ctr"/>
-          <a:lstStyle/>
-          <a:p>
-            <a:pPr algn="ctr"/>
-            <a:r>
-              <a:rPr lang="en-US" sz="1200" dirty="0">
-                <a:solidFill>
-                  <a:srgbClr val="030A18"/>
-                </a:solidFill>
-              </a:rPr>
-              <a:t>3</a:t>
-            </a:r>
-            <a:endParaRPr lang="en-US" sz="1200" dirty="0"/>
-          </a:p>
-        </p:txBody>
-      </p:sp>
-      <p:sp>
-        <p:nvSpPr>
-          <p:cNvPr id="11" name="Shape 8">
-            <a:extLst>
-              <a:ext uri="{FF2B5EF4-FFF2-40B4-BE49-F238E27FC236}">
-                <a16:creationId xmlns:a16="http://schemas.microsoft.com/office/drawing/2014/main" id="{1D130342-92E6-9C99-0EAF-414D0413C7A7}"/>
-              </a:ext>
-            </a:extLst>
-          </p:cNvPr>
-          <p:cNvSpPr/>
-          <p:nvPr/>
-        </p:nvSpPr>
-        <p:spPr>
-          <a:xfrm>
-            <a:off x="8508733" y="2961373"/>
-            <a:ext cx="426720" cy="426720"/>
-          </a:xfrm>
-          <a:prstGeom prst="rect">
-            <a:avLst/>
-          </a:prstGeom>
-          <a:solidFill>
-            <a:srgbClr val="F5F5F5"/>
-          </a:solidFill>
-          <a:ln w="12700">
-            <a:solidFill>
-              <a:srgbClr val="030A18"/>
-            </a:solidFill>
-            <a:prstDash val="solid"/>
-          </a:ln>
-        </p:spPr>
-        <p:txBody>
-          <a:bodyPr/>
-          <a:lstStyle/>
-          <a:p>
-            <a:endParaRPr sz="2400"/>
-          </a:p>
-        </p:txBody>
-      </p:sp>
-      <p:sp>
-        <p:nvSpPr>
-          <p:cNvPr id="12" name="Text 9">
-            <a:extLst>
-              <a:ext uri="{FF2B5EF4-FFF2-40B4-BE49-F238E27FC236}">
-                <a16:creationId xmlns:a16="http://schemas.microsoft.com/office/drawing/2014/main" id="{9F1B8A2F-1944-28B7-0AFA-DBA3130A065C}"/>
-              </a:ext>
-            </a:extLst>
-          </p:cNvPr>
-          <p:cNvSpPr/>
-          <p:nvPr/>
-        </p:nvSpPr>
-        <p:spPr>
-          <a:xfrm>
-            <a:off x="8508733" y="3058909"/>
-            <a:ext cx="426720" cy="243840"/>
-          </a:xfrm>
-          <a:prstGeom prst="rect">
-            <a:avLst/>
-          </a:prstGeom>
-          <a:noFill/>
-          <a:ln/>
-        </p:spPr>
-        <p:txBody>
-          <a:bodyPr wrap="square" rtlCol="0" anchor="ctr"/>
-          <a:lstStyle/>
-          <a:p>
-            <a:pPr algn="ctr"/>
-            <a:r>
-              <a:rPr lang="en-US" sz="1200" dirty="0">
-                <a:solidFill>
-                  <a:srgbClr val="030A18"/>
-                </a:solidFill>
-              </a:rPr>
-              <a:t>2</a:t>
-            </a:r>
-            <a:endParaRPr lang="en-US" sz="1200" dirty="0"/>
-          </a:p>
-        </p:txBody>
-      </p:sp>
-      <p:sp>
-        <p:nvSpPr>
-          <p:cNvPr id="13" name="Shape 10">
-            <a:extLst>
-              <a:ext uri="{FF2B5EF4-FFF2-40B4-BE49-F238E27FC236}">
-                <a16:creationId xmlns:a16="http://schemas.microsoft.com/office/drawing/2014/main" id="{94C8E430-9C61-9093-292C-47373B1A2D59}"/>
-              </a:ext>
-            </a:extLst>
-          </p:cNvPr>
-          <p:cNvSpPr/>
-          <p:nvPr/>
-        </p:nvSpPr>
-        <p:spPr>
-          <a:xfrm>
-            <a:off x="7228573" y="3388093"/>
-            <a:ext cx="426720" cy="426720"/>
-          </a:xfrm>
-          <a:prstGeom prst="rect">
-            <a:avLst/>
-          </a:prstGeom>
-          <a:solidFill>
-            <a:srgbClr val="F5F5F5"/>
-          </a:solidFill>
-          <a:ln w="12700">
-            <a:solidFill>
-              <a:srgbClr val="030A18"/>
-            </a:solidFill>
-            <a:prstDash val="solid"/>
-          </a:ln>
-        </p:spPr>
-        <p:txBody>
-          <a:bodyPr/>
-          <a:lstStyle/>
-          <a:p>
-            <a:endParaRPr sz="2400"/>
-          </a:p>
-        </p:txBody>
-      </p:sp>
-      <p:sp>
-        <p:nvSpPr>
-          <p:cNvPr id="14" name="Text 11">
-            <a:extLst>
-              <a:ext uri="{FF2B5EF4-FFF2-40B4-BE49-F238E27FC236}">
-                <a16:creationId xmlns:a16="http://schemas.microsoft.com/office/drawing/2014/main" id="{5A60D64A-C848-F9C9-3A70-6CADB8B18D80}"/>
-              </a:ext>
-            </a:extLst>
-          </p:cNvPr>
-          <p:cNvSpPr/>
-          <p:nvPr/>
-        </p:nvSpPr>
-        <p:spPr>
-          <a:xfrm>
-            <a:off x="7228573" y="3485629"/>
-            <a:ext cx="426720" cy="243840"/>
-          </a:xfrm>
-          <a:prstGeom prst="rect">
-            <a:avLst/>
-          </a:prstGeom>
-          <a:noFill/>
-          <a:ln/>
-        </p:spPr>
-        <p:txBody>
-          <a:bodyPr wrap="square" rtlCol="0" anchor="ctr"/>
-          <a:lstStyle/>
-          <a:p>
-            <a:pPr algn="ctr"/>
-            <a:r>
-              <a:rPr lang="en-US" sz="1200" dirty="0">
-                <a:solidFill>
-                  <a:srgbClr val="030A18"/>
-                </a:solidFill>
-              </a:rPr>
-              <a:t>0</a:t>
-            </a:r>
-            <a:endParaRPr lang="en-US" sz="1200" dirty="0"/>
-          </a:p>
-        </p:txBody>
-      </p:sp>
-      <p:sp>
-        <p:nvSpPr>
-          <p:cNvPr id="15" name="Shape 12">
-            <a:extLst>
-              <a:ext uri="{FF2B5EF4-FFF2-40B4-BE49-F238E27FC236}">
-                <a16:creationId xmlns:a16="http://schemas.microsoft.com/office/drawing/2014/main" id="{486E60F7-0AF2-13E7-D4F8-53002FF41D63}"/>
-              </a:ext>
-            </a:extLst>
-          </p:cNvPr>
-          <p:cNvSpPr/>
-          <p:nvPr/>
-        </p:nvSpPr>
-        <p:spPr>
-          <a:xfrm>
-            <a:off x="7655293" y="3388093"/>
-            <a:ext cx="426720" cy="426720"/>
-          </a:xfrm>
-          <a:prstGeom prst="rect">
-            <a:avLst/>
-          </a:prstGeom>
-          <a:solidFill>
-            <a:srgbClr val="F5F5F5"/>
-          </a:solidFill>
-          <a:ln w="12700">
-            <a:solidFill>
-              <a:srgbClr val="030A18"/>
-            </a:solidFill>
-            <a:prstDash val="solid"/>
-          </a:ln>
-        </p:spPr>
-        <p:txBody>
-          <a:bodyPr/>
-          <a:lstStyle/>
-          <a:p>
-            <a:endParaRPr sz="2400"/>
-          </a:p>
-        </p:txBody>
-      </p:sp>
-      <p:sp>
-        <p:nvSpPr>
-          <p:cNvPr id="16" name="Text 13">
-            <a:extLst>
-              <a:ext uri="{FF2B5EF4-FFF2-40B4-BE49-F238E27FC236}">
-                <a16:creationId xmlns:a16="http://schemas.microsoft.com/office/drawing/2014/main" id="{0A9F5150-DBC2-4A76-4EC8-71BEDB8CD3AB}"/>
-              </a:ext>
-            </a:extLst>
-          </p:cNvPr>
-          <p:cNvSpPr/>
-          <p:nvPr/>
-        </p:nvSpPr>
-        <p:spPr>
-          <a:xfrm>
-            <a:off x="7655293" y="3485629"/>
-            <a:ext cx="426720" cy="243840"/>
-          </a:xfrm>
-          <a:prstGeom prst="rect">
-            <a:avLst/>
-          </a:prstGeom>
-          <a:noFill/>
-          <a:ln/>
-        </p:spPr>
-        <p:txBody>
-          <a:bodyPr wrap="square" rtlCol="0" anchor="ctr"/>
-          <a:lstStyle/>
-          <a:p>
-            <a:pPr algn="ctr"/>
-            <a:r>
-              <a:rPr lang="en-US" sz="1200" dirty="0">
-                <a:solidFill>
-                  <a:srgbClr val="030A18"/>
-                </a:solidFill>
-              </a:rPr>
-              <a:t>4</a:t>
-            </a:r>
-            <a:endParaRPr lang="en-US" sz="1200" dirty="0"/>
-          </a:p>
-        </p:txBody>
-      </p:sp>
-      <p:sp>
-        <p:nvSpPr>
-          <p:cNvPr id="17" name="Shape 14">
-            <a:extLst>
-              <a:ext uri="{FF2B5EF4-FFF2-40B4-BE49-F238E27FC236}">
-                <a16:creationId xmlns:a16="http://schemas.microsoft.com/office/drawing/2014/main" id="{C370DD77-AF7D-8826-908C-CBB05470B034}"/>
-              </a:ext>
-            </a:extLst>
-          </p:cNvPr>
-          <p:cNvSpPr/>
-          <p:nvPr/>
-        </p:nvSpPr>
-        <p:spPr>
-          <a:xfrm>
-            <a:off x="8082013" y="3388093"/>
-            <a:ext cx="426720" cy="426720"/>
-          </a:xfrm>
-          <a:prstGeom prst="rect">
-            <a:avLst/>
-          </a:prstGeom>
-          <a:solidFill>
-            <a:srgbClr val="F5F5F5"/>
-          </a:solidFill>
-          <a:ln w="12700">
-            <a:solidFill>
-              <a:srgbClr val="030A18"/>
-            </a:solidFill>
-            <a:prstDash val="solid"/>
-          </a:ln>
-        </p:spPr>
-        <p:txBody>
-          <a:bodyPr/>
-          <a:lstStyle/>
-          <a:p>
-            <a:endParaRPr sz="2400"/>
-          </a:p>
-        </p:txBody>
-      </p:sp>
-      <p:sp>
-        <p:nvSpPr>
-          <p:cNvPr id="18" name="Text 15">
-            <a:extLst>
-              <a:ext uri="{FF2B5EF4-FFF2-40B4-BE49-F238E27FC236}">
-                <a16:creationId xmlns:a16="http://schemas.microsoft.com/office/drawing/2014/main" id="{D693044F-6EE5-706B-5250-67FDF4AA39AB}"/>
-              </a:ext>
-            </a:extLst>
-          </p:cNvPr>
-          <p:cNvSpPr/>
-          <p:nvPr/>
-        </p:nvSpPr>
-        <p:spPr>
-          <a:xfrm>
-            <a:off x="8082013" y="3485629"/>
-            <a:ext cx="426720" cy="243840"/>
-          </a:xfrm>
-          <a:prstGeom prst="rect">
-            <a:avLst/>
-          </a:prstGeom>
-          <a:noFill/>
-          <a:ln/>
-        </p:spPr>
-        <p:txBody>
-          <a:bodyPr wrap="square" rtlCol="0" anchor="ctr"/>
-          <a:lstStyle/>
-          <a:p>
-            <a:pPr algn="ctr"/>
-            <a:r>
-              <a:rPr lang="en-US" sz="1200" dirty="0">
-                <a:solidFill>
-                  <a:srgbClr val="030A18"/>
-                </a:solidFill>
-              </a:rPr>
-              <a:t>5</a:t>
-            </a:r>
-            <a:endParaRPr lang="en-US" sz="1200" dirty="0"/>
-          </a:p>
-        </p:txBody>
-      </p:sp>
-      <p:sp>
-        <p:nvSpPr>
-          <p:cNvPr id="19" name="Shape 16">
-            <a:extLst>
-              <a:ext uri="{FF2B5EF4-FFF2-40B4-BE49-F238E27FC236}">
-                <a16:creationId xmlns:a16="http://schemas.microsoft.com/office/drawing/2014/main" id="{E6CE0074-18E9-C27E-D694-3CD6E6FAE97C}"/>
-              </a:ext>
-            </a:extLst>
-          </p:cNvPr>
-          <p:cNvSpPr/>
-          <p:nvPr/>
-        </p:nvSpPr>
-        <p:spPr>
-          <a:xfrm>
-            <a:off x="8508733" y="3388093"/>
-            <a:ext cx="426720" cy="426720"/>
-          </a:xfrm>
-          <a:prstGeom prst="rect">
-            <a:avLst/>
-          </a:prstGeom>
-          <a:solidFill>
-            <a:srgbClr val="F5F5F5"/>
-          </a:solidFill>
-          <a:ln w="12700">
-            <a:solidFill>
-              <a:srgbClr val="030A18"/>
-            </a:solidFill>
-            <a:prstDash val="solid"/>
-          </a:ln>
-        </p:spPr>
-        <p:txBody>
-          <a:bodyPr/>
-          <a:lstStyle/>
-          <a:p>
-            <a:endParaRPr sz="2400"/>
-          </a:p>
-        </p:txBody>
-      </p:sp>
-      <p:sp>
-        <p:nvSpPr>
-          <p:cNvPr id="20" name="Text 17">
-            <a:extLst>
-              <a:ext uri="{FF2B5EF4-FFF2-40B4-BE49-F238E27FC236}">
-                <a16:creationId xmlns:a16="http://schemas.microsoft.com/office/drawing/2014/main" id="{FB4D691C-AFAD-78A5-340B-235A1D3C125D}"/>
-              </a:ext>
-            </a:extLst>
-          </p:cNvPr>
-          <p:cNvSpPr/>
-          <p:nvPr/>
-        </p:nvSpPr>
-        <p:spPr>
-          <a:xfrm>
-            <a:off x="8508733" y="3485629"/>
-            <a:ext cx="426720" cy="243840"/>
-          </a:xfrm>
-          <a:prstGeom prst="rect">
-            <a:avLst/>
-          </a:prstGeom>
-          <a:noFill/>
-          <a:ln/>
-        </p:spPr>
-        <p:txBody>
-          <a:bodyPr wrap="square" rtlCol="0" anchor="ctr"/>
-          <a:lstStyle/>
-          <a:p>
-            <a:pPr algn="ctr"/>
-            <a:r>
-              <a:rPr lang="en-US" sz="1200" dirty="0">
-                <a:solidFill>
-                  <a:srgbClr val="030A18"/>
-                </a:solidFill>
-              </a:rPr>
-              <a:t>1</a:t>
-            </a:r>
-            <a:endParaRPr lang="en-US" sz="1200" dirty="0"/>
-          </a:p>
-        </p:txBody>
-      </p:sp>
-      <p:sp>
-        <p:nvSpPr>
-          <p:cNvPr id="21" name="Shape 18">
-            <a:extLst>
-              <a:ext uri="{FF2B5EF4-FFF2-40B4-BE49-F238E27FC236}">
-                <a16:creationId xmlns:a16="http://schemas.microsoft.com/office/drawing/2014/main" id="{A68BC135-88EA-C434-5794-DF158B13B19F}"/>
-              </a:ext>
-            </a:extLst>
-          </p:cNvPr>
-          <p:cNvSpPr/>
-          <p:nvPr/>
-        </p:nvSpPr>
-        <p:spPr>
-          <a:xfrm>
-            <a:off x="7228573" y="3814813"/>
-            <a:ext cx="426720" cy="426720"/>
-          </a:xfrm>
-          <a:prstGeom prst="rect">
-            <a:avLst/>
-          </a:prstGeom>
-          <a:solidFill>
-            <a:srgbClr val="F5F5F5"/>
-          </a:solidFill>
-          <a:ln w="12700">
-            <a:solidFill>
-              <a:srgbClr val="030A18"/>
-            </a:solidFill>
-            <a:prstDash val="solid"/>
-          </a:ln>
-        </p:spPr>
-        <p:txBody>
-          <a:bodyPr/>
-          <a:lstStyle/>
-          <a:p>
-            <a:endParaRPr sz="2400"/>
-          </a:p>
-        </p:txBody>
-      </p:sp>
-      <p:sp>
-        <p:nvSpPr>
-          <p:cNvPr id="22" name="Text 19">
-            <a:extLst>
-              <a:ext uri="{FF2B5EF4-FFF2-40B4-BE49-F238E27FC236}">
-                <a16:creationId xmlns:a16="http://schemas.microsoft.com/office/drawing/2014/main" id="{2B115CE2-76C7-EFCC-3023-976AF7E2E03A}"/>
-              </a:ext>
-            </a:extLst>
-          </p:cNvPr>
-          <p:cNvSpPr/>
-          <p:nvPr/>
-        </p:nvSpPr>
-        <p:spPr>
-          <a:xfrm>
-            <a:off x="7228573" y="3912349"/>
-            <a:ext cx="426720" cy="243840"/>
-          </a:xfrm>
-          <a:prstGeom prst="rect">
-            <a:avLst/>
-          </a:prstGeom>
-          <a:noFill/>
-          <a:ln/>
-        </p:spPr>
-        <p:txBody>
-          <a:bodyPr wrap="square" rtlCol="0" anchor="ctr"/>
-          <a:lstStyle/>
-          <a:p>
-            <a:pPr algn="ctr"/>
-            <a:r>
-              <a:rPr lang="en-US" sz="1200" dirty="0">
-                <a:solidFill>
-                  <a:srgbClr val="030A18"/>
-                </a:solidFill>
-              </a:rPr>
-              <a:t>1</a:t>
-            </a:r>
-            <a:endParaRPr lang="en-US" sz="1200" dirty="0"/>
-          </a:p>
-        </p:txBody>
-      </p:sp>
-      <p:sp>
-        <p:nvSpPr>
-          <p:cNvPr id="23" name="Shape 20">
-            <a:extLst>
-              <a:ext uri="{FF2B5EF4-FFF2-40B4-BE49-F238E27FC236}">
-                <a16:creationId xmlns:a16="http://schemas.microsoft.com/office/drawing/2014/main" id="{917020C1-4221-1B1F-FB08-C6387E8BF8E9}"/>
-              </a:ext>
-            </a:extLst>
-          </p:cNvPr>
-          <p:cNvSpPr/>
-          <p:nvPr/>
-        </p:nvSpPr>
-        <p:spPr>
-          <a:xfrm>
-            <a:off x="7655293" y="3814813"/>
-            <a:ext cx="426720" cy="426720"/>
-          </a:xfrm>
-          <a:prstGeom prst="rect">
-            <a:avLst/>
-          </a:prstGeom>
-          <a:solidFill>
-            <a:srgbClr val="F5F5F5"/>
-          </a:solidFill>
-          <a:ln w="12700">
-            <a:solidFill>
-              <a:srgbClr val="030A18"/>
-            </a:solidFill>
-            <a:prstDash val="solid"/>
-          </a:ln>
-        </p:spPr>
-        <p:txBody>
-          <a:bodyPr/>
-          <a:lstStyle/>
-          <a:p>
-            <a:endParaRPr sz="2400"/>
-          </a:p>
-        </p:txBody>
-      </p:sp>
-      <p:sp>
-        <p:nvSpPr>
-          <p:cNvPr id="24" name="Text 21">
-            <a:extLst>
-              <a:ext uri="{FF2B5EF4-FFF2-40B4-BE49-F238E27FC236}">
-                <a16:creationId xmlns:a16="http://schemas.microsoft.com/office/drawing/2014/main" id="{772DD5BE-2427-FAA7-1983-2CDB43BEBA25}"/>
-              </a:ext>
-            </a:extLst>
-          </p:cNvPr>
-          <p:cNvSpPr/>
-          <p:nvPr/>
-        </p:nvSpPr>
-        <p:spPr>
-          <a:xfrm>
-            <a:off x="7655293" y="3912349"/>
-            <a:ext cx="426720" cy="243840"/>
-          </a:xfrm>
-          <a:prstGeom prst="rect">
-            <a:avLst/>
-          </a:prstGeom>
-          <a:noFill/>
-          <a:ln/>
-        </p:spPr>
-        <p:txBody>
-          <a:bodyPr wrap="square" rtlCol="0" anchor="ctr"/>
-          <a:lstStyle/>
-          <a:p>
-            <a:pPr algn="ctr"/>
-            <a:r>
-              <a:rPr lang="en-US" sz="1200" dirty="0">
-                <a:solidFill>
-                  <a:srgbClr val="030A18"/>
-                </a:solidFill>
-              </a:rPr>
-              <a:t>2</a:t>
-            </a:r>
-            <a:endParaRPr lang="en-US" sz="1200" dirty="0"/>
-          </a:p>
-        </p:txBody>
-      </p:sp>
-      <p:sp>
-        <p:nvSpPr>
-          <p:cNvPr id="25" name="Shape 22">
-            <a:extLst>
-              <a:ext uri="{FF2B5EF4-FFF2-40B4-BE49-F238E27FC236}">
-                <a16:creationId xmlns:a16="http://schemas.microsoft.com/office/drawing/2014/main" id="{B75FDAD9-5814-E095-A41D-C885D0B85928}"/>
-              </a:ext>
-            </a:extLst>
-          </p:cNvPr>
-          <p:cNvSpPr/>
-          <p:nvPr/>
-        </p:nvSpPr>
-        <p:spPr>
-          <a:xfrm>
-            <a:off x="8082013" y="3814813"/>
-            <a:ext cx="426720" cy="426720"/>
-          </a:xfrm>
-          <a:prstGeom prst="rect">
-            <a:avLst/>
-          </a:prstGeom>
-          <a:solidFill>
-            <a:srgbClr val="F5F5F5"/>
-          </a:solidFill>
-          <a:ln w="12700">
-            <a:solidFill>
-              <a:srgbClr val="030A18"/>
-            </a:solidFill>
-            <a:prstDash val="solid"/>
-          </a:ln>
-        </p:spPr>
-        <p:txBody>
-          <a:bodyPr/>
-          <a:lstStyle/>
-          <a:p>
-            <a:endParaRPr sz="2400"/>
-          </a:p>
-        </p:txBody>
-      </p:sp>
-      <p:sp>
-        <p:nvSpPr>
-          <p:cNvPr id="26" name="Text 23">
-            <a:extLst>
-              <a:ext uri="{FF2B5EF4-FFF2-40B4-BE49-F238E27FC236}">
-                <a16:creationId xmlns:a16="http://schemas.microsoft.com/office/drawing/2014/main" id="{91B9D523-D2E5-1FD1-E1E0-FD753AB8D58A}"/>
-              </a:ext>
-            </a:extLst>
-          </p:cNvPr>
-          <p:cNvSpPr/>
-          <p:nvPr/>
-        </p:nvSpPr>
-        <p:spPr>
-          <a:xfrm>
-            <a:off x="8082013" y="3912349"/>
-            <a:ext cx="426720" cy="243840"/>
-          </a:xfrm>
-          <a:prstGeom prst="rect">
-            <a:avLst/>
-          </a:prstGeom>
-          <a:noFill/>
-          <a:ln/>
-        </p:spPr>
-        <p:txBody>
-          <a:bodyPr wrap="square" rtlCol="0" anchor="ctr"/>
-          <a:lstStyle/>
-          <a:p>
-            <a:pPr algn="ctr"/>
-            <a:r>
-              <a:rPr lang="en-US" sz="1200" dirty="0">
-                <a:solidFill>
-                  <a:srgbClr val="030A18"/>
-                </a:solidFill>
-              </a:rPr>
-              <a:t>0</a:t>
-            </a:r>
-            <a:endParaRPr lang="en-US" sz="1200" dirty="0"/>
-          </a:p>
-        </p:txBody>
-      </p:sp>
-      <p:sp>
-        <p:nvSpPr>
-          <p:cNvPr id="27" name="Shape 24">
-            <a:extLst>
-              <a:ext uri="{FF2B5EF4-FFF2-40B4-BE49-F238E27FC236}">
-                <a16:creationId xmlns:a16="http://schemas.microsoft.com/office/drawing/2014/main" id="{000DBCCB-D339-904A-5FB4-E5E946A1FEFF}"/>
-              </a:ext>
-            </a:extLst>
-          </p:cNvPr>
-          <p:cNvSpPr/>
-          <p:nvPr/>
-        </p:nvSpPr>
-        <p:spPr>
-          <a:xfrm>
-            <a:off x="8508733" y="3814813"/>
-            <a:ext cx="426720" cy="426720"/>
-          </a:xfrm>
-          <a:prstGeom prst="rect">
-            <a:avLst/>
-          </a:prstGeom>
-          <a:solidFill>
-            <a:srgbClr val="F5F5F5"/>
-          </a:solidFill>
-          <a:ln w="12700">
-            <a:solidFill>
-              <a:srgbClr val="030A18"/>
-            </a:solidFill>
-            <a:prstDash val="solid"/>
-          </a:ln>
-        </p:spPr>
-        <p:txBody>
-          <a:bodyPr/>
-          <a:lstStyle/>
-          <a:p>
-            <a:endParaRPr sz="2400"/>
-          </a:p>
-        </p:txBody>
-      </p:sp>
-      <p:sp>
-        <p:nvSpPr>
-          <p:cNvPr id="28" name="Text 25">
-            <a:extLst>
-              <a:ext uri="{FF2B5EF4-FFF2-40B4-BE49-F238E27FC236}">
-                <a16:creationId xmlns:a16="http://schemas.microsoft.com/office/drawing/2014/main" id="{370FF1DF-9FA1-18B0-869E-378B514D13F4}"/>
-              </a:ext>
-            </a:extLst>
-          </p:cNvPr>
-          <p:cNvSpPr/>
-          <p:nvPr/>
-        </p:nvSpPr>
-        <p:spPr>
-          <a:xfrm>
-            <a:off x="8508733" y="3912349"/>
-            <a:ext cx="426720" cy="243840"/>
-          </a:xfrm>
-          <a:prstGeom prst="rect">
-            <a:avLst/>
-          </a:prstGeom>
-          <a:noFill/>
-          <a:ln/>
-        </p:spPr>
-        <p:txBody>
-          <a:bodyPr wrap="square" rtlCol="0" anchor="ctr"/>
-          <a:lstStyle/>
-          <a:p>
-            <a:pPr algn="ctr"/>
-            <a:r>
-              <a:rPr lang="en-US" sz="1200" dirty="0">
-                <a:solidFill>
-                  <a:srgbClr val="030A18"/>
-                </a:solidFill>
-              </a:rPr>
-              <a:t>3</a:t>
-            </a:r>
-            <a:endParaRPr lang="en-US" sz="1200" dirty="0"/>
-          </a:p>
-        </p:txBody>
-      </p:sp>
-      <p:sp>
-        <p:nvSpPr>
-          <p:cNvPr id="29" name="Shape 26">
-            <a:extLst>
-              <a:ext uri="{FF2B5EF4-FFF2-40B4-BE49-F238E27FC236}">
-                <a16:creationId xmlns:a16="http://schemas.microsoft.com/office/drawing/2014/main" id="{7458D58F-E10C-AD9D-E706-A70E330E4B45}"/>
-              </a:ext>
-            </a:extLst>
-          </p:cNvPr>
-          <p:cNvSpPr/>
-          <p:nvPr/>
-        </p:nvSpPr>
-        <p:spPr>
-          <a:xfrm>
-            <a:off x="7228573" y="4241533"/>
-            <a:ext cx="426720" cy="426720"/>
-          </a:xfrm>
-          <a:prstGeom prst="rect">
-            <a:avLst/>
-          </a:prstGeom>
-          <a:solidFill>
-            <a:srgbClr val="F5F5F5"/>
-          </a:solidFill>
-          <a:ln w="12700">
-            <a:solidFill>
-              <a:srgbClr val="030A18"/>
-            </a:solidFill>
-            <a:prstDash val="solid"/>
-          </a:ln>
-        </p:spPr>
-        <p:txBody>
-          <a:bodyPr/>
-          <a:lstStyle/>
-          <a:p>
-            <a:endParaRPr sz="2400"/>
-          </a:p>
-        </p:txBody>
-      </p:sp>
-      <p:sp>
-        <p:nvSpPr>
-          <p:cNvPr id="30" name="Text 27">
-            <a:extLst>
-              <a:ext uri="{FF2B5EF4-FFF2-40B4-BE49-F238E27FC236}">
-                <a16:creationId xmlns:a16="http://schemas.microsoft.com/office/drawing/2014/main" id="{C9628444-7D52-BD63-0EF5-92CD7DA3B353}"/>
-              </a:ext>
-            </a:extLst>
-          </p:cNvPr>
-          <p:cNvSpPr/>
-          <p:nvPr/>
-        </p:nvSpPr>
-        <p:spPr>
-          <a:xfrm>
-            <a:off x="7228573" y="4339069"/>
-            <a:ext cx="426720" cy="243840"/>
-          </a:xfrm>
-          <a:prstGeom prst="rect">
-            <a:avLst/>
-          </a:prstGeom>
-          <a:noFill/>
-          <a:ln/>
-        </p:spPr>
-        <p:txBody>
-          <a:bodyPr wrap="square" rtlCol="0" anchor="ctr"/>
-          <a:lstStyle/>
-          <a:p>
-            <a:pPr algn="ctr"/>
-            <a:r>
-              <a:rPr lang="en-US" sz="1200" dirty="0">
-                <a:solidFill>
-                  <a:srgbClr val="030A18"/>
-                </a:solidFill>
-              </a:rPr>
-              <a:t>2</a:t>
-            </a:r>
-            <a:endParaRPr lang="en-US" sz="1200" dirty="0"/>
-          </a:p>
-        </p:txBody>
-      </p:sp>
-      <p:sp>
-        <p:nvSpPr>
-          <p:cNvPr id="31" name="Shape 28">
-            <a:extLst>
-              <a:ext uri="{FF2B5EF4-FFF2-40B4-BE49-F238E27FC236}">
-                <a16:creationId xmlns:a16="http://schemas.microsoft.com/office/drawing/2014/main" id="{589E11CC-1153-A12A-2275-D79A3EE0DBE7}"/>
-              </a:ext>
-            </a:extLst>
-          </p:cNvPr>
-          <p:cNvSpPr/>
-          <p:nvPr/>
-        </p:nvSpPr>
-        <p:spPr>
-          <a:xfrm>
-            <a:off x="7655293" y="4241533"/>
-            <a:ext cx="426720" cy="426720"/>
-          </a:xfrm>
-          <a:prstGeom prst="rect">
-            <a:avLst/>
-          </a:prstGeom>
-          <a:solidFill>
-            <a:srgbClr val="F5F5F5"/>
-          </a:solidFill>
-          <a:ln w="12700">
-            <a:solidFill>
-              <a:srgbClr val="030A18"/>
-            </a:solidFill>
-            <a:prstDash val="solid"/>
-          </a:ln>
-        </p:spPr>
-        <p:txBody>
-          <a:bodyPr/>
-          <a:lstStyle/>
-          <a:p>
-            <a:endParaRPr sz="2400"/>
-          </a:p>
-        </p:txBody>
-      </p:sp>
-      <p:sp>
-        <p:nvSpPr>
-          <p:cNvPr id="32" name="Text 29">
-            <a:extLst>
-              <a:ext uri="{FF2B5EF4-FFF2-40B4-BE49-F238E27FC236}">
-                <a16:creationId xmlns:a16="http://schemas.microsoft.com/office/drawing/2014/main" id="{55A5A5E1-690B-25C8-0661-20569BA19E89}"/>
-              </a:ext>
-            </a:extLst>
-          </p:cNvPr>
-          <p:cNvSpPr/>
-          <p:nvPr/>
-        </p:nvSpPr>
-        <p:spPr>
-          <a:xfrm>
-            <a:off x="7655293" y="4339069"/>
-            <a:ext cx="426720" cy="243840"/>
-          </a:xfrm>
-          <a:prstGeom prst="rect">
-            <a:avLst/>
-          </a:prstGeom>
-          <a:noFill/>
-          <a:ln/>
-        </p:spPr>
-        <p:txBody>
-          <a:bodyPr wrap="square" rtlCol="0" anchor="ctr"/>
-          <a:lstStyle/>
-          <a:p>
-            <a:pPr algn="ctr"/>
-            <a:r>
-              <a:rPr lang="en-US" sz="1200" dirty="0">
-                <a:solidFill>
-                  <a:srgbClr val="030A18"/>
-                </a:solidFill>
-              </a:rPr>
-              <a:t>1</a:t>
-            </a:r>
-            <a:endParaRPr lang="en-US" sz="1200" dirty="0"/>
-          </a:p>
-        </p:txBody>
-      </p:sp>
-      <p:sp>
-        <p:nvSpPr>
-          <p:cNvPr id="33" name="Shape 30">
-            <a:extLst>
-              <a:ext uri="{FF2B5EF4-FFF2-40B4-BE49-F238E27FC236}">
-                <a16:creationId xmlns:a16="http://schemas.microsoft.com/office/drawing/2014/main" id="{58F766E8-34C6-F928-828C-36C4150A5820}"/>
-              </a:ext>
-            </a:extLst>
-          </p:cNvPr>
-          <p:cNvSpPr/>
-          <p:nvPr/>
-        </p:nvSpPr>
-        <p:spPr>
-          <a:xfrm>
-            <a:off x="8082013" y="4241533"/>
-            <a:ext cx="426720" cy="426720"/>
-          </a:xfrm>
-          <a:prstGeom prst="rect">
-            <a:avLst/>
-          </a:prstGeom>
-          <a:solidFill>
-            <a:srgbClr val="F5F5F5"/>
-          </a:solidFill>
-          <a:ln w="12700">
-            <a:solidFill>
-              <a:srgbClr val="030A18"/>
-            </a:solidFill>
-            <a:prstDash val="solid"/>
-          </a:ln>
-        </p:spPr>
-        <p:txBody>
-          <a:bodyPr/>
-          <a:lstStyle/>
-          <a:p>
-            <a:endParaRPr sz="2400"/>
-          </a:p>
-        </p:txBody>
-      </p:sp>
-      <p:sp>
-        <p:nvSpPr>
-          <p:cNvPr id="34" name="Text 31">
-            <a:extLst>
-              <a:ext uri="{FF2B5EF4-FFF2-40B4-BE49-F238E27FC236}">
-                <a16:creationId xmlns:a16="http://schemas.microsoft.com/office/drawing/2014/main" id="{771FC1BC-D903-E4F5-0FA1-14209F8969A3}"/>
-              </a:ext>
-            </a:extLst>
-          </p:cNvPr>
-          <p:cNvSpPr/>
-          <p:nvPr/>
-        </p:nvSpPr>
-        <p:spPr>
-          <a:xfrm>
-            <a:off x="8082013" y="4339069"/>
-            <a:ext cx="426720" cy="243840"/>
-          </a:xfrm>
-          <a:prstGeom prst="rect">
-            <a:avLst/>
-          </a:prstGeom>
-          <a:noFill/>
-          <a:ln/>
-        </p:spPr>
-        <p:txBody>
-          <a:bodyPr wrap="square" rtlCol="0" anchor="ctr"/>
-          <a:lstStyle/>
-          <a:p>
-            <a:pPr algn="ctr"/>
-            <a:r>
-              <a:rPr lang="en-US" sz="1200" dirty="0">
-                <a:solidFill>
-                  <a:srgbClr val="030A18"/>
-                </a:solidFill>
-              </a:rPr>
-              <a:t>2</a:t>
-            </a:r>
-            <a:endParaRPr lang="en-US" sz="1200" dirty="0"/>
-          </a:p>
-        </p:txBody>
-      </p:sp>
-      <p:sp>
-        <p:nvSpPr>
-          <p:cNvPr id="35" name="Shape 32">
-            <a:extLst>
-              <a:ext uri="{FF2B5EF4-FFF2-40B4-BE49-F238E27FC236}">
-                <a16:creationId xmlns:a16="http://schemas.microsoft.com/office/drawing/2014/main" id="{6A38B4CB-76BB-B85D-497A-2C02B5D7BA35}"/>
-              </a:ext>
-            </a:extLst>
-          </p:cNvPr>
-          <p:cNvSpPr/>
-          <p:nvPr/>
-        </p:nvSpPr>
-        <p:spPr>
-          <a:xfrm>
-            <a:off x="8508733" y="4241533"/>
-            <a:ext cx="426720" cy="426720"/>
-          </a:xfrm>
-          <a:prstGeom prst="rect">
-            <a:avLst/>
-          </a:prstGeom>
-          <a:solidFill>
-            <a:srgbClr val="F5F5F5"/>
-          </a:solidFill>
-          <a:ln w="12700">
-            <a:solidFill>
-              <a:srgbClr val="030A18"/>
-            </a:solidFill>
-            <a:prstDash val="solid"/>
-          </a:ln>
-        </p:spPr>
-        <p:txBody>
-          <a:bodyPr/>
-          <a:lstStyle/>
-          <a:p>
-            <a:endParaRPr sz="2400"/>
-          </a:p>
-        </p:txBody>
-      </p:sp>
-      <p:sp>
-        <p:nvSpPr>
-          <p:cNvPr id="36" name="Text 33">
-            <a:extLst>
-              <a:ext uri="{FF2B5EF4-FFF2-40B4-BE49-F238E27FC236}">
-                <a16:creationId xmlns:a16="http://schemas.microsoft.com/office/drawing/2014/main" id="{7688649E-3B6E-D300-65D7-D836714BAB07}"/>
-              </a:ext>
-            </a:extLst>
-          </p:cNvPr>
-          <p:cNvSpPr/>
-          <p:nvPr/>
-        </p:nvSpPr>
-        <p:spPr>
-          <a:xfrm>
-            <a:off x="8508733" y="4339069"/>
-            <a:ext cx="426720" cy="243840"/>
-          </a:xfrm>
-          <a:prstGeom prst="rect">
-            <a:avLst/>
-          </a:prstGeom>
-          <a:noFill/>
-          <a:ln/>
-        </p:spPr>
-        <p:txBody>
-          <a:bodyPr wrap="square" rtlCol="0" anchor="ctr"/>
-          <a:lstStyle/>
-          <a:p>
-            <a:pPr algn="ctr"/>
-            <a:r>
-              <a:rPr lang="en-US" sz="1200" dirty="0">
-                <a:solidFill>
-                  <a:srgbClr val="030A18"/>
-                </a:solidFill>
-              </a:rPr>
-              <a:t>0</a:t>
-            </a:r>
-            <a:endParaRPr lang="en-US" sz="1200" dirty="0"/>
-          </a:p>
-        </p:txBody>
-      </p:sp>
-      <p:sp>
-        <p:nvSpPr>
-          <p:cNvPr id="37" name="Text 34">
-            <a:extLst>
-              <a:ext uri="{FF2B5EF4-FFF2-40B4-BE49-F238E27FC236}">
-                <a16:creationId xmlns:a16="http://schemas.microsoft.com/office/drawing/2014/main" id="{3DDC93FE-20AF-B8A0-FE3B-CE5C5799C26E}"/>
-              </a:ext>
-            </a:extLst>
-          </p:cNvPr>
-          <p:cNvSpPr/>
-          <p:nvPr/>
-        </p:nvSpPr>
-        <p:spPr>
-          <a:xfrm>
-            <a:off x="7228573" y="2656573"/>
-            <a:ext cx="1706880" cy="365760"/>
-          </a:xfrm>
-          <a:prstGeom prst="rect">
-            <a:avLst/>
-          </a:prstGeom>
-          <a:noFill/>
-          <a:ln/>
-        </p:spPr>
-        <p:txBody>
-          <a:bodyPr wrap="square" rtlCol="0" anchor="ctr"/>
-          <a:lstStyle/>
-          <a:p>
-            <a:r>
-              <a:rPr lang="en-US" sz="1200" dirty="0">
-                <a:solidFill>
-                  <a:srgbClr val="00427A"/>
-                </a:solidFill>
-              </a:rPr>
-              <a:t>Input</a:t>
-            </a:r>
-          </a:p>
-        </p:txBody>
-      </p:sp>
-      <p:sp>
-        <p:nvSpPr>
-          <p:cNvPr id="48" name="Shape 35">
-            <a:extLst>
-              <a:ext uri="{FF2B5EF4-FFF2-40B4-BE49-F238E27FC236}">
-                <a16:creationId xmlns:a16="http://schemas.microsoft.com/office/drawing/2014/main" id="{48A5B68A-6911-6E6C-03D5-93027439E624}"/>
-              </a:ext>
-            </a:extLst>
-          </p:cNvPr>
-          <p:cNvSpPr/>
-          <p:nvPr/>
-        </p:nvSpPr>
-        <p:spPr>
-          <a:xfrm>
-            <a:off x="9535427" y="3388093"/>
-            <a:ext cx="426720" cy="426720"/>
-          </a:xfrm>
-          <a:prstGeom prst="rect">
-            <a:avLst/>
-          </a:prstGeom>
-          <a:solidFill>
-            <a:srgbClr val="F5F5F5"/>
-          </a:solidFill>
-          <a:ln w="12700">
-            <a:solidFill>
-              <a:srgbClr val="030A18"/>
-            </a:solidFill>
-            <a:prstDash val="solid"/>
-          </a:ln>
-        </p:spPr>
-        <p:txBody>
-          <a:bodyPr/>
-          <a:lstStyle/>
-          <a:p>
-            <a:endParaRPr sz="2400"/>
-          </a:p>
-        </p:txBody>
-      </p:sp>
-      <p:sp>
-        <p:nvSpPr>
-          <p:cNvPr id="49" name="Text 36">
-            <a:extLst>
-              <a:ext uri="{FF2B5EF4-FFF2-40B4-BE49-F238E27FC236}">
-                <a16:creationId xmlns:a16="http://schemas.microsoft.com/office/drawing/2014/main" id="{9079928E-2F96-83AB-B079-2926D384B38C}"/>
-              </a:ext>
-            </a:extLst>
-          </p:cNvPr>
-          <p:cNvSpPr/>
-          <p:nvPr/>
-        </p:nvSpPr>
-        <p:spPr>
-          <a:xfrm>
-            <a:off x="9535427" y="3485629"/>
-            <a:ext cx="426720" cy="243840"/>
-          </a:xfrm>
-          <a:prstGeom prst="rect">
-            <a:avLst/>
-          </a:prstGeom>
-          <a:noFill/>
-          <a:ln/>
-        </p:spPr>
-        <p:txBody>
-          <a:bodyPr wrap="square" rtlCol="0" anchor="ctr"/>
-          <a:lstStyle/>
-          <a:p>
-            <a:pPr algn="ctr"/>
-            <a:r>
-              <a:rPr lang="en-US" sz="1200" dirty="0">
-                <a:solidFill>
-                  <a:srgbClr val="030A18"/>
-                </a:solidFill>
-              </a:rPr>
-              <a:t>4</a:t>
-            </a:r>
-            <a:endParaRPr lang="en-US" sz="1200" dirty="0"/>
-          </a:p>
-        </p:txBody>
-      </p:sp>
-      <p:sp>
-        <p:nvSpPr>
-          <p:cNvPr id="50" name="Shape 37">
-            <a:extLst>
-              <a:ext uri="{FF2B5EF4-FFF2-40B4-BE49-F238E27FC236}">
-                <a16:creationId xmlns:a16="http://schemas.microsoft.com/office/drawing/2014/main" id="{FBED7779-D4BA-58BB-E6D8-74CDE9B41A32}"/>
-              </a:ext>
-            </a:extLst>
-          </p:cNvPr>
-          <p:cNvSpPr/>
-          <p:nvPr/>
-        </p:nvSpPr>
-        <p:spPr>
-          <a:xfrm>
-            <a:off x="9962147" y="3388093"/>
-            <a:ext cx="426720" cy="426720"/>
-          </a:xfrm>
-          <a:prstGeom prst="rect">
-            <a:avLst/>
-          </a:prstGeom>
-          <a:solidFill>
-            <a:srgbClr val="F5F5F5"/>
-          </a:solidFill>
-          <a:ln w="12700">
-            <a:solidFill>
-              <a:srgbClr val="030A18"/>
-            </a:solidFill>
-            <a:prstDash val="solid"/>
-          </a:ln>
-        </p:spPr>
-        <p:txBody>
-          <a:bodyPr/>
-          <a:lstStyle/>
-          <a:p>
-            <a:endParaRPr sz="2400"/>
-          </a:p>
-        </p:txBody>
-      </p:sp>
-      <p:sp>
-        <p:nvSpPr>
-          <p:cNvPr id="51" name="Text 38">
-            <a:extLst>
-              <a:ext uri="{FF2B5EF4-FFF2-40B4-BE49-F238E27FC236}">
-                <a16:creationId xmlns:a16="http://schemas.microsoft.com/office/drawing/2014/main" id="{9F62C963-F503-75F6-3295-AEF5E44CA034}"/>
-              </a:ext>
-            </a:extLst>
-          </p:cNvPr>
-          <p:cNvSpPr/>
-          <p:nvPr/>
-        </p:nvSpPr>
-        <p:spPr>
-          <a:xfrm>
-            <a:off x="9962147" y="3485629"/>
-            <a:ext cx="426720" cy="243840"/>
-          </a:xfrm>
-          <a:prstGeom prst="rect">
-            <a:avLst/>
-          </a:prstGeom>
-          <a:noFill/>
-          <a:ln/>
-        </p:spPr>
-        <p:txBody>
-          <a:bodyPr wrap="square" rtlCol="0" anchor="ctr"/>
-          <a:lstStyle/>
-          <a:p>
-            <a:pPr algn="ctr"/>
-            <a:r>
-              <a:rPr lang="en-US" sz="1200" dirty="0">
-                <a:solidFill>
-                  <a:srgbClr val="030A18"/>
-                </a:solidFill>
-              </a:rPr>
-              <a:t>5</a:t>
-            </a:r>
-            <a:endParaRPr lang="en-US" sz="1200" dirty="0"/>
-          </a:p>
-        </p:txBody>
-      </p:sp>
-      <p:sp>
-        <p:nvSpPr>
-          <p:cNvPr id="52" name="Shape 39">
-            <a:extLst>
-              <a:ext uri="{FF2B5EF4-FFF2-40B4-BE49-F238E27FC236}">
-                <a16:creationId xmlns:a16="http://schemas.microsoft.com/office/drawing/2014/main" id="{40AE0FB7-2E21-BCF2-A19B-9D0837BD2335}"/>
-              </a:ext>
-            </a:extLst>
-          </p:cNvPr>
-          <p:cNvSpPr/>
-          <p:nvPr/>
-        </p:nvSpPr>
-        <p:spPr>
-          <a:xfrm>
-            <a:off x="9535427" y="3814813"/>
-            <a:ext cx="426720" cy="426720"/>
-          </a:xfrm>
-          <a:prstGeom prst="rect">
-            <a:avLst/>
-          </a:prstGeom>
-          <a:solidFill>
-            <a:srgbClr val="F5F5F5"/>
-          </a:solidFill>
-          <a:ln w="12700">
-            <a:solidFill>
-              <a:srgbClr val="030A18"/>
-            </a:solidFill>
-            <a:prstDash val="solid"/>
-          </a:ln>
-        </p:spPr>
-        <p:txBody>
-          <a:bodyPr/>
-          <a:lstStyle/>
-          <a:p>
-            <a:endParaRPr sz="2400"/>
-          </a:p>
-        </p:txBody>
-      </p:sp>
-      <p:sp>
-        <p:nvSpPr>
-          <p:cNvPr id="53" name="Text 40">
-            <a:extLst>
-              <a:ext uri="{FF2B5EF4-FFF2-40B4-BE49-F238E27FC236}">
-                <a16:creationId xmlns:a16="http://schemas.microsoft.com/office/drawing/2014/main" id="{2E5FE61D-BCAE-5CEE-B582-AAAB05F84FCD}"/>
-              </a:ext>
-            </a:extLst>
-          </p:cNvPr>
-          <p:cNvSpPr/>
-          <p:nvPr/>
-        </p:nvSpPr>
-        <p:spPr>
-          <a:xfrm>
-            <a:off x="9535427" y="3912349"/>
-            <a:ext cx="426720" cy="243840"/>
-          </a:xfrm>
-          <a:prstGeom prst="rect">
-            <a:avLst/>
-          </a:prstGeom>
-          <a:noFill/>
-          <a:ln/>
-        </p:spPr>
-        <p:txBody>
-          <a:bodyPr wrap="square" rtlCol="0" anchor="ctr"/>
-          <a:lstStyle/>
-          <a:p>
-            <a:pPr algn="ctr"/>
-            <a:r>
-              <a:rPr lang="en-US" sz="1200" dirty="0">
-                <a:solidFill>
-                  <a:srgbClr val="030A18"/>
-                </a:solidFill>
-              </a:rPr>
-              <a:t>2</a:t>
-            </a:r>
-            <a:endParaRPr lang="en-US" sz="1200" dirty="0"/>
-          </a:p>
-        </p:txBody>
-      </p:sp>
-      <p:sp>
-        <p:nvSpPr>
-          <p:cNvPr id="54" name="Shape 41">
-            <a:extLst>
-              <a:ext uri="{FF2B5EF4-FFF2-40B4-BE49-F238E27FC236}">
-                <a16:creationId xmlns:a16="http://schemas.microsoft.com/office/drawing/2014/main" id="{264D29ED-3E52-4A5E-213A-ACD794DD05A0}"/>
-              </a:ext>
-            </a:extLst>
-          </p:cNvPr>
-          <p:cNvSpPr/>
-          <p:nvPr/>
-        </p:nvSpPr>
-        <p:spPr>
-          <a:xfrm>
-            <a:off x="9962147" y="3814813"/>
-            <a:ext cx="426720" cy="426720"/>
-          </a:xfrm>
-          <a:prstGeom prst="rect">
-            <a:avLst/>
-          </a:prstGeom>
-          <a:solidFill>
-            <a:srgbClr val="F5F5F5"/>
-          </a:solidFill>
-          <a:ln w="12700">
-            <a:solidFill>
-              <a:srgbClr val="030A18"/>
-            </a:solidFill>
-            <a:prstDash val="solid"/>
-          </a:ln>
-        </p:spPr>
-        <p:txBody>
-          <a:bodyPr/>
-          <a:lstStyle/>
-          <a:p>
-            <a:endParaRPr sz="2400"/>
-          </a:p>
-        </p:txBody>
-      </p:sp>
-      <p:sp>
-        <p:nvSpPr>
-          <p:cNvPr id="55" name="Text 42">
-            <a:extLst>
-              <a:ext uri="{FF2B5EF4-FFF2-40B4-BE49-F238E27FC236}">
-                <a16:creationId xmlns:a16="http://schemas.microsoft.com/office/drawing/2014/main" id="{E03F5EB1-CE37-BAA1-D5AD-FE1BB55D7DD8}"/>
-              </a:ext>
-            </a:extLst>
-          </p:cNvPr>
-          <p:cNvSpPr/>
-          <p:nvPr/>
-        </p:nvSpPr>
-        <p:spPr>
-          <a:xfrm>
-            <a:off x="9962147" y="3912349"/>
-            <a:ext cx="426720" cy="243840"/>
-          </a:xfrm>
-          <a:prstGeom prst="rect">
-            <a:avLst/>
-          </a:prstGeom>
-          <a:noFill/>
-          <a:ln/>
-        </p:spPr>
-        <p:txBody>
-          <a:bodyPr wrap="square" rtlCol="0" anchor="ctr"/>
-          <a:lstStyle/>
-          <a:p>
-            <a:pPr algn="ctr"/>
-            <a:r>
-              <a:rPr lang="en-US" sz="1200" dirty="0">
-                <a:solidFill>
-                  <a:srgbClr val="030A18"/>
-                </a:solidFill>
-              </a:rPr>
-              <a:t>3</a:t>
-            </a:r>
-            <a:endParaRPr lang="en-US" sz="1200" dirty="0"/>
-          </a:p>
-        </p:txBody>
-      </p:sp>
-      <p:sp>
-        <p:nvSpPr>
-          <p:cNvPr id="56" name="Text 43">
-            <a:extLst>
-              <a:ext uri="{FF2B5EF4-FFF2-40B4-BE49-F238E27FC236}">
-                <a16:creationId xmlns:a16="http://schemas.microsoft.com/office/drawing/2014/main" id="{E152AE67-A7F2-63FF-EBFF-4CBDE05C5B8E}"/>
-              </a:ext>
-            </a:extLst>
-          </p:cNvPr>
-          <p:cNvSpPr/>
-          <p:nvPr/>
-        </p:nvSpPr>
-        <p:spPr>
-          <a:xfrm>
-            <a:off x="9535427" y="3083293"/>
-            <a:ext cx="956110" cy="365760"/>
-          </a:xfrm>
-          <a:prstGeom prst="rect">
-            <a:avLst/>
-          </a:prstGeom>
-          <a:noFill/>
-          <a:ln/>
-        </p:spPr>
-        <p:txBody>
-          <a:bodyPr wrap="square" rtlCol="0" anchor="ctr"/>
-          <a:lstStyle/>
-          <a:p>
-            <a:r>
-              <a:rPr lang="en-US" sz="1200" dirty="0">
-                <a:solidFill>
-                  <a:srgbClr val="00427A"/>
-                </a:solidFill>
-              </a:rPr>
-              <a:t>Max pooled</a:t>
-            </a:r>
-          </a:p>
-        </p:txBody>
-      </p:sp>
-      <p:sp>
-        <p:nvSpPr>
-          <p:cNvPr id="4" name="Slide Number Placeholder 3">
-            <a:extLst>
-              <a:ext uri="{FF2B5EF4-FFF2-40B4-BE49-F238E27FC236}">
-                <a16:creationId xmlns:a16="http://schemas.microsoft.com/office/drawing/2014/main" id="{B5DF19E7-2149-8422-7D88-B9120CB1892B}"/>
+            <a:r>
+              <a:rPr lang="en-US" dirty="0"/>
+              <a:t>The same ideas extend naturally to higher‑dimensional inputs (2D, 3D, etc.)</a:t>
+            </a:r>
+          </a:p>
+          <a:p>
+            <a:r>
+              <a:rPr lang="en-US" dirty="0"/>
+              <a:t>Pooling layers (next slide) reduce the dimension still further</a:t>
+            </a:r>
+          </a:p>
+        </p:txBody>
+      </p:sp>
+      <p:sp>
+        <p:nvSpPr>
+          <p:cNvPr id="5" name="Slide Number Placeholder 4">
+            <a:extLst>
+              <a:ext uri="{FF2B5EF4-FFF2-40B4-BE49-F238E27FC236}">
+                <a16:creationId xmlns:a16="http://schemas.microsoft.com/office/drawing/2014/main" id="{8810056E-6AF4-DDFC-0070-926AAB917C38}"/>
               </a:ext>
             </a:extLst>
           </p:cNvPr>
@@ -9045,7 +8017,7 @@
     </p:spTree>
     <p:extLst>
       <p:ext uri="{BB962C8B-B14F-4D97-AF65-F5344CB8AC3E}">
-        <p14:creationId xmlns:p14="http://schemas.microsoft.com/office/powerpoint/2010/main" val="1747539307"/>
+        <p14:creationId xmlns:p14="http://schemas.microsoft.com/office/powerpoint/2010/main" val="2150108687"/>
       </p:ext>
     </p:extLst>
   </p:cSld>
@@ -9077,7 +8049,7 @@
           <p:cNvPr id="2" name="Title 1">
             <a:extLst>
               <a:ext uri="{FF2B5EF4-FFF2-40B4-BE49-F238E27FC236}">
-                <a16:creationId xmlns:a16="http://schemas.microsoft.com/office/drawing/2014/main" id="{745389C9-1F2B-A89D-9163-ECBCA75BED39}"/>
+                <a16:creationId xmlns:a16="http://schemas.microsoft.com/office/drawing/2014/main" id="{F2A0BB5D-8484-7D1C-8D08-E797A55A089F}"/>
               </a:ext>
             </a:extLst>
           </p:cNvPr>
@@ -9095,7 +8067,7 @@
           <a:p>
             <a:r>
               <a:rPr lang="en-US" dirty="0"/>
-              <a:t>Next: 2D convolutions</a:t>
+              <a:t>Another layer type: pooling</a:t>
             </a:r>
           </a:p>
         </p:txBody>
@@ -9105,7 +8077,7 @@
           <p:cNvPr id="3" name="Content Placeholder 2">
             <a:extLst>
               <a:ext uri="{FF2B5EF4-FFF2-40B4-BE49-F238E27FC236}">
-                <a16:creationId xmlns:a16="http://schemas.microsoft.com/office/drawing/2014/main" id="{4328A75A-3DD6-2D10-0BD2-B5A8F06FC12C}"/>
+                <a16:creationId xmlns:a16="http://schemas.microsoft.com/office/drawing/2014/main" id="{6099C9F0-739C-8590-1636-3F02DFDC5783}"/>
               </a:ext>
             </a:extLst>
           </p:cNvPr>
@@ -9119,6 +8091,1788 @@
         <p:spPr>
           <a:xfrm>
             <a:off x="838200" y="1825625"/>
+            <a:ext cx="5889859" cy="4149290"/>
+          </a:xfrm>
+        </p:spPr>
+        <p:txBody>
+          <a:bodyPr/>
+          <a:lstStyle/>
+          <a:p>
+            <a:r>
+              <a:rPr lang="en-US" dirty="0"/>
+              <a:t>Pooling down-samples feature maps, </a:t>
+            </a:r>
+            <a:r>
+              <a:rPr lang="en-US" dirty="0" err="1"/>
+              <a:t>summarising</a:t>
+            </a:r>
+            <a:r>
+              <a:rPr lang="en-US" dirty="0"/>
+              <a:t> local patches and reducing spatial resolution</a:t>
+            </a:r>
+          </a:p>
+          <a:p>
+            <a:r>
+              <a:rPr lang="en-US" dirty="0"/>
+              <a:t>Two common types are max pooling (take the maximum) and average pooling (take the mean)</a:t>
+            </a:r>
+          </a:p>
+          <a:p>
+            <a:r>
+              <a:rPr lang="en-US" dirty="0"/>
+              <a:t>Pooling introduces translational invariance by discarding precise positional information</a:t>
+            </a:r>
+          </a:p>
+          <a:p>
+            <a:endParaRPr lang="en-US" dirty="0"/>
+          </a:p>
+          <a:p>
+            <a:endParaRPr lang="en-US" dirty="0"/>
+          </a:p>
+        </p:txBody>
+      </p:sp>
+      <p:sp>
+        <p:nvSpPr>
+          <p:cNvPr id="5" name="Shape 2">
+            <a:extLst>
+              <a:ext uri="{FF2B5EF4-FFF2-40B4-BE49-F238E27FC236}">
+                <a16:creationId xmlns:a16="http://schemas.microsoft.com/office/drawing/2014/main" id="{CBE0C23E-FEBB-0F5B-FEE9-B938000427FD}"/>
+              </a:ext>
+            </a:extLst>
+          </p:cNvPr>
+          <p:cNvSpPr/>
+          <p:nvPr/>
+        </p:nvSpPr>
+        <p:spPr>
+          <a:xfrm>
+            <a:off x="7228573" y="2961373"/>
+            <a:ext cx="426720" cy="426720"/>
+          </a:xfrm>
+          <a:prstGeom prst="rect">
+            <a:avLst/>
+          </a:prstGeom>
+          <a:solidFill>
+            <a:srgbClr val="F5F5F5"/>
+          </a:solidFill>
+          <a:ln w="12700">
+            <a:solidFill>
+              <a:srgbClr val="030A18"/>
+            </a:solidFill>
+            <a:prstDash val="solid"/>
+          </a:ln>
+        </p:spPr>
+        <p:txBody>
+          <a:bodyPr/>
+          <a:lstStyle/>
+          <a:p>
+            <a:endParaRPr sz="2400"/>
+          </a:p>
+        </p:txBody>
+      </p:sp>
+      <p:sp>
+        <p:nvSpPr>
+          <p:cNvPr id="6" name="Text 3">
+            <a:extLst>
+              <a:ext uri="{FF2B5EF4-FFF2-40B4-BE49-F238E27FC236}">
+                <a16:creationId xmlns:a16="http://schemas.microsoft.com/office/drawing/2014/main" id="{FB05D7F7-64FB-80ED-3244-F20602B3E2D4}"/>
+              </a:ext>
+            </a:extLst>
+          </p:cNvPr>
+          <p:cNvSpPr/>
+          <p:nvPr/>
+        </p:nvSpPr>
+        <p:spPr>
+          <a:xfrm>
+            <a:off x="7228573" y="3058909"/>
+            <a:ext cx="426720" cy="243840"/>
+          </a:xfrm>
+          <a:prstGeom prst="rect">
+            <a:avLst/>
+          </a:prstGeom>
+          <a:noFill/>
+          <a:ln/>
+        </p:spPr>
+        <p:txBody>
+          <a:bodyPr wrap="square" rtlCol="0" anchor="ctr"/>
+          <a:lstStyle/>
+          <a:p>
+            <a:pPr algn="ctr"/>
+            <a:r>
+              <a:rPr lang="en-US" sz="1200" dirty="0">
+                <a:solidFill>
+                  <a:srgbClr val="030A18"/>
+                </a:solidFill>
+              </a:rPr>
+              <a:t>2</a:t>
+            </a:r>
+            <a:endParaRPr lang="en-US" sz="1200" dirty="0"/>
+          </a:p>
+        </p:txBody>
+      </p:sp>
+      <p:sp>
+        <p:nvSpPr>
+          <p:cNvPr id="7" name="Shape 4">
+            <a:extLst>
+              <a:ext uri="{FF2B5EF4-FFF2-40B4-BE49-F238E27FC236}">
+                <a16:creationId xmlns:a16="http://schemas.microsoft.com/office/drawing/2014/main" id="{1931C5AF-7E41-C525-3205-85B271E14BD8}"/>
+              </a:ext>
+            </a:extLst>
+          </p:cNvPr>
+          <p:cNvSpPr/>
+          <p:nvPr/>
+        </p:nvSpPr>
+        <p:spPr>
+          <a:xfrm>
+            <a:off x="7655293" y="2961373"/>
+            <a:ext cx="426720" cy="426720"/>
+          </a:xfrm>
+          <a:prstGeom prst="rect">
+            <a:avLst/>
+          </a:prstGeom>
+          <a:solidFill>
+            <a:srgbClr val="F5F5F5"/>
+          </a:solidFill>
+          <a:ln w="12700">
+            <a:solidFill>
+              <a:srgbClr val="030A18"/>
+            </a:solidFill>
+            <a:prstDash val="solid"/>
+          </a:ln>
+        </p:spPr>
+        <p:txBody>
+          <a:bodyPr/>
+          <a:lstStyle/>
+          <a:p>
+            <a:endParaRPr sz="2400"/>
+          </a:p>
+        </p:txBody>
+      </p:sp>
+      <p:sp>
+        <p:nvSpPr>
+          <p:cNvPr id="8" name="Text 5">
+            <a:extLst>
+              <a:ext uri="{FF2B5EF4-FFF2-40B4-BE49-F238E27FC236}">
+                <a16:creationId xmlns:a16="http://schemas.microsoft.com/office/drawing/2014/main" id="{5B867ED8-5B48-08A6-96CF-0D5B4D2D6E84}"/>
+              </a:ext>
+            </a:extLst>
+          </p:cNvPr>
+          <p:cNvSpPr/>
+          <p:nvPr/>
+        </p:nvSpPr>
+        <p:spPr>
+          <a:xfrm>
+            <a:off x="7655293" y="3058909"/>
+            <a:ext cx="426720" cy="243840"/>
+          </a:xfrm>
+          <a:prstGeom prst="rect">
+            <a:avLst/>
+          </a:prstGeom>
+          <a:noFill/>
+          <a:ln/>
+        </p:spPr>
+        <p:txBody>
+          <a:bodyPr wrap="square" rtlCol="0" anchor="ctr"/>
+          <a:lstStyle/>
+          <a:p>
+            <a:pPr algn="ctr"/>
+            <a:r>
+              <a:rPr lang="en-US" sz="1200" dirty="0">
+                <a:solidFill>
+                  <a:srgbClr val="030A18"/>
+                </a:solidFill>
+              </a:rPr>
+              <a:t>1</a:t>
+            </a:r>
+            <a:endParaRPr lang="en-US" sz="1200" dirty="0"/>
+          </a:p>
+        </p:txBody>
+      </p:sp>
+      <p:sp>
+        <p:nvSpPr>
+          <p:cNvPr id="9" name="Shape 6">
+            <a:extLst>
+              <a:ext uri="{FF2B5EF4-FFF2-40B4-BE49-F238E27FC236}">
+                <a16:creationId xmlns:a16="http://schemas.microsoft.com/office/drawing/2014/main" id="{87156E7B-B4D1-D7FF-91E2-5D70CA1128A1}"/>
+              </a:ext>
+            </a:extLst>
+          </p:cNvPr>
+          <p:cNvSpPr/>
+          <p:nvPr/>
+        </p:nvSpPr>
+        <p:spPr>
+          <a:xfrm>
+            <a:off x="8082013" y="2961373"/>
+            <a:ext cx="426720" cy="426720"/>
+          </a:xfrm>
+          <a:prstGeom prst="rect">
+            <a:avLst/>
+          </a:prstGeom>
+          <a:solidFill>
+            <a:srgbClr val="F5F5F5"/>
+          </a:solidFill>
+          <a:ln w="12700">
+            <a:solidFill>
+              <a:srgbClr val="030A18"/>
+            </a:solidFill>
+            <a:prstDash val="solid"/>
+          </a:ln>
+        </p:spPr>
+        <p:txBody>
+          <a:bodyPr/>
+          <a:lstStyle/>
+          <a:p>
+            <a:endParaRPr sz="2400"/>
+          </a:p>
+        </p:txBody>
+      </p:sp>
+      <p:sp>
+        <p:nvSpPr>
+          <p:cNvPr id="10" name="Text 7">
+            <a:extLst>
+              <a:ext uri="{FF2B5EF4-FFF2-40B4-BE49-F238E27FC236}">
+                <a16:creationId xmlns:a16="http://schemas.microsoft.com/office/drawing/2014/main" id="{8DBD23F4-327B-5850-98BA-75E406418CA3}"/>
+              </a:ext>
+            </a:extLst>
+          </p:cNvPr>
+          <p:cNvSpPr/>
+          <p:nvPr/>
+        </p:nvSpPr>
+        <p:spPr>
+          <a:xfrm>
+            <a:off x="8082013" y="3058909"/>
+            <a:ext cx="426720" cy="243840"/>
+          </a:xfrm>
+          <a:prstGeom prst="rect">
+            <a:avLst/>
+          </a:prstGeom>
+          <a:noFill/>
+          <a:ln/>
+        </p:spPr>
+        <p:txBody>
+          <a:bodyPr wrap="square" rtlCol="0" anchor="ctr"/>
+          <a:lstStyle/>
+          <a:p>
+            <a:pPr algn="ctr"/>
+            <a:r>
+              <a:rPr lang="en-US" sz="1200" dirty="0">
+                <a:solidFill>
+                  <a:srgbClr val="030A18"/>
+                </a:solidFill>
+              </a:rPr>
+              <a:t>3</a:t>
+            </a:r>
+            <a:endParaRPr lang="en-US" sz="1200" dirty="0"/>
+          </a:p>
+        </p:txBody>
+      </p:sp>
+      <p:sp>
+        <p:nvSpPr>
+          <p:cNvPr id="11" name="Shape 8">
+            <a:extLst>
+              <a:ext uri="{FF2B5EF4-FFF2-40B4-BE49-F238E27FC236}">
+                <a16:creationId xmlns:a16="http://schemas.microsoft.com/office/drawing/2014/main" id="{1D130342-92E6-9C99-0EAF-414D0413C7A7}"/>
+              </a:ext>
+            </a:extLst>
+          </p:cNvPr>
+          <p:cNvSpPr/>
+          <p:nvPr/>
+        </p:nvSpPr>
+        <p:spPr>
+          <a:xfrm>
+            <a:off x="8508733" y="2961373"/>
+            <a:ext cx="426720" cy="426720"/>
+          </a:xfrm>
+          <a:prstGeom prst="rect">
+            <a:avLst/>
+          </a:prstGeom>
+          <a:solidFill>
+            <a:srgbClr val="F5F5F5"/>
+          </a:solidFill>
+          <a:ln w="12700">
+            <a:solidFill>
+              <a:srgbClr val="030A18"/>
+            </a:solidFill>
+            <a:prstDash val="solid"/>
+          </a:ln>
+        </p:spPr>
+        <p:txBody>
+          <a:bodyPr/>
+          <a:lstStyle/>
+          <a:p>
+            <a:endParaRPr sz="2400"/>
+          </a:p>
+        </p:txBody>
+      </p:sp>
+      <p:sp>
+        <p:nvSpPr>
+          <p:cNvPr id="12" name="Text 9">
+            <a:extLst>
+              <a:ext uri="{FF2B5EF4-FFF2-40B4-BE49-F238E27FC236}">
+                <a16:creationId xmlns:a16="http://schemas.microsoft.com/office/drawing/2014/main" id="{9F1B8A2F-1944-28B7-0AFA-DBA3130A065C}"/>
+              </a:ext>
+            </a:extLst>
+          </p:cNvPr>
+          <p:cNvSpPr/>
+          <p:nvPr/>
+        </p:nvSpPr>
+        <p:spPr>
+          <a:xfrm>
+            <a:off x="8508733" y="3058909"/>
+            <a:ext cx="426720" cy="243840"/>
+          </a:xfrm>
+          <a:prstGeom prst="rect">
+            <a:avLst/>
+          </a:prstGeom>
+          <a:noFill/>
+          <a:ln/>
+        </p:spPr>
+        <p:txBody>
+          <a:bodyPr wrap="square" rtlCol="0" anchor="ctr"/>
+          <a:lstStyle/>
+          <a:p>
+            <a:pPr algn="ctr"/>
+            <a:r>
+              <a:rPr lang="en-US" sz="1200" dirty="0">
+                <a:solidFill>
+                  <a:srgbClr val="030A18"/>
+                </a:solidFill>
+              </a:rPr>
+              <a:t>2</a:t>
+            </a:r>
+            <a:endParaRPr lang="en-US" sz="1200" dirty="0"/>
+          </a:p>
+        </p:txBody>
+      </p:sp>
+      <p:sp>
+        <p:nvSpPr>
+          <p:cNvPr id="13" name="Shape 10">
+            <a:extLst>
+              <a:ext uri="{FF2B5EF4-FFF2-40B4-BE49-F238E27FC236}">
+                <a16:creationId xmlns:a16="http://schemas.microsoft.com/office/drawing/2014/main" id="{94C8E430-9C61-9093-292C-47373B1A2D59}"/>
+              </a:ext>
+            </a:extLst>
+          </p:cNvPr>
+          <p:cNvSpPr/>
+          <p:nvPr/>
+        </p:nvSpPr>
+        <p:spPr>
+          <a:xfrm>
+            <a:off x="7228573" y="3388093"/>
+            <a:ext cx="426720" cy="426720"/>
+          </a:xfrm>
+          <a:prstGeom prst="rect">
+            <a:avLst/>
+          </a:prstGeom>
+          <a:solidFill>
+            <a:srgbClr val="F5F5F5"/>
+          </a:solidFill>
+          <a:ln w="12700">
+            <a:solidFill>
+              <a:srgbClr val="030A18"/>
+            </a:solidFill>
+            <a:prstDash val="solid"/>
+          </a:ln>
+        </p:spPr>
+        <p:txBody>
+          <a:bodyPr/>
+          <a:lstStyle/>
+          <a:p>
+            <a:endParaRPr sz="2400"/>
+          </a:p>
+        </p:txBody>
+      </p:sp>
+      <p:sp>
+        <p:nvSpPr>
+          <p:cNvPr id="14" name="Text 11">
+            <a:extLst>
+              <a:ext uri="{FF2B5EF4-FFF2-40B4-BE49-F238E27FC236}">
+                <a16:creationId xmlns:a16="http://schemas.microsoft.com/office/drawing/2014/main" id="{5A60D64A-C848-F9C9-3A70-6CADB8B18D80}"/>
+              </a:ext>
+            </a:extLst>
+          </p:cNvPr>
+          <p:cNvSpPr/>
+          <p:nvPr/>
+        </p:nvSpPr>
+        <p:spPr>
+          <a:xfrm>
+            <a:off x="7228573" y="3485629"/>
+            <a:ext cx="426720" cy="243840"/>
+          </a:xfrm>
+          <a:prstGeom prst="rect">
+            <a:avLst/>
+          </a:prstGeom>
+          <a:noFill/>
+          <a:ln/>
+        </p:spPr>
+        <p:txBody>
+          <a:bodyPr wrap="square" rtlCol="0" anchor="ctr"/>
+          <a:lstStyle/>
+          <a:p>
+            <a:pPr algn="ctr"/>
+            <a:r>
+              <a:rPr lang="en-US" sz="1200" dirty="0">
+                <a:solidFill>
+                  <a:srgbClr val="030A18"/>
+                </a:solidFill>
+              </a:rPr>
+              <a:t>0</a:t>
+            </a:r>
+            <a:endParaRPr lang="en-US" sz="1200" dirty="0"/>
+          </a:p>
+        </p:txBody>
+      </p:sp>
+      <p:sp>
+        <p:nvSpPr>
+          <p:cNvPr id="15" name="Shape 12">
+            <a:extLst>
+              <a:ext uri="{FF2B5EF4-FFF2-40B4-BE49-F238E27FC236}">
+                <a16:creationId xmlns:a16="http://schemas.microsoft.com/office/drawing/2014/main" id="{486E60F7-0AF2-13E7-D4F8-53002FF41D63}"/>
+              </a:ext>
+            </a:extLst>
+          </p:cNvPr>
+          <p:cNvSpPr/>
+          <p:nvPr/>
+        </p:nvSpPr>
+        <p:spPr>
+          <a:xfrm>
+            <a:off x="7655293" y="3388093"/>
+            <a:ext cx="426720" cy="426720"/>
+          </a:xfrm>
+          <a:prstGeom prst="rect">
+            <a:avLst/>
+          </a:prstGeom>
+          <a:solidFill>
+            <a:srgbClr val="F5F5F5"/>
+          </a:solidFill>
+          <a:ln w="12700">
+            <a:solidFill>
+              <a:srgbClr val="030A18"/>
+            </a:solidFill>
+            <a:prstDash val="solid"/>
+          </a:ln>
+        </p:spPr>
+        <p:txBody>
+          <a:bodyPr/>
+          <a:lstStyle/>
+          <a:p>
+            <a:endParaRPr sz="2400"/>
+          </a:p>
+        </p:txBody>
+      </p:sp>
+      <p:sp>
+        <p:nvSpPr>
+          <p:cNvPr id="16" name="Text 13">
+            <a:extLst>
+              <a:ext uri="{FF2B5EF4-FFF2-40B4-BE49-F238E27FC236}">
+                <a16:creationId xmlns:a16="http://schemas.microsoft.com/office/drawing/2014/main" id="{0A9F5150-DBC2-4A76-4EC8-71BEDB8CD3AB}"/>
+              </a:ext>
+            </a:extLst>
+          </p:cNvPr>
+          <p:cNvSpPr/>
+          <p:nvPr/>
+        </p:nvSpPr>
+        <p:spPr>
+          <a:xfrm>
+            <a:off x="7655293" y="3485629"/>
+            <a:ext cx="426720" cy="243840"/>
+          </a:xfrm>
+          <a:prstGeom prst="rect">
+            <a:avLst/>
+          </a:prstGeom>
+          <a:noFill/>
+          <a:ln/>
+        </p:spPr>
+        <p:txBody>
+          <a:bodyPr wrap="square" rtlCol="0" anchor="ctr"/>
+          <a:lstStyle/>
+          <a:p>
+            <a:pPr algn="ctr"/>
+            <a:r>
+              <a:rPr lang="en-US" sz="1200" dirty="0">
+                <a:solidFill>
+                  <a:srgbClr val="030A18"/>
+                </a:solidFill>
+              </a:rPr>
+              <a:t>4</a:t>
+            </a:r>
+            <a:endParaRPr lang="en-US" sz="1200" dirty="0"/>
+          </a:p>
+        </p:txBody>
+      </p:sp>
+      <p:sp>
+        <p:nvSpPr>
+          <p:cNvPr id="17" name="Shape 14">
+            <a:extLst>
+              <a:ext uri="{FF2B5EF4-FFF2-40B4-BE49-F238E27FC236}">
+                <a16:creationId xmlns:a16="http://schemas.microsoft.com/office/drawing/2014/main" id="{C370DD77-AF7D-8826-908C-CBB05470B034}"/>
+              </a:ext>
+            </a:extLst>
+          </p:cNvPr>
+          <p:cNvSpPr/>
+          <p:nvPr/>
+        </p:nvSpPr>
+        <p:spPr>
+          <a:xfrm>
+            <a:off x="8082013" y="3388093"/>
+            <a:ext cx="426720" cy="426720"/>
+          </a:xfrm>
+          <a:prstGeom prst="rect">
+            <a:avLst/>
+          </a:prstGeom>
+          <a:solidFill>
+            <a:srgbClr val="F5F5F5"/>
+          </a:solidFill>
+          <a:ln w="12700">
+            <a:solidFill>
+              <a:srgbClr val="030A18"/>
+            </a:solidFill>
+            <a:prstDash val="solid"/>
+          </a:ln>
+        </p:spPr>
+        <p:txBody>
+          <a:bodyPr/>
+          <a:lstStyle/>
+          <a:p>
+            <a:endParaRPr sz="2400"/>
+          </a:p>
+        </p:txBody>
+      </p:sp>
+      <p:sp>
+        <p:nvSpPr>
+          <p:cNvPr id="18" name="Text 15">
+            <a:extLst>
+              <a:ext uri="{FF2B5EF4-FFF2-40B4-BE49-F238E27FC236}">
+                <a16:creationId xmlns:a16="http://schemas.microsoft.com/office/drawing/2014/main" id="{D693044F-6EE5-706B-5250-67FDF4AA39AB}"/>
+              </a:ext>
+            </a:extLst>
+          </p:cNvPr>
+          <p:cNvSpPr/>
+          <p:nvPr/>
+        </p:nvSpPr>
+        <p:spPr>
+          <a:xfrm>
+            <a:off x="8082013" y="3485629"/>
+            <a:ext cx="426720" cy="243840"/>
+          </a:xfrm>
+          <a:prstGeom prst="rect">
+            <a:avLst/>
+          </a:prstGeom>
+          <a:noFill/>
+          <a:ln/>
+        </p:spPr>
+        <p:txBody>
+          <a:bodyPr wrap="square" rtlCol="0" anchor="ctr"/>
+          <a:lstStyle/>
+          <a:p>
+            <a:pPr algn="ctr"/>
+            <a:r>
+              <a:rPr lang="en-US" sz="1200" dirty="0">
+                <a:solidFill>
+                  <a:srgbClr val="030A18"/>
+                </a:solidFill>
+              </a:rPr>
+              <a:t>5</a:t>
+            </a:r>
+            <a:endParaRPr lang="en-US" sz="1200" dirty="0"/>
+          </a:p>
+        </p:txBody>
+      </p:sp>
+      <p:sp>
+        <p:nvSpPr>
+          <p:cNvPr id="19" name="Shape 16">
+            <a:extLst>
+              <a:ext uri="{FF2B5EF4-FFF2-40B4-BE49-F238E27FC236}">
+                <a16:creationId xmlns:a16="http://schemas.microsoft.com/office/drawing/2014/main" id="{E6CE0074-18E9-C27E-D694-3CD6E6FAE97C}"/>
+              </a:ext>
+            </a:extLst>
+          </p:cNvPr>
+          <p:cNvSpPr/>
+          <p:nvPr/>
+        </p:nvSpPr>
+        <p:spPr>
+          <a:xfrm>
+            <a:off x="8508733" y="3388093"/>
+            <a:ext cx="426720" cy="426720"/>
+          </a:xfrm>
+          <a:prstGeom prst="rect">
+            <a:avLst/>
+          </a:prstGeom>
+          <a:solidFill>
+            <a:srgbClr val="F5F5F5"/>
+          </a:solidFill>
+          <a:ln w="12700">
+            <a:solidFill>
+              <a:srgbClr val="030A18"/>
+            </a:solidFill>
+            <a:prstDash val="solid"/>
+          </a:ln>
+        </p:spPr>
+        <p:txBody>
+          <a:bodyPr/>
+          <a:lstStyle/>
+          <a:p>
+            <a:endParaRPr sz="2400"/>
+          </a:p>
+        </p:txBody>
+      </p:sp>
+      <p:sp>
+        <p:nvSpPr>
+          <p:cNvPr id="20" name="Text 17">
+            <a:extLst>
+              <a:ext uri="{FF2B5EF4-FFF2-40B4-BE49-F238E27FC236}">
+                <a16:creationId xmlns:a16="http://schemas.microsoft.com/office/drawing/2014/main" id="{FB4D691C-AFAD-78A5-340B-235A1D3C125D}"/>
+              </a:ext>
+            </a:extLst>
+          </p:cNvPr>
+          <p:cNvSpPr/>
+          <p:nvPr/>
+        </p:nvSpPr>
+        <p:spPr>
+          <a:xfrm>
+            <a:off x="8508733" y="3485629"/>
+            <a:ext cx="426720" cy="243840"/>
+          </a:xfrm>
+          <a:prstGeom prst="rect">
+            <a:avLst/>
+          </a:prstGeom>
+          <a:noFill/>
+          <a:ln/>
+        </p:spPr>
+        <p:txBody>
+          <a:bodyPr wrap="square" rtlCol="0" anchor="ctr"/>
+          <a:lstStyle/>
+          <a:p>
+            <a:pPr algn="ctr"/>
+            <a:r>
+              <a:rPr lang="en-US" sz="1200" dirty="0">
+                <a:solidFill>
+                  <a:srgbClr val="030A18"/>
+                </a:solidFill>
+              </a:rPr>
+              <a:t>1</a:t>
+            </a:r>
+            <a:endParaRPr lang="en-US" sz="1200" dirty="0"/>
+          </a:p>
+        </p:txBody>
+      </p:sp>
+      <p:sp>
+        <p:nvSpPr>
+          <p:cNvPr id="21" name="Shape 18">
+            <a:extLst>
+              <a:ext uri="{FF2B5EF4-FFF2-40B4-BE49-F238E27FC236}">
+                <a16:creationId xmlns:a16="http://schemas.microsoft.com/office/drawing/2014/main" id="{A68BC135-88EA-C434-5794-DF158B13B19F}"/>
+              </a:ext>
+            </a:extLst>
+          </p:cNvPr>
+          <p:cNvSpPr/>
+          <p:nvPr/>
+        </p:nvSpPr>
+        <p:spPr>
+          <a:xfrm>
+            <a:off x="7228573" y="3814813"/>
+            <a:ext cx="426720" cy="426720"/>
+          </a:xfrm>
+          <a:prstGeom prst="rect">
+            <a:avLst/>
+          </a:prstGeom>
+          <a:solidFill>
+            <a:srgbClr val="F5F5F5"/>
+          </a:solidFill>
+          <a:ln w="12700">
+            <a:solidFill>
+              <a:srgbClr val="030A18"/>
+            </a:solidFill>
+            <a:prstDash val="solid"/>
+          </a:ln>
+        </p:spPr>
+        <p:txBody>
+          <a:bodyPr/>
+          <a:lstStyle/>
+          <a:p>
+            <a:endParaRPr sz="2400"/>
+          </a:p>
+        </p:txBody>
+      </p:sp>
+      <p:sp>
+        <p:nvSpPr>
+          <p:cNvPr id="22" name="Text 19">
+            <a:extLst>
+              <a:ext uri="{FF2B5EF4-FFF2-40B4-BE49-F238E27FC236}">
+                <a16:creationId xmlns:a16="http://schemas.microsoft.com/office/drawing/2014/main" id="{2B115CE2-76C7-EFCC-3023-976AF7E2E03A}"/>
+              </a:ext>
+            </a:extLst>
+          </p:cNvPr>
+          <p:cNvSpPr/>
+          <p:nvPr/>
+        </p:nvSpPr>
+        <p:spPr>
+          <a:xfrm>
+            <a:off x="7228573" y="3912349"/>
+            <a:ext cx="426720" cy="243840"/>
+          </a:xfrm>
+          <a:prstGeom prst="rect">
+            <a:avLst/>
+          </a:prstGeom>
+          <a:noFill/>
+          <a:ln/>
+        </p:spPr>
+        <p:txBody>
+          <a:bodyPr wrap="square" rtlCol="0" anchor="ctr"/>
+          <a:lstStyle/>
+          <a:p>
+            <a:pPr algn="ctr"/>
+            <a:r>
+              <a:rPr lang="en-US" sz="1200" dirty="0">
+                <a:solidFill>
+                  <a:srgbClr val="030A18"/>
+                </a:solidFill>
+              </a:rPr>
+              <a:t>1</a:t>
+            </a:r>
+            <a:endParaRPr lang="en-US" sz="1200" dirty="0"/>
+          </a:p>
+        </p:txBody>
+      </p:sp>
+      <p:sp>
+        <p:nvSpPr>
+          <p:cNvPr id="23" name="Shape 20">
+            <a:extLst>
+              <a:ext uri="{FF2B5EF4-FFF2-40B4-BE49-F238E27FC236}">
+                <a16:creationId xmlns:a16="http://schemas.microsoft.com/office/drawing/2014/main" id="{917020C1-4221-1B1F-FB08-C6387E8BF8E9}"/>
+              </a:ext>
+            </a:extLst>
+          </p:cNvPr>
+          <p:cNvSpPr/>
+          <p:nvPr/>
+        </p:nvSpPr>
+        <p:spPr>
+          <a:xfrm>
+            <a:off x="7655293" y="3814813"/>
+            <a:ext cx="426720" cy="426720"/>
+          </a:xfrm>
+          <a:prstGeom prst="rect">
+            <a:avLst/>
+          </a:prstGeom>
+          <a:solidFill>
+            <a:srgbClr val="F5F5F5"/>
+          </a:solidFill>
+          <a:ln w="12700">
+            <a:solidFill>
+              <a:srgbClr val="030A18"/>
+            </a:solidFill>
+            <a:prstDash val="solid"/>
+          </a:ln>
+        </p:spPr>
+        <p:txBody>
+          <a:bodyPr/>
+          <a:lstStyle/>
+          <a:p>
+            <a:endParaRPr sz="2400"/>
+          </a:p>
+        </p:txBody>
+      </p:sp>
+      <p:sp>
+        <p:nvSpPr>
+          <p:cNvPr id="24" name="Text 21">
+            <a:extLst>
+              <a:ext uri="{FF2B5EF4-FFF2-40B4-BE49-F238E27FC236}">
+                <a16:creationId xmlns:a16="http://schemas.microsoft.com/office/drawing/2014/main" id="{772DD5BE-2427-FAA7-1983-2CDB43BEBA25}"/>
+              </a:ext>
+            </a:extLst>
+          </p:cNvPr>
+          <p:cNvSpPr/>
+          <p:nvPr/>
+        </p:nvSpPr>
+        <p:spPr>
+          <a:xfrm>
+            <a:off x="7655293" y="3912349"/>
+            <a:ext cx="426720" cy="243840"/>
+          </a:xfrm>
+          <a:prstGeom prst="rect">
+            <a:avLst/>
+          </a:prstGeom>
+          <a:noFill/>
+          <a:ln/>
+        </p:spPr>
+        <p:txBody>
+          <a:bodyPr wrap="square" rtlCol="0" anchor="ctr"/>
+          <a:lstStyle/>
+          <a:p>
+            <a:pPr algn="ctr"/>
+            <a:r>
+              <a:rPr lang="en-US" sz="1200" dirty="0">
+                <a:solidFill>
+                  <a:srgbClr val="030A18"/>
+                </a:solidFill>
+              </a:rPr>
+              <a:t>2</a:t>
+            </a:r>
+            <a:endParaRPr lang="en-US" sz="1200" dirty="0"/>
+          </a:p>
+        </p:txBody>
+      </p:sp>
+      <p:sp>
+        <p:nvSpPr>
+          <p:cNvPr id="25" name="Shape 22">
+            <a:extLst>
+              <a:ext uri="{FF2B5EF4-FFF2-40B4-BE49-F238E27FC236}">
+                <a16:creationId xmlns:a16="http://schemas.microsoft.com/office/drawing/2014/main" id="{B75FDAD9-5814-E095-A41D-C885D0B85928}"/>
+              </a:ext>
+            </a:extLst>
+          </p:cNvPr>
+          <p:cNvSpPr/>
+          <p:nvPr/>
+        </p:nvSpPr>
+        <p:spPr>
+          <a:xfrm>
+            <a:off x="8082013" y="3814813"/>
+            <a:ext cx="426720" cy="426720"/>
+          </a:xfrm>
+          <a:prstGeom prst="rect">
+            <a:avLst/>
+          </a:prstGeom>
+          <a:solidFill>
+            <a:srgbClr val="F5F5F5"/>
+          </a:solidFill>
+          <a:ln w="12700">
+            <a:solidFill>
+              <a:srgbClr val="030A18"/>
+            </a:solidFill>
+            <a:prstDash val="solid"/>
+          </a:ln>
+        </p:spPr>
+        <p:txBody>
+          <a:bodyPr/>
+          <a:lstStyle/>
+          <a:p>
+            <a:endParaRPr sz="2400"/>
+          </a:p>
+        </p:txBody>
+      </p:sp>
+      <p:sp>
+        <p:nvSpPr>
+          <p:cNvPr id="26" name="Text 23">
+            <a:extLst>
+              <a:ext uri="{FF2B5EF4-FFF2-40B4-BE49-F238E27FC236}">
+                <a16:creationId xmlns:a16="http://schemas.microsoft.com/office/drawing/2014/main" id="{91B9D523-D2E5-1FD1-E1E0-FD753AB8D58A}"/>
+              </a:ext>
+            </a:extLst>
+          </p:cNvPr>
+          <p:cNvSpPr/>
+          <p:nvPr/>
+        </p:nvSpPr>
+        <p:spPr>
+          <a:xfrm>
+            <a:off x="8082013" y="3912349"/>
+            <a:ext cx="426720" cy="243840"/>
+          </a:xfrm>
+          <a:prstGeom prst="rect">
+            <a:avLst/>
+          </a:prstGeom>
+          <a:noFill/>
+          <a:ln/>
+        </p:spPr>
+        <p:txBody>
+          <a:bodyPr wrap="square" rtlCol="0" anchor="ctr"/>
+          <a:lstStyle/>
+          <a:p>
+            <a:pPr algn="ctr"/>
+            <a:r>
+              <a:rPr lang="en-US" sz="1200" dirty="0">
+                <a:solidFill>
+                  <a:srgbClr val="030A18"/>
+                </a:solidFill>
+              </a:rPr>
+              <a:t>0</a:t>
+            </a:r>
+            <a:endParaRPr lang="en-US" sz="1200" dirty="0"/>
+          </a:p>
+        </p:txBody>
+      </p:sp>
+      <p:sp>
+        <p:nvSpPr>
+          <p:cNvPr id="27" name="Shape 24">
+            <a:extLst>
+              <a:ext uri="{FF2B5EF4-FFF2-40B4-BE49-F238E27FC236}">
+                <a16:creationId xmlns:a16="http://schemas.microsoft.com/office/drawing/2014/main" id="{000DBCCB-D339-904A-5FB4-E5E946A1FEFF}"/>
+              </a:ext>
+            </a:extLst>
+          </p:cNvPr>
+          <p:cNvSpPr/>
+          <p:nvPr/>
+        </p:nvSpPr>
+        <p:spPr>
+          <a:xfrm>
+            <a:off x="8508733" y="3814813"/>
+            <a:ext cx="426720" cy="426720"/>
+          </a:xfrm>
+          <a:prstGeom prst="rect">
+            <a:avLst/>
+          </a:prstGeom>
+          <a:solidFill>
+            <a:srgbClr val="F5F5F5"/>
+          </a:solidFill>
+          <a:ln w="12700">
+            <a:solidFill>
+              <a:srgbClr val="030A18"/>
+            </a:solidFill>
+            <a:prstDash val="solid"/>
+          </a:ln>
+        </p:spPr>
+        <p:txBody>
+          <a:bodyPr/>
+          <a:lstStyle/>
+          <a:p>
+            <a:endParaRPr sz="2400"/>
+          </a:p>
+        </p:txBody>
+      </p:sp>
+      <p:sp>
+        <p:nvSpPr>
+          <p:cNvPr id="28" name="Text 25">
+            <a:extLst>
+              <a:ext uri="{FF2B5EF4-FFF2-40B4-BE49-F238E27FC236}">
+                <a16:creationId xmlns:a16="http://schemas.microsoft.com/office/drawing/2014/main" id="{370FF1DF-9FA1-18B0-869E-378B514D13F4}"/>
+              </a:ext>
+            </a:extLst>
+          </p:cNvPr>
+          <p:cNvSpPr/>
+          <p:nvPr/>
+        </p:nvSpPr>
+        <p:spPr>
+          <a:xfrm>
+            <a:off x="8508733" y="3912349"/>
+            <a:ext cx="426720" cy="243840"/>
+          </a:xfrm>
+          <a:prstGeom prst="rect">
+            <a:avLst/>
+          </a:prstGeom>
+          <a:noFill/>
+          <a:ln/>
+        </p:spPr>
+        <p:txBody>
+          <a:bodyPr wrap="square" rtlCol="0" anchor="ctr"/>
+          <a:lstStyle/>
+          <a:p>
+            <a:pPr algn="ctr"/>
+            <a:r>
+              <a:rPr lang="en-US" sz="1200" dirty="0">
+                <a:solidFill>
+                  <a:srgbClr val="030A18"/>
+                </a:solidFill>
+              </a:rPr>
+              <a:t>3</a:t>
+            </a:r>
+            <a:endParaRPr lang="en-US" sz="1200" dirty="0"/>
+          </a:p>
+        </p:txBody>
+      </p:sp>
+      <p:sp>
+        <p:nvSpPr>
+          <p:cNvPr id="29" name="Shape 26">
+            <a:extLst>
+              <a:ext uri="{FF2B5EF4-FFF2-40B4-BE49-F238E27FC236}">
+                <a16:creationId xmlns:a16="http://schemas.microsoft.com/office/drawing/2014/main" id="{7458D58F-E10C-AD9D-E706-A70E330E4B45}"/>
+              </a:ext>
+            </a:extLst>
+          </p:cNvPr>
+          <p:cNvSpPr/>
+          <p:nvPr/>
+        </p:nvSpPr>
+        <p:spPr>
+          <a:xfrm>
+            <a:off x="7228573" y="4241533"/>
+            <a:ext cx="426720" cy="426720"/>
+          </a:xfrm>
+          <a:prstGeom prst="rect">
+            <a:avLst/>
+          </a:prstGeom>
+          <a:solidFill>
+            <a:srgbClr val="F5F5F5"/>
+          </a:solidFill>
+          <a:ln w="12700">
+            <a:solidFill>
+              <a:srgbClr val="030A18"/>
+            </a:solidFill>
+            <a:prstDash val="solid"/>
+          </a:ln>
+        </p:spPr>
+        <p:txBody>
+          <a:bodyPr/>
+          <a:lstStyle/>
+          <a:p>
+            <a:endParaRPr sz="2400"/>
+          </a:p>
+        </p:txBody>
+      </p:sp>
+      <p:sp>
+        <p:nvSpPr>
+          <p:cNvPr id="30" name="Text 27">
+            <a:extLst>
+              <a:ext uri="{FF2B5EF4-FFF2-40B4-BE49-F238E27FC236}">
+                <a16:creationId xmlns:a16="http://schemas.microsoft.com/office/drawing/2014/main" id="{C9628444-7D52-BD63-0EF5-92CD7DA3B353}"/>
+              </a:ext>
+            </a:extLst>
+          </p:cNvPr>
+          <p:cNvSpPr/>
+          <p:nvPr/>
+        </p:nvSpPr>
+        <p:spPr>
+          <a:xfrm>
+            <a:off x="7228573" y="4339069"/>
+            <a:ext cx="426720" cy="243840"/>
+          </a:xfrm>
+          <a:prstGeom prst="rect">
+            <a:avLst/>
+          </a:prstGeom>
+          <a:noFill/>
+          <a:ln/>
+        </p:spPr>
+        <p:txBody>
+          <a:bodyPr wrap="square" rtlCol="0" anchor="ctr"/>
+          <a:lstStyle/>
+          <a:p>
+            <a:pPr algn="ctr"/>
+            <a:r>
+              <a:rPr lang="en-US" sz="1200" dirty="0">
+                <a:solidFill>
+                  <a:srgbClr val="030A18"/>
+                </a:solidFill>
+              </a:rPr>
+              <a:t>2</a:t>
+            </a:r>
+            <a:endParaRPr lang="en-US" sz="1200" dirty="0"/>
+          </a:p>
+        </p:txBody>
+      </p:sp>
+      <p:sp>
+        <p:nvSpPr>
+          <p:cNvPr id="31" name="Shape 28">
+            <a:extLst>
+              <a:ext uri="{FF2B5EF4-FFF2-40B4-BE49-F238E27FC236}">
+                <a16:creationId xmlns:a16="http://schemas.microsoft.com/office/drawing/2014/main" id="{589E11CC-1153-A12A-2275-D79A3EE0DBE7}"/>
+              </a:ext>
+            </a:extLst>
+          </p:cNvPr>
+          <p:cNvSpPr/>
+          <p:nvPr/>
+        </p:nvSpPr>
+        <p:spPr>
+          <a:xfrm>
+            <a:off x="7655293" y="4241533"/>
+            <a:ext cx="426720" cy="426720"/>
+          </a:xfrm>
+          <a:prstGeom prst="rect">
+            <a:avLst/>
+          </a:prstGeom>
+          <a:solidFill>
+            <a:srgbClr val="F5F5F5"/>
+          </a:solidFill>
+          <a:ln w="12700">
+            <a:solidFill>
+              <a:srgbClr val="030A18"/>
+            </a:solidFill>
+            <a:prstDash val="solid"/>
+          </a:ln>
+        </p:spPr>
+        <p:txBody>
+          <a:bodyPr/>
+          <a:lstStyle/>
+          <a:p>
+            <a:endParaRPr sz="2400"/>
+          </a:p>
+        </p:txBody>
+      </p:sp>
+      <p:sp>
+        <p:nvSpPr>
+          <p:cNvPr id="32" name="Text 29">
+            <a:extLst>
+              <a:ext uri="{FF2B5EF4-FFF2-40B4-BE49-F238E27FC236}">
+                <a16:creationId xmlns:a16="http://schemas.microsoft.com/office/drawing/2014/main" id="{55A5A5E1-690B-25C8-0661-20569BA19E89}"/>
+              </a:ext>
+            </a:extLst>
+          </p:cNvPr>
+          <p:cNvSpPr/>
+          <p:nvPr/>
+        </p:nvSpPr>
+        <p:spPr>
+          <a:xfrm>
+            <a:off x="7655293" y="4339069"/>
+            <a:ext cx="426720" cy="243840"/>
+          </a:xfrm>
+          <a:prstGeom prst="rect">
+            <a:avLst/>
+          </a:prstGeom>
+          <a:noFill/>
+          <a:ln/>
+        </p:spPr>
+        <p:txBody>
+          <a:bodyPr wrap="square" rtlCol="0" anchor="ctr"/>
+          <a:lstStyle/>
+          <a:p>
+            <a:pPr algn="ctr"/>
+            <a:r>
+              <a:rPr lang="en-US" sz="1200" dirty="0">
+                <a:solidFill>
+                  <a:srgbClr val="030A18"/>
+                </a:solidFill>
+              </a:rPr>
+              <a:t>1</a:t>
+            </a:r>
+            <a:endParaRPr lang="en-US" sz="1200" dirty="0"/>
+          </a:p>
+        </p:txBody>
+      </p:sp>
+      <p:sp>
+        <p:nvSpPr>
+          <p:cNvPr id="33" name="Shape 30">
+            <a:extLst>
+              <a:ext uri="{FF2B5EF4-FFF2-40B4-BE49-F238E27FC236}">
+                <a16:creationId xmlns:a16="http://schemas.microsoft.com/office/drawing/2014/main" id="{58F766E8-34C6-F928-828C-36C4150A5820}"/>
+              </a:ext>
+            </a:extLst>
+          </p:cNvPr>
+          <p:cNvSpPr/>
+          <p:nvPr/>
+        </p:nvSpPr>
+        <p:spPr>
+          <a:xfrm>
+            <a:off x="8082013" y="4241533"/>
+            <a:ext cx="426720" cy="426720"/>
+          </a:xfrm>
+          <a:prstGeom prst="rect">
+            <a:avLst/>
+          </a:prstGeom>
+          <a:solidFill>
+            <a:srgbClr val="F5F5F5"/>
+          </a:solidFill>
+          <a:ln w="12700">
+            <a:solidFill>
+              <a:srgbClr val="030A18"/>
+            </a:solidFill>
+            <a:prstDash val="solid"/>
+          </a:ln>
+        </p:spPr>
+        <p:txBody>
+          <a:bodyPr/>
+          <a:lstStyle/>
+          <a:p>
+            <a:endParaRPr sz="2400"/>
+          </a:p>
+        </p:txBody>
+      </p:sp>
+      <p:sp>
+        <p:nvSpPr>
+          <p:cNvPr id="34" name="Text 31">
+            <a:extLst>
+              <a:ext uri="{FF2B5EF4-FFF2-40B4-BE49-F238E27FC236}">
+                <a16:creationId xmlns:a16="http://schemas.microsoft.com/office/drawing/2014/main" id="{771FC1BC-D903-E4F5-0FA1-14209F8969A3}"/>
+              </a:ext>
+            </a:extLst>
+          </p:cNvPr>
+          <p:cNvSpPr/>
+          <p:nvPr/>
+        </p:nvSpPr>
+        <p:spPr>
+          <a:xfrm>
+            <a:off x="8082013" y="4339069"/>
+            <a:ext cx="426720" cy="243840"/>
+          </a:xfrm>
+          <a:prstGeom prst="rect">
+            <a:avLst/>
+          </a:prstGeom>
+          <a:noFill/>
+          <a:ln/>
+        </p:spPr>
+        <p:txBody>
+          <a:bodyPr wrap="square" rtlCol="0" anchor="ctr"/>
+          <a:lstStyle/>
+          <a:p>
+            <a:pPr algn="ctr"/>
+            <a:r>
+              <a:rPr lang="en-US" sz="1200" dirty="0">
+                <a:solidFill>
+                  <a:srgbClr val="030A18"/>
+                </a:solidFill>
+              </a:rPr>
+              <a:t>2</a:t>
+            </a:r>
+            <a:endParaRPr lang="en-US" sz="1200" dirty="0"/>
+          </a:p>
+        </p:txBody>
+      </p:sp>
+      <p:sp>
+        <p:nvSpPr>
+          <p:cNvPr id="35" name="Shape 32">
+            <a:extLst>
+              <a:ext uri="{FF2B5EF4-FFF2-40B4-BE49-F238E27FC236}">
+                <a16:creationId xmlns:a16="http://schemas.microsoft.com/office/drawing/2014/main" id="{6A38B4CB-76BB-B85D-497A-2C02B5D7BA35}"/>
+              </a:ext>
+            </a:extLst>
+          </p:cNvPr>
+          <p:cNvSpPr/>
+          <p:nvPr/>
+        </p:nvSpPr>
+        <p:spPr>
+          <a:xfrm>
+            <a:off x="8508733" y="4241533"/>
+            <a:ext cx="426720" cy="426720"/>
+          </a:xfrm>
+          <a:prstGeom prst="rect">
+            <a:avLst/>
+          </a:prstGeom>
+          <a:solidFill>
+            <a:srgbClr val="F5F5F5"/>
+          </a:solidFill>
+          <a:ln w="12700">
+            <a:solidFill>
+              <a:srgbClr val="030A18"/>
+            </a:solidFill>
+            <a:prstDash val="solid"/>
+          </a:ln>
+        </p:spPr>
+        <p:txBody>
+          <a:bodyPr/>
+          <a:lstStyle/>
+          <a:p>
+            <a:endParaRPr sz="2400"/>
+          </a:p>
+        </p:txBody>
+      </p:sp>
+      <p:sp>
+        <p:nvSpPr>
+          <p:cNvPr id="36" name="Text 33">
+            <a:extLst>
+              <a:ext uri="{FF2B5EF4-FFF2-40B4-BE49-F238E27FC236}">
+                <a16:creationId xmlns:a16="http://schemas.microsoft.com/office/drawing/2014/main" id="{7688649E-3B6E-D300-65D7-D836714BAB07}"/>
+              </a:ext>
+            </a:extLst>
+          </p:cNvPr>
+          <p:cNvSpPr/>
+          <p:nvPr/>
+        </p:nvSpPr>
+        <p:spPr>
+          <a:xfrm>
+            <a:off x="8508733" y="4339069"/>
+            <a:ext cx="426720" cy="243840"/>
+          </a:xfrm>
+          <a:prstGeom prst="rect">
+            <a:avLst/>
+          </a:prstGeom>
+          <a:noFill/>
+          <a:ln/>
+        </p:spPr>
+        <p:txBody>
+          <a:bodyPr wrap="square" rtlCol="0" anchor="ctr"/>
+          <a:lstStyle/>
+          <a:p>
+            <a:pPr algn="ctr"/>
+            <a:r>
+              <a:rPr lang="en-US" sz="1200" dirty="0">
+                <a:solidFill>
+                  <a:srgbClr val="030A18"/>
+                </a:solidFill>
+              </a:rPr>
+              <a:t>0</a:t>
+            </a:r>
+            <a:endParaRPr lang="en-US" sz="1200" dirty="0"/>
+          </a:p>
+        </p:txBody>
+      </p:sp>
+      <p:sp>
+        <p:nvSpPr>
+          <p:cNvPr id="37" name="Text 34">
+            <a:extLst>
+              <a:ext uri="{FF2B5EF4-FFF2-40B4-BE49-F238E27FC236}">
+                <a16:creationId xmlns:a16="http://schemas.microsoft.com/office/drawing/2014/main" id="{3DDC93FE-20AF-B8A0-FE3B-CE5C5799C26E}"/>
+              </a:ext>
+            </a:extLst>
+          </p:cNvPr>
+          <p:cNvSpPr/>
+          <p:nvPr/>
+        </p:nvSpPr>
+        <p:spPr>
+          <a:xfrm>
+            <a:off x="7228573" y="2656573"/>
+            <a:ext cx="1706880" cy="365760"/>
+          </a:xfrm>
+          <a:prstGeom prst="rect">
+            <a:avLst/>
+          </a:prstGeom>
+          <a:noFill/>
+          <a:ln/>
+        </p:spPr>
+        <p:txBody>
+          <a:bodyPr wrap="square" rtlCol="0" anchor="ctr"/>
+          <a:lstStyle/>
+          <a:p>
+            <a:r>
+              <a:rPr lang="en-US" sz="1200" dirty="0">
+                <a:solidFill>
+                  <a:srgbClr val="00427A"/>
+                </a:solidFill>
+              </a:rPr>
+              <a:t>Input</a:t>
+            </a:r>
+          </a:p>
+        </p:txBody>
+      </p:sp>
+      <p:sp>
+        <p:nvSpPr>
+          <p:cNvPr id="48" name="Shape 35">
+            <a:extLst>
+              <a:ext uri="{FF2B5EF4-FFF2-40B4-BE49-F238E27FC236}">
+                <a16:creationId xmlns:a16="http://schemas.microsoft.com/office/drawing/2014/main" id="{48A5B68A-6911-6E6C-03D5-93027439E624}"/>
+              </a:ext>
+            </a:extLst>
+          </p:cNvPr>
+          <p:cNvSpPr/>
+          <p:nvPr/>
+        </p:nvSpPr>
+        <p:spPr>
+          <a:xfrm>
+            <a:off x="9535427" y="3388093"/>
+            <a:ext cx="426720" cy="426720"/>
+          </a:xfrm>
+          <a:prstGeom prst="rect">
+            <a:avLst/>
+          </a:prstGeom>
+          <a:solidFill>
+            <a:srgbClr val="F5F5F5"/>
+          </a:solidFill>
+          <a:ln w="12700">
+            <a:solidFill>
+              <a:srgbClr val="030A18"/>
+            </a:solidFill>
+            <a:prstDash val="solid"/>
+          </a:ln>
+        </p:spPr>
+        <p:txBody>
+          <a:bodyPr/>
+          <a:lstStyle/>
+          <a:p>
+            <a:endParaRPr sz="2400"/>
+          </a:p>
+        </p:txBody>
+      </p:sp>
+      <p:sp>
+        <p:nvSpPr>
+          <p:cNvPr id="49" name="Text 36">
+            <a:extLst>
+              <a:ext uri="{FF2B5EF4-FFF2-40B4-BE49-F238E27FC236}">
+                <a16:creationId xmlns:a16="http://schemas.microsoft.com/office/drawing/2014/main" id="{9079928E-2F96-83AB-B079-2926D384B38C}"/>
+              </a:ext>
+            </a:extLst>
+          </p:cNvPr>
+          <p:cNvSpPr/>
+          <p:nvPr/>
+        </p:nvSpPr>
+        <p:spPr>
+          <a:xfrm>
+            <a:off x="9535427" y="3485629"/>
+            <a:ext cx="426720" cy="243840"/>
+          </a:xfrm>
+          <a:prstGeom prst="rect">
+            <a:avLst/>
+          </a:prstGeom>
+          <a:noFill/>
+          <a:ln/>
+        </p:spPr>
+        <p:txBody>
+          <a:bodyPr wrap="square" rtlCol="0" anchor="ctr"/>
+          <a:lstStyle/>
+          <a:p>
+            <a:pPr algn="ctr"/>
+            <a:r>
+              <a:rPr lang="en-US" sz="1200" dirty="0">
+                <a:solidFill>
+                  <a:srgbClr val="030A18"/>
+                </a:solidFill>
+              </a:rPr>
+              <a:t>4</a:t>
+            </a:r>
+            <a:endParaRPr lang="en-US" sz="1200" dirty="0"/>
+          </a:p>
+        </p:txBody>
+      </p:sp>
+      <p:sp>
+        <p:nvSpPr>
+          <p:cNvPr id="50" name="Shape 37">
+            <a:extLst>
+              <a:ext uri="{FF2B5EF4-FFF2-40B4-BE49-F238E27FC236}">
+                <a16:creationId xmlns:a16="http://schemas.microsoft.com/office/drawing/2014/main" id="{FBED7779-D4BA-58BB-E6D8-74CDE9B41A32}"/>
+              </a:ext>
+            </a:extLst>
+          </p:cNvPr>
+          <p:cNvSpPr/>
+          <p:nvPr/>
+        </p:nvSpPr>
+        <p:spPr>
+          <a:xfrm>
+            <a:off x="9962147" y="3388093"/>
+            <a:ext cx="426720" cy="426720"/>
+          </a:xfrm>
+          <a:prstGeom prst="rect">
+            <a:avLst/>
+          </a:prstGeom>
+          <a:solidFill>
+            <a:srgbClr val="F5F5F5"/>
+          </a:solidFill>
+          <a:ln w="12700">
+            <a:solidFill>
+              <a:srgbClr val="030A18"/>
+            </a:solidFill>
+            <a:prstDash val="solid"/>
+          </a:ln>
+        </p:spPr>
+        <p:txBody>
+          <a:bodyPr/>
+          <a:lstStyle/>
+          <a:p>
+            <a:endParaRPr sz="2400"/>
+          </a:p>
+        </p:txBody>
+      </p:sp>
+      <p:sp>
+        <p:nvSpPr>
+          <p:cNvPr id="51" name="Text 38">
+            <a:extLst>
+              <a:ext uri="{FF2B5EF4-FFF2-40B4-BE49-F238E27FC236}">
+                <a16:creationId xmlns:a16="http://schemas.microsoft.com/office/drawing/2014/main" id="{9F62C963-F503-75F6-3295-AEF5E44CA034}"/>
+              </a:ext>
+            </a:extLst>
+          </p:cNvPr>
+          <p:cNvSpPr/>
+          <p:nvPr/>
+        </p:nvSpPr>
+        <p:spPr>
+          <a:xfrm>
+            <a:off x="9962147" y="3485629"/>
+            <a:ext cx="426720" cy="243840"/>
+          </a:xfrm>
+          <a:prstGeom prst="rect">
+            <a:avLst/>
+          </a:prstGeom>
+          <a:noFill/>
+          <a:ln/>
+        </p:spPr>
+        <p:txBody>
+          <a:bodyPr wrap="square" rtlCol="0" anchor="ctr"/>
+          <a:lstStyle/>
+          <a:p>
+            <a:pPr algn="ctr"/>
+            <a:r>
+              <a:rPr lang="en-US" sz="1200" dirty="0">
+                <a:solidFill>
+                  <a:srgbClr val="030A18"/>
+                </a:solidFill>
+              </a:rPr>
+              <a:t>5</a:t>
+            </a:r>
+            <a:endParaRPr lang="en-US" sz="1200" dirty="0"/>
+          </a:p>
+        </p:txBody>
+      </p:sp>
+      <p:sp>
+        <p:nvSpPr>
+          <p:cNvPr id="52" name="Shape 39">
+            <a:extLst>
+              <a:ext uri="{FF2B5EF4-FFF2-40B4-BE49-F238E27FC236}">
+                <a16:creationId xmlns:a16="http://schemas.microsoft.com/office/drawing/2014/main" id="{40AE0FB7-2E21-BCF2-A19B-9D0837BD2335}"/>
+              </a:ext>
+            </a:extLst>
+          </p:cNvPr>
+          <p:cNvSpPr/>
+          <p:nvPr/>
+        </p:nvSpPr>
+        <p:spPr>
+          <a:xfrm>
+            <a:off x="9535427" y="3814813"/>
+            <a:ext cx="426720" cy="426720"/>
+          </a:xfrm>
+          <a:prstGeom prst="rect">
+            <a:avLst/>
+          </a:prstGeom>
+          <a:solidFill>
+            <a:srgbClr val="F5F5F5"/>
+          </a:solidFill>
+          <a:ln w="12700">
+            <a:solidFill>
+              <a:srgbClr val="030A18"/>
+            </a:solidFill>
+            <a:prstDash val="solid"/>
+          </a:ln>
+        </p:spPr>
+        <p:txBody>
+          <a:bodyPr/>
+          <a:lstStyle/>
+          <a:p>
+            <a:endParaRPr sz="2400"/>
+          </a:p>
+        </p:txBody>
+      </p:sp>
+      <p:sp>
+        <p:nvSpPr>
+          <p:cNvPr id="53" name="Text 40">
+            <a:extLst>
+              <a:ext uri="{FF2B5EF4-FFF2-40B4-BE49-F238E27FC236}">
+                <a16:creationId xmlns:a16="http://schemas.microsoft.com/office/drawing/2014/main" id="{2E5FE61D-BCAE-5CEE-B582-AAAB05F84FCD}"/>
+              </a:ext>
+            </a:extLst>
+          </p:cNvPr>
+          <p:cNvSpPr/>
+          <p:nvPr/>
+        </p:nvSpPr>
+        <p:spPr>
+          <a:xfrm>
+            <a:off x="9535427" y="3912349"/>
+            <a:ext cx="426720" cy="243840"/>
+          </a:xfrm>
+          <a:prstGeom prst="rect">
+            <a:avLst/>
+          </a:prstGeom>
+          <a:noFill/>
+          <a:ln/>
+        </p:spPr>
+        <p:txBody>
+          <a:bodyPr wrap="square" rtlCol="0" anchor="ctr"/>
+          <a:lstStyle/>
+          <a:p>
+            <a:pPr algn="ctr"/>
+            <a:r>
+              <a:rPr lang="en-US" sz="1200" dirty="0">
+                <a:solidFill>
+                  <a:srgbClr val="030A18"/>
+                </a:solidFill>
+              </a:rPr>
+              <a:t>2</a:t>
+            </a:r>
+            <a:endParaRPr lang="en-US" sz="1200" dirty="0"/>
+          </a:p>
+        </p:txBody>
+      </p:sp>
+      <p:sp>
+        <p:nvSpPr>
+          <p:cNvPr id="54" name="Shape 41">
+            <a:extLst>
+              <a:ext uri="{FF2B5EF4-FFF2-40B4-BE49-F238E27FC236}">
+                <a16:creationId xmlns:a16="http://schemas.microsoft.com/office/drawing/2014/main" id="{264D29ED-3E52-4A5E-213A-ACD794DD05A0}"/>
+              </a:ext>
+            </a:extLst>
+          </p:cNvPr>
+          <p:cNvSpPr/>
+          <p:nvPr/>
+        </p:nvSpPr>
+        <p:spPr>
+          <a:xfrm>
+            <a:off x="9962147" y="3814813"/>
+            <a:ext cx="426720" cy="426720"/>
+          </a:xfrm>
+          <a:prstGeom prst="rect">
+            <a:avLst/>
+          </a:prstGeom>
+          <a:solidFill>
+            <a:srgbClr val="F5F5F5"/>
+          </a:solidFill>
+          <a:ln w="12700">
+            <a:solidFill>
+              <a:srgbClr val="030A18"/>
+            </a:solidFill>
+            <a:prstDash val="solid"/>
+          </a:ln>
+        </p:spPr>
+        <p:txBody>
+          <a:bodyPr/>
+          <a:lstStyle/>
+          <a:p>
+            <a:endParaRPr sz="2400"/>
+          </a:p>
+        </p:txBody>
+      </p:sp>
+      <p:sp>
+        <p:nvSpPr>
+          <p:cNvPr id="55" name="Text 42">
+            <a:extLst>
+              <a:ext uri="{FF2B5EF4-FFF2-40B4-BE49-F238E27FC236}">
+                <a16:creationId xmlns:a16="http://schemas.microsoft.com/office/drawing/2014/main" id="{E03F5EB1-CE37-BAA1-D5AD-FE1BB55D7DD8}"/>
+              </a:ext>
+            </a:extLst>
+          </p:cNvPr>
+          <p:cNvSpPr/>
+          <p:nvPr/>
+        </p:nvSpPr>
+        <p:spPr>
+          <a:xfrm>
+            <a:off x="9962147" y="3912349"/>
+            <a:ext cx="426720" cy="243840"/>
+          </a:xfrm>
+          <a:prstGeom prst="rect">
+            <a:avLst/>
+          </a:prstGeom>
+          <a:noFill/>
+          <a:ln/>
+        </p:spPr>
+        <p:txBody>
+          <a:bodyPr wrap="square" rtlCol="0" anchor="ctr"/>
+          <a:lstStyle/>
+          <a:p>
+            <a:pPr algn="ctr"/>
+            <a:r>
+              <a:rPr lang="en-US" sz="1200" dirty="0">
+                <a:solidFill>
+                  <a:srgbClr val="030A18"/>
+                </a:solidFill>
+              </a:rPr>
+              <a:t>3</a:t>
+            </a:r>
+            <a:endParaRPr lang="en-US" sz="1200" dirty="0"/>
+          </a:p>
+        </p:txBody>
+      </p:sp>
+      <p:sp>
+        <p:nvSpPr>
+          <p:cNvPr id="56" name="Text 43">
+            <a:extLst>
+              <a:ext uri="{FF2B5EF4-FFF2-40B4-BE49-F238E27FC236}">
+                <a16:creationId xmlns:a16="http://schemas.microsoft.com/office/drawing/2014/main" id="{E152AE67-A7F2-63FF-EBFF-4CBDE05C5B8E}"/>
+              </a:ext>
+            </a:extLst>
+          </p:cNvPr>
+          <p:cNvSpPr/>
+          <p:nvPr/>
+        </p:nvSpPr>
+        <p:spPr>
+          <a:xfrm>
+            <a:off x="9535427" y="3083293"/>
+            <a:ext cx="956110" cy="365760"/>
+          </a:xfrm>
+          <a:prstGeom prst="rect">
+            <a:avLst/>
+          </a:prstGeom>
+          <a:noFill/>
+          <a:ln/>
+        </p:spPr>
+        <p:txBody>
+          <a:bodyPr wrap="square" rtlCol="0" anchor="ctr"/>
+          <a:lstStyle/>
+          <a:p>
+            <a:r>
+              <a:rPr lang="en-US" sz="1200" dirty="0">
+                <a:solidFill>
+                  <a:srgbClr val="00427A"/>
+                </a:solidFill>
+              </a:rPr>
+              <a:t>Max pooled</a:t>
+            </a:r>
+          </a:p>
+        </p:txBody>
+      </p:sp>
+      <p:sp>
+        <p:nvSpPr>
+          <p:cNvPr id="4" name="Slide Number Placeholder 3">
+            <a:extLst>
+              <a:ext uri="{FF2B5EF4-FFF2-40B4-BE49-F238E27FC236}">
+                <a16:creationId xmlns:a16="http://schemas.microsoft.com/office/drawing/2014/main" id="{B5DF19E7-2149-8422-7D88-B9120CB1892B}"/>
+              </a:ext>
+            </a:extLst>
+          </p:cNvPr>
+          <p:cNvSpPr>
+            <a:spLocks noGrp="1"/>
+          </p:cNvSpPr>
+          <p:nvPr>
+            <p:ph type="sldNum" sz="quarter" idx="12"/>
+          </p:nvPr>
+        </p:nvSpPr>
+        <p:spPr/>
+        <p:txBody>
+          <a:bodyPr/>
+          <a:lstStyle/>
+          <a:p>
+            <a:fld id="{5A064C77-022D-3743-A04E-645624933D1D}" type="slidenum">
+              <a:rPr lang="en-US" smtClean="0"/>
+              <a:t>18</a:t>
+            </a:fld>
+            <a:endParaRPr lang="en-US"/>
+          </a:p>
+        </p:txBody>
+      </p:sp>
+    </p:spTree>
+    <p:extLst>
+      <p:ext uri="{BB962C8B-B14F-4D97-AF65-F5344CB8AC3E}">
+        <p14:creationId xmlns:p14="http://schemas.microsoft.com/office/powerpoint/2010/main" val="1747539307"/>
+      </p:ext>
+    </p:extLst>
+  </p:cSld>
+  <p:clrMapOvr>
+    <a:masterClrMapping/>
+  </p:clrMapOvr>
+</p:sld>
+</file>
+
+<file path=ppt/slides/slide19.xml><?xml version="1.0" encoding="utf-8"?>
+<p:sld xmlns:a="http://schemas.openxmlformats.org/drawingml/2006/main" xmlns:r="http://schemas.openxmlformats.org/officeDocument/2006/relationships" xmlns:p="http://schemas.openxmlformats.org/presentationml/2006/main">
+  <p:cSld>
+    <p:spTree>
+      <p:nvGrpSpPr>
+        <p:cNvPr id="1" name=""/>
+        <p:cNvGrpSpPr/>
+        <p:nvPr/>
+      </p:nvGrpSpPr>
+      <p:grpSpPr>
+        <a:xfrm>
+          <a:off x="0" y="0"/>
+          <a:ext cx="0" cy="0"/>
+          <a:chOff x="0" y="0"/>
+          <a:chExt cx="0" cy="0"/>
+        </a:xfrm>
+      </p:grpSpPr>
+      <p:sp>
+        <p:nvSpPr>
+          <p:cNvPr id="2" name="Title 1">
+            <a:extLst>
+              <a:ext uri="{FF2B5EF4-FFF2-40B4-BE49-F238E27FC236}">
+                <a16:creationId xmlns:a16="http://schemas.microsoft.com/office/drawing/2014/main" id="{745389C9-1F2B-A89D-9163-ECBCA75BED39}"/>
+              </a:ext>
+            </a:extLst>
+          </p:cNvPr>
+          <p:cNvSpPr>
+            <a:spLocks noGrp="1"/>
+          </p:cNvSpPr>
+          <p:nvPr>
+            <p:ph type="title"/>
+          </p:nvPr>
+        </p:nvSpPr>
+        <p:spPr/>
+        <p:txBody>
+          <a:bodyPr/>
+          <a:lstStyle/>
+          <a:p>
+            <a:r>
+              <a:rPr lang="en-US" dirty="0"/>
+              <a:t>Next: 2D convolutions</a:t>
+            </a:r>
+          </a:p>
+        </p:txBody>
+      </p:sp>
+      <p:sp>
+        <p:nvSpPr>
+          <p:cNvPr id="3" name="Content Placeholder 2">
+            <a:extLst>
+              <a:ext uri="{FF2B5EF4-FFF2-40B4-BE49-F238E27FC236}">
+                <a16:creationId xmlns:a16="http://schemas.microsoft.com/office/drawing/2014/main" id="{4328A75A-3DD6-2D10-0BD2-B5A8F06FC12C}"/>
+              </a:ext>
+            </a:extLst>
+          </p:cNvPr>
+          <p:cNvSpPr>
+            <a:spLocks noGrp="1"/>
+          </p:cNvSpPr>
+          <p:nvPr>
+            <p:ph idx="1"/>
+          </p:nvPr>
+        </p:nvSpPr>
+        <p:spPr>
+          <a:xfrm>
+            <a:off x="838200" y="1825625"/>
             <a:ext cx="7516528" cy="4149290"/>
           </a:xfrm>
         </p:spPr>
@@ -9136,19 +9890,19 @@
             </a:r>
             <a:r>
               <a:rPr lang="en-US" dirty="0"/>
-              <a:t> width of an input image or feature map.</a:t>
+              <a:t> width of an input image or feature map</a:t>
             </a:r>
           </a:p>
           <a:p>
             <a:r>
               <a:rPr lang="en-US" dirty="0"/>
-              <a:t>Each filter has dimensions H×W×D, where D equals the number of input channels.  Convolution produces one feature map per filter.</a:t>
+              <a:t>Each filter has dimensions H×W×D, where D equals the number of input channels.  Convolution produces one feature map per filter</a:t>
             </a:r>
           </a:p>
           <a:p>
             <a:r>
               <a:rPr lang="en-US" dirty="0"/>
-              <a:t>Multiple filters are stacked to produce multiple feature maps.  The output spatial size depends on the filter size, stride and padding.</a:t>
+              <a:t>Multiple filters are stacked to produce multiple feature maps.  The output spatial size depends on the filter size, stride and padding</a:t>
             </a:r>
           </a:p>
           <a:p>
@@ -10311,7 +11065,7 @@
           <a:p>
             <a:fld id="{5A064C77-022D-3743-A04E-645624933D1D}" type="slidenum">
               <a:rPr lang="en-US" smtClean="0"/>
-              <a:t>18</a:t>
+              <a:t>19</a:t>
             </a:fld>
             <a:endParaRPr lang="en-US"/>
           </a:p>
@@ -10330,7 +11084,212 @@
 </p:sld>
 </file>
 
-<file path=ppt/slides/slide19.xml><?xml version="1.0" encoding="utf-8"?>
+<file path=ppt/slides/slide2.xml><?xml version="1.0" encoding="utf-8"?>
+<p:sld xmlns:a="http://schemas.openxmlformats.org/drawingml/2006/main" xmlns:r="http://schemas.openxmlformats.org/officeDocument/2006/relationships" xmlns:p="http://schemas.openxmlformats.org/presentationml/2006/main">
+  <p:cSld>
+    <p:spTree>
+      <p:nvGrpSpPr>
+        <p:cNvPr id="1" name=""/>
+        <p:cNvGrpSpPr/>
+        <p:nvPr/>
+      </p:nvGrpSpPr>
+      <p:grpSpPr>
+        <a:xfrm>
+          <a:off x="0" y="0"/>
+          <a:ext cx="0" cy="0"/>
+          <a:chOff x="0" y="0"/>
+          <a:chExt cx="0" cy="0"/>
+        </a:xfrm>
+      </p:grpSpPr>
+      <p:sp>
+        <p:nvSpPr>
+          <p:cNvPr id="4" name="Text 2"/>
+          <p:cNvSpPr/>
+          <p:nvPr/>
+        </p:nvSpPr>
+        <p:spPr>
+          <a:xfrm>
+            <a:off x="609600" y="6431280"/>
+            <a:ext cx="10972800" cy="365760"/>
+          </a:xfrm>
+          <a:prstGeom prst="rect">
+            <a:avLst/>
+          </a:prstGeom>
+          <a:noFill/>
+          <a:ln/>
+        </p:spPr>
+        <p:txBody>
+          <a:bodyPr wrap="square" lIns="0" tIns="0" rIns="0" bIns="0" rtlCol="0" anchor="ctr"/>
+          <a:lstStyle/>
+          <a:p>
+            <a:r>
+              <a:rPr lang="en-US" sz="800" u="sng" dirty="0">
+                <a:solidFill>
+                  <a:srgbClr val="4472C4"/>
+                </a:solidFill>
+                <a:hlinkClick r:id="rId3"/>
+              </a:rPr>
+              <a:t>[3]</a:t>
+            </a:r>
+            <a:r>
+              <a:rPr lang="en-US" sz="800" dirty="0">
+                <a:solidFill>
+                  <a:srgbClr val="000000"/>
+                </a:solidFill>
+              </a:rPr>
+              <a:t>   </a:t>
+            </a:r>
+            <a:r>
+              <a:rPr lang="en-US" sz="800" u="sng" dirty="0">
+                <a:solidFill>
+                  <a:srgbClr val="4472C4"/>
+                </a:solidFill>
+                <a:hlinkClick r:id="rId4"/>
+              </a:rPr>
+              <a:t>[4]</a:t>
+            </a:r>
+            <a:endParaRPr lang="en-US" sz="800" dirty="0"/>
+          </a:p>
+        </p:txBody>
+      </p:sp>
+      <p:sp>
+        <p:nvSpPr>
+          <p:cNvPr id="5" name="Title 4">
+            <a:extLst>
+              <a:ext uri="{FF2B5EF4-FFF2-40B4-BE49-F238E27FC236}">
+                <a16:creationId xmlns:a16="http://schemas.microsoft.com/office/drawing/2014/main" id="{E3B9A732-BE54-E279-CA7D-74CCA3C67414}"/>
+              </a:ext>
+            </a:extLst>
+          </p:cNvPr>
+          <p:cNvSpPr>
+            <a:spLocks noGrp="1"/>
+          </p:cNvSpPr>
+          <p:nvPr>
+            <p:ph type="title"/>
+          </p:nvPr>
+        </p:nvSpPr>
+        <p:spPr/>
+        <p:txBody>
+          <a:bodyPr/>
+          <a:lstStyle/>
+          <a:p>
+            <a:r>
+              <a:rPr lang="en-US" dirty="0"/>
+              <a:t>Outline</a:t>
+            </a:r>
+          </a:p>
+        </p:txBody>
+      </p:sp>
+      <p:sp>
+        <p:nvSpPr>
+          <p:cNvPr id="6" name="Content Placeholder 5">
+            <a:extLst>
+              <a:ext uri="{FF2B5EF4-FFF2-40B4-BE49-F238E27FC236}">
+                <a16:creationId xmlns:a16="http://schemas.microsoft.com/office/drawing/2014/main" id="{6194E0D3-21BE-C87E-2D17-490B6D560A81}"/>
+              </a:ext>
+            </a:extLst>
+          </p:cNvPr>
+          <p:cNvSpPr>
+            <a:spLocks noGrp="1"/>
+          </p:cNvSpPr>
+          <p:nvPr>
+            <p:ph idx="1"/>
+          </p:nvPr>
+        </p:nvSpPr>
+        <p:spPr/>
+        <p:txBody>
+          <a:bodyPr>
+            <a:normAutofit/>
+          </a:bodyPr>
+          <a:lstStyle/>
+          <a:p>
+            <a:r>
+              <a:rPr lang="en-US" dirty="0"/>
+              <a:t>Introduce new layer types: dropout, </a:t>
+            </a:r>
+            <a:r>
+              <a:rPr lang="en-US" dirty="0" err="1"/>
+              <a:t>normalisation</a:t>
+            </a:r>
+            <a:r>
+              <a:rPr lang="en-US" dirty="0"/>
+              <a:t>, pooling</a:t>
+            </a:r>
+          </a:p>
+          <a:p>
+            <a:r>
+              <a:rPr lang="en-US" dirty="0"/>
+              <a:t>1D convolution: intuition and examples</a:t>
+            </a:r>
+          </a:p>
+          <a:p>
+            <a:r>
+              <a:rPr lang="en-US" dirty="0"/>
+              <a:t>2D convolution and kernels</a:t>
+            </a:r>
+          </a:p>
+          <a:p>
+            <a:r>
+              <a:rPr lang="en-US" dirty="0"/>
+              <a:t>Building deep CNNs &amp; applications</a:t>
+            </a:r>
+          </a:p>
+          <a:p>
+            <a:r>
+              <a:rPr lang="en-US" dirty="0" err="1"/>
+              <a:t>Regularisation</a:t>
+            </a:r>
+            <a:r>
+              <a:rPr lang="en-US" dirty="0"/>
+              <a:t>, extensions &amp; outlook</a:t>
+            </a:r>
+          </a:p>
+          <a:p>
+            <a:endParaRPr lang="en-US" dirty="0"/>
+          </a:p>
+          <a:p>
+            <a:endParaRPr lang="en-US" dirty="0"/>
+          </a:p>
+        </p:txBody>
+      </p:sp>
+      <p:sp>
+        <p:nvSpPr>
+          <p:cNvPr id="2" name="Slide Number Placeholder 1">
+            <a:extLst>
+              <a:ext uri="{FF2B5EF4-FFF2-40B4-BE49-F238E27FC236}">
+                <a16:creationId xmlns:a16="http://schemas.microsoft.com/office/drawing/2014/main" id="{C642ECCF-D3C8-E60C-40E8-13496488BEAD}"/>
+              </a:ext>
+            </a:extLst>
+          </p:cNvPr>
+          <p:cNvSpPr>
+            <a:spLocks noGrp="1"/>
+          </p:cNvSpPr>
+          <p:nvPr>
+            <p:ph type="sldNum" sz="quarter" idx="12"/>
+          </p:nvPr>
+        </p:nvSpPr>
+        <p:spPr/>
+        <p:txBody>
+          <a:bodyPr/>
+          <a:lstStyle/>
+          <a:p>
+            <a:fld id="{5A064C77-022D-3743-A04E-645624933D1D}" type="slidenum">
+              <a:rPr lang="en-US" smtClean="0"/>
+              <a:t>2</a:t>
+            </a:fld>
+            <a:endParaRPr lang="en-US"/>
+          </a:p>
+        </p:txBody>
+      </p:sp>
+    </p:spTree>
+  </p:cSld>
+  <p:clrMapOvr>
+    <a:masterClrMapping/>
+  </p:clrMapOvr>
+</p:sld>
+</file>
+
+<file path=ppt/slides/slide20.xml><?xml version="1.0" encoding="utf-8"?>
 <p:sld xmlns:a="http://schemas.openxmlformats.org/drawingml/2006/main" xmlns:r="http://schemas.openxmlformats.org/officeDocument/2006/relationships" xmlns:p="http://schemas.openxmlformats.org/presentationml/2006/main">
   <p:cSld>
     <p:spTree>
@@ -10428,13 +11387,13 @@
                 </a14:m>
                 <a:r>
                   <a:rPr lang="en-US" dirty="0"/>
-                  <a:t> (2×2), stride = 1, no padding.</a:t>
+                  <a:t> (2×2), stride = 1, no padding</a:t>
                 </a:r>
               </a:p>
               <a:p>
                 <a:r>
                   <a:rPr lang="en-US" dirty="0"/>
-                  <a:t>Output size = (3 − 2 + 0)/1 + 1 = 2, i.e. a 2×2 feature map.</a:t>
+                  <a:t>Output size = (3 − 2 + 0)/1 + 1 = 2, i.e. a 2×2 feature map</a:t>
                 </a:r>
               </a:p>
               <a:p>
@@ -10444,7 +11403,7 @@
                       <a:srgbClr val="009749"/>
                     </a:solidFill>
                   </a:rPr>
-                  <a:t>Check on board.</a:t>
+                  <a:t>Check on board</a:t>
                 </a:r>
               </a:p>
               <a:p>
@@ -12010,7 +12969,7 @@
           <a:p>
             <a:fld id="{5A064C77-022D-3743-A04E-645624933D1D}" type="slidenum">
               <a:rPr lang="en-US" smtClean="0"/>
-              <a:t>19</a:t>
+              <a:t>20</a:t>
             </a:fld>
             <a:endParaRPr lang="en-US"/>
           </a:p>
@@ -12029,7 +12988,7 @@
 </p:sld>
 </file>
 
-<file path=ppt/slides/slide2.xml><?xml version="1.0" encoding="utf-8"?>
+<file path=ppt/slides/slide21.xml><?xml version="1.0" encoding="utf-8"?>
 <p:sld xmlns:a="http://schemas.openxmlformats.org/drawingml/2006/main" xmlns:r="http://schemas.openxmlformats.org/officeDocument/2006/relationships" xmlns:p="http://schemas.openxmlformats.org/presentationml/2006/main">
   <p:cSld>
     <p:spTree>
@@ -12048,61 +13007,10 @@
       </p:grpSpPr>
       <p:sp>
         <p:nvSpPr>
-          <p:cNvPr id="4" name="Text 2"/>
-          <p:cNvSpPr/>
-          <p:nvPr/>
-        </p:nvSpPr>
-        <p:spPr>
-          <a:xfrm>
-            <a:off x="609600" y="6431280"/>
-            <a:ext cx="10972800" cy="365760"/>
-          </a:xfrm>
-          <a:prstGeom prst="rect">
-            <a:avLst/>
-          </a:prstGeom>
-          <a:noFill/>
-          <a:ln/>
-        </p:spPr>
-        <p:txBody>
-          <a:bodyPr wrap="square" lIns="0" tIns="0" rIns="0" bIns="0" rtlCol="0" anchor="ctr"/>
-          <a:lstStyle/>
-          <a:p>
-            <a:r>
-              <a:rPr lang="en-US" sz="800" u="sng" dirty="0">
-                <a:solidFill>
-                  <a:srgbClr val="4472C4"/>
-                </a:solidFill>
-                <a:hlinkClick r:id="rId3"/>
-              </a:rPr>
-              <a:t>[3]</a:t>
-            </a:r>
-            <a:r>
-              <a:rPr lang="en-US" sz="800" dirty="0">
-                <a:solidFill>
-                  <a:srgbClr val="000000"/>
-                </a:solidFill>
-              </a:rPr>
-              <a:t>   </a:t>
-            </a:r>
-            <a:r>
-              <a:rPr lang="en-US" sz="800" u="sng" dirty="0">
-                <a:solidFill>
-                  <a:srgbClr val="4472C4"/>
-                </a:solidFill>
-                <a:hlinkClick r:id="rId4"/>
-              </a:rPr>
-              <a:t>[4]</a:t>
-            </a:r>
-            <a:endParaRPr lang="en-US" sz="800" dirty="0"/>
-          </a:p>
-        </p:txBody>
-      </p:sp>
-      <p:sp>
-        <p:nvSpPr>
-          <p:cNvPr id="5" name="Title 4">
-            <a:extLst>
-              <a:ext uri="{FF2B5EF4-FFF2-40B4-BE49-F238E27FC236}">
-                <a16:creationId xmlns:a16="http://schemas.microsoft.com/office/drawing/2014/main" id="{E3B9A732-BE54-E279-CA7D-74CCA3C67414}"/>
+          <p:cNvPr id="2" name="Title 1">
+            <a:extLst>
+              <a:ext uri="{FF2B5EF4-FFF2-40B4-BE49-F238E27FC236}">
+                <a16:creationId xmlns:a16="http://schemas.microsoft.com/office/drawing/2014/main" id="{98941748-4C7D-2358-4F77-C09DFCEF8E27}"/>
               </a:ext>
             </a:extLst>
           </p:cNvPr>
@@ -12120,167 +13028,13 @@
           <a:p>
             <a:r>
               <a:rPr lang="en-US" dirty="0"/>
-              <a:t>Outline</a:t>
-            </a:r>
-          </a:p>
-        </p:txBody>
-      </p:sp>
-      <p:sp>
-        <p:nvSpPr>
-          <p:cNvPr id="6" name="Content Placeholder 5">
-            <a:extLst>
-              <a:ext uri="{FF2B5EF4-FFF2-40B4-BE49-F238E27FC236}">
-                <a16:creationId xmlns:a16="http://schemas.microsoft.com/office/drawing/2014/main" id="{6194E0D3-21BE-C87E-2D17-490B6D560A81}"/>
-              </a:ext>
-            </a:extLst>
-          </p:cNvPr>
-          <p:cNvSpPr>
-            <a:spLocks noGrp="1"/>
-          </p:cNvSpPr>
-          <p:nvPr>
-            <p:ph idx="1"/>
-          </p:nvPr>
-        </p:nvSpPr>
-        <p:spPr/>
-        <p:txBody>
-          <a:bodyPr>
-            <a:normAutofit/>
-          </a:bodyPr>
-          <a:lstStyle/>
-          <a:p>
-            <a:r>
-              <a:rPr lang="en-US" dirty="0"/>
-              <a:t>Introduce new layer types: dropout, </a:t>
-            </a:r>
-            <a:r>
-              <a:rPr lang="en-US" dirty="0" err="1"/>
-              <a:t>normalisation</a:t>
-            </a:r>
-            <a:r>
-              <a:rPr lang="en-US" dirty="0"/>
-              <a:t>, pooling</a:t>
-            </a:r>
-          </a:p>
-          <a:p>
-            <a:r>
-              <a:rPr lang="en-US" dirty="0"/>
-              <a:t>1D convolution: intuition and examples</a:t>
-            </a:r>
-          </a:p>
-          <a:p>
-            <a:r>
-              <a:rPr lang="en-US" dirty="0"/>
-              <a:t>2D convolution and kernels</a:t>
-            </a:r>
-          </a:p>
-          <a:p>
-            <a:r>
-              <a:rPr lang="en-US" dirty="0"/>
-              <a:t>Building deep CNNs &amp; applications</a:t>
-            </a:r>
-          </a:p>
-          <a:p>
-            <a:r>
-              <a:rPr lang="en-US" dirty="0" err="1"/>
-              <a:t>Regularisation</a:t>
-            </a:r>
-            <a:r>
-              <a:rPr lang="en-US" dirty="0"/>
-              <a:t>, extensions &amp; outlook</a:t>
-            </a:r>
-          </a:p>
-          <a:p>
-            <a:endParaRPr lang="en-US" dirty="0"/>
-          </a:p>
-          <a:p>
-            <a:endParaRPr lang="en-US" dirty="0"/>
-          </a:p>
-        </p:txBody>
-      </p:sp>
-      <p:sp>
-        <p:nvSpPr>
-          <p:cNvPr id="2" name="Slide Number Placeholder 1">
-            <a:extLst>
-              <a:ext uri="{FF2B5EF4-FFF2-40B4-BE49-F238E27FC236}">
-                <a16:creationId xmlns:a16="http://schemas.microsoft.com/office/drawing/2014/main" id="{C642ECCF-D3C8-E60C-40E8-13496488BEAD}"/>
-              </a:ext>
-            </a:extLst>
-          </p:cNvPr>
-          <p:cNvSpPr>
-            <a:spLocks noGrp="1"/>
-          </p:cNvSpPr>
-          <p:nvPr>
-            <p:ph type="sldNum" sz="quarter" idx="12"/>
-          </p:nvPr>
-        </p:nvSpPr>
-        <p:spPr/>
-        <p:txBody>
-          <a:bodyPr/>
-          <a:lstStyle/>
-          <a:p>
-            <a:fld id="{5A064C77-022D-3743-A04E-645624933D1D}" type="slidenum">
-              <a:rPr lang="en-US" smtClean="0"/>
-              <a:t>2</a:t>
-            </a:fld>
-            <a:endParaRPr lang="en-US"/>
-          </a:p>
-        </p:txBody>
-      </p:sp>
-    </p:spTree>
-  </p:cSld>
-  <p:clrMapOvr>
-    <a:masterClrMapping/>
-  </p:clrMapOvr>
-</p:sld>
-</file>
-
-<file path=ppt/slides/slide20.xml><?xml version="1.0" encoding="utf-8"?>
-<p:sld xmlns:a="http://schemas.openxmlformats.org/drawingml/2006/main" xmlns:r="http://schemas.openxmlformats.org/officeDocument/2006/relationships" xmlns:p="http://schemas.openxmlformats.org/presentationml/2006/main">
-  <p:cSld>
-    <p:spTree>
-      <p:nvGrpSpPr>
-        <p:cNvPr id="1" name=""/>
-        <p:cNvGrpSpPr/>
-        <p:nvPr/>
-      </p:nvGrpSpPr>
-      <p:grpSpPr>
-        <a:xfrm>
-          <a:off x="0" y="0"/>
-          <a:ext cx="0" cy="0"/>
-          <a:chOff x="0" y="0"/>
-          <a:chExt cx="0" cy="0"/>
-        </a:xfrm>
-      </p:grpSpPr>
-      <p:sp>
-        <p:nvSpPr>
-          <p:cNvPr id="2" name="Title 1">
-            <a:extLst>
-              <a:ext uri="{FF2B5EF4-FFF2-40B4-BE49-F238E27FC236}">
-                <a16:creationId xmlns:a16="http://schemas.microsoft.com/office/drawing/2014/main" id="{98941748-4C7D-2358-4F77-C09DFCEF8E27}"/>
-              </a:ext>
-            </a:extLst>
-          </p:cNvPr>
-          <p:cNvSpPr>
-            <a:spLocks noGrp="1"/>
-          </p:cNvSpPr>
-          <p:nvPr>
-            <p:ph type="title"/>
-          </p:nvPr>
-        </p:nvSpPr>
-        <p:spPr/>
-        <p:txBody>
-          <a:bodyPr/>
-          <a:lstStyle/>
-          <a:p>
-            <a:r>
-              <a:rPr lang="en-US" dirty="0"/>
               <a:t>Channels and filters</a:t>
             </a:r>
           </a:p>
         </p:txBody>
       </p:sp>
-      <mc:AlternateContent xmlns:mc="http://schemas.openxmlformats.org/markup-compatibility/2006" xmlns:a14="http://schemas.microsoft.com/office/drawing/2010/main">
-        <mc:Choice Requires="a14">
+      <mc:AlternateContent xmlns:mc="http://schemas.openxmlformats.org/markup-compatibility/2006">
+        <mc:Choice xmlns:a14="http://schemas.microsoft.com/office/drawing/2010/main" Requires="a14">
           <p:sp>
             <p:nvSpPr>
               <p:cNvPr id="3" name="Content Placeholder 2">
@@ -12305,19 +13059,19 @@
             </p:spPr>
             <p:txBody>
               <a:bodyPr>
-                <a:normAutofit lnSpcReduction="10000"/>
+                <a:normAutofit fontScale="92500" lnSpcReduction="10000"/>
               </a:bodyPr>
               <a:lstStyle/>
               <a:p>
                 <a:r>
                   <a:rPr lang="en-US" dirty="0"/>
-                  <a:t>Images typically have multiple channels (e.g. RGB) — represented as a stack of 2D matrices.</a:t>
+                  <a:t>Images typically have multiple channels (e.g. RGB) — represented as a stack of 2D matrices. (for greyscale D = 1)</a:t>
                 </a:r>
               </a:p>
               <a:p>
                 <a:r>
                   <a:rPr lang="en-US" dirty="0"/>
-                  <a:t>A convolutional filter has the same depth as the input channels, so each filter is a 3D block.  Multiple filters produce multiple feature maps.</a:t>
+                  <a:t>A convolutional filter has the same depth as the input channels, so each filter is a 3D block.  Multiple filters produce multiple feature maps</a:t>
                 </a:r>
               </a:p>
               <a:p>
@@ -12411,10 +13165,7 @@
                     </m:r>
                   </m:oMath>
                 </a14:m>
-                <a:r>
-                  <a:rPr lang="en-US" dirty="0"/>
-                  <a:t>.</a:t>
-                </a:r>
+                <a:endParaRPr lang="en-US" dirty="0"/>
               </a:p>
               <a:p>
                 <a:endParaRPr lang="en-US" dirty="0"/>
@@ -12422,7 +13173,7 @@
             </p:txBody>
           </p:sp>
         </mc:Choice>
-        <mc:Fallback xmlns="">
+        <mc:Fallback>
           <p:sp>
             <p:nvSpPr>
               <p:cNvPr id="3" name="Content Placeholder 2">
@@ -12447,7 +13198,7 @@
               <a:blipFill>
                 <a:blip r:embed="rId2"/>
                 <a:stretch>
-                  <a:fillRect l="-1895" t="-3354" r="-211" b="-3049"/>
+                  <a:fillRect l="-1684" t="-2744" r="-2105"/>
                 </a:stretch>
               </a:blipFill>
             </p:spPr>
@@ -13401,7 +14152,7 @@
           <a:p>
             <a:fld id="{5A064C77-022D-3743-A04E-645624933D1D}" type="slidenum">
               <a:rPr lang="en-US" smtClean="0"/>
-              <a:t>20</a:t>
+              <a:t>21</a:t>
             </a:fld>
             <a:endParaRPr lang="en-US"/>
           </a:p>
@@ -13411,587 +14162,6 @@
     <p:extLst>
       <p:ext uri="{BB962C8B-B14F-4D97-AF65-F5344CB8AC3E}">
         <p14:creationId xmlns:p14="http://schemas.microsoft.com/office/powerpoint/2010/main" val="325655951"/>
-      </p:ext>
-    </p:extLst>
-  </p:cSld>
-  <p:clrMapOvr>
-    <a:masterClrMapping/>
-  </p:clrMapOvr>
-</p:sld>
-</file>
-
-<file path=ppt/slides/slide21.xml><?xml version="1.0" encoding="utf-8"?>
-<p:sld xmlns:a="http://schemas.openxmlformats.org/drawingml/2006/main" xmlns:r="http://schemas.openxmlformats.org/officeDocument/2006/relationships" xmlns:p="http://schemas.openxmlformats.org/presentationml/2006/main">
-  <p:cSld>
-    <p:spTree>
-      <p:nvGrpSpPr>
-        <p:cNvPr id="1" name=""/>
-        <p:cNvGrpSpPr/>
-        <p:nvPr/>
-      </p:nvGrpSpPr>
-      <p:grpSpPr>
-        <a:xfrm>
-          <a:off x="0" y="0"/>
-          <a:ext cx="0" cy="0"/>
-          <a:chOff x="0" y="0"/>
-          <a:chExt cx="0" cy="0"/>
-        </a:xfrm>
-      </p:grpSpPr>
-      <p:sp>
-        <p:nvSpPr>
-          <p:cNvPr id="2" name="Title 1">
-            <a:extLst>
-              <a:ext uri="{FF2B5EF4-FFF2-40B4-BE49-F238E27FC236}">
-                <a16:creationId xmlns:a16="http://schemas.microsoft.com/office/drawing/2014/main" id="{559414FB-3615-EBD0-365A-94307CC233B7}"/>
-              </a:ext>
-            </a:extLst>
-          </p:cNvPr>
-          <p:cNvSpPr>
-            <a:spLocks noGrp="1"/>
-          </p:cNvSpPr>
-          <p:nvPr>
-            <p:ph type="title"/>
-          </p:nvPr>
-        </p:nvSpPr>
-        <p:spPr/>
-        <p:txBody>
-          <a:bodyPr/>
-          <a:lstStyle/>
-          <a:p>
-            <a:r>
-              <a:rPr lang="en-US" dirty="0"/>
-              <a:t>Building a CNN</a:t>
-            </a:r>
-          </a:p>
-        </p:txBody>
-      </p:sp>
-      <p:sp>
-        <p:nvSpPr>
-          <p:cNvPr id="3" name="Content Placeholder 2">
-            <a:extLst>
-              <a:ext uri="{FF2B5EF4-FFF2-40B4-BE49-F238E27FC236}">
-                <a16:creationId xmlns:a16="http://schemas.microsoft.com/office/drawing/2014/main" id="{3FD3359F-809B-1071-CD4F-AE7A27ED707F}"/>
-              </a:ext>
-            </a:extLst>
-          </p:cNvPr>
-          <p:cNvSpPr>
-            <a:spLocks noGrp="1"/>
-          </p:cNvSpPr>
-          <p:nvPr>
-            <p:ph idx="1"/>
-          </p:nvPr>
-        </p:nvSpPr>
-        <p:spPr>
-          <a:xfrm>
-            <a:off x="838200" y="1825625"/>
-            <a:ext cx="7150768" cy="4149290"/>
-          </a:xfrm>
-        </p:spPr>
-        <p:txBody>
-          <a:bodyPr>
-            <a:normAutofit lnSpcReduction="10000"/>
-          </a:bodyPr>
-          <a:lstStyle/>
-          <a:p>
-            <a:r>
-              <a:rPr lang="en-US" dirty="0"/>
-              <a:t>A basic CNN stacks layers in a chosen order, e.g. convolution → activation → pooling → fully connected.</a:t>
-            </a:r>
-          </a:p>
-          <a:p>
-            <a:r>
-              <a:rPr lang="en-US" dirty="0"/>
-              <a:t>Convolution and pooling reduce spatial dimensions while increasing depth.  After flattening, a dense layer classifies features.</a:t>
-            </a:r>
-          </a:p>
-          <a:p>
-            <a:r>
-              <a:rPr lang="en-US" dirty="0"/>
-              <a:t>The figure on the right tracks the shape of an example input (8×8) through the network.</a:t>
-            </a:r>
-          </a:p>
-          <a:p>
-            <a:r>
-              <a:rPr lang="en-US" dirty="0"/>
-              <a:t>Any model with enough layers becomes a </a:t>
-            </a:r>
-            <a:r>
-              <a:rPr lang="en-US" i="1" dirty="0"/>
-              <a:t>deep learning NN</a:t>
-            </a:r>
-          </a:p>
-          <a:p>
-            <a:endParaRPr lang="en-US" dirty="0"/>
-          </a:p>
-        </p:txBody>
-      </p:sp>
-      <p:sp>
-        <p:nvSpPr>
-          <p:cNvPr id="4" name="Shape 2">
-            <a:extLst>
-              <a:ext uri="{FF2B5EF4-FFF2-40B4-BE49-F238E27FC236}">
-                <a16:creationId xmlns:a16="http://schemas.microsoft.com/office/drawing/2014/main" id="{54FEB44B-FBBB-24CD-5220-B821ED2E71FD}"/>
-              </a:ext>
-            </a:extLst>
-          </p:cNvPr>
-          <p:cNvSpPr/>
-          <p:nvPr/>
-        </p:nvSpPr>
-        <p:spPr>
-          <a:xfrm>
-            <a:off x="8537608" y="1690688"/>
-            <a:ext cx="2438400" cy="548640"/>
-          </a:xfrm>
-          <a:prstGeom prst="roundRect">
-            <a:avLst>
-              <a:gd name="adj" fmla="val 22222"/>
-            </a:avLst>
-          </a:prstGeom>
-          <a:solidFill>
-            <a:srgbClr val="F5F5F5"/>
-          </a:solidFill>
-          <a:ln w="12700">
-            <a:solidFill>
-              <a:srgbClr val="030A18"/>
-            </a:solidFill>
-            <a:prstDash val="solid"/>
-          </a:ln>
-        </p:spPr>
-        <p:txBody>
-          <a:bodyPr/>
-          <a:lstStyle/>
-          <a:p>
-            <a:endParaRPr sz="2400"/>
-          </a:p>
-        </p:txBody>
-      </p:sp>
-      <p:sp>
-        <p:nvSpPr>
-          <p:cNvPr id="5" name="Text 3">
-            <a:extLst>
-              <a:ext uri="{FF2B5EF4-FFF2-40B4-BE49-F238E27FC236}">
-                <a16:creationId xmlns:a16="http://schemas.microsoft.com/office/drawing/2014/main" id="{0CD38DCE-CE07-EC8B-7A11-FE10F2FC6EFE}"/>
-              </a:ext>
-            </a:extLst>
-          </p:cNvPr>
-          <p:cNvSpPr/>
-          <p:nvPr/>
-        </p:nvSpPr>
-        <p:spPr>
-          <a:xfrm>
-            <a:off x="8537608" y="1836992"/>
-            <a:ext cx="2438400" cy="304800"/>
-          </a:xfrm>
-          <a:prstGeom prst="rect">
-            <a:avLst/>
-          </a:prstGeom>
-          <a:noFill/>
-          <a:ln/>
-        </p:spPr>
-        <p:txBody>
-          <a:bodyPr wrap="square" rtlCol="0" anchor="ctr"/>
-          <a:lstStyle/>
-          <a:p>
-            <a:pPr algn="ctr"/>
-            <a:r>
-              <a:rPr lang="en-US" sz="1200" dirty="0">
-                <a:solidFill>
-                  <a:srgbClr val="030A18"/>
-                </a:solidFill>
-              </a:rPr>
-              <a:t>8×8 input</a:t>
-            </a:r>
-            <a:endParaRPr lang="en-US" sz="1200" dirty="0"/>
-          </a:p>
-        </p:txBody>
-      </p:sp>
-      <p:sp>
-        <p:nvSpPr>
-          <p:cNvPr id="6" name="Shape 4">
-            <a:extLst>
-              <a:ext uri="{FF2B5EF4-FFF2-40B4-BE49-F238E27FC236}">
-                <a16:creationId xmlns:a16="http://schemas.microsoft.com/office/drawing/2014/main" id="{D44BE87F-AE33-9387-3DF6-318DB3EC47B1}"/>
-              </a:ext>
-            </a:extLst>
-          </p:cNvPr>
-          <p:cNvSpPr/>
-          <p:nvPr/>
-        </p:nvSpPr>
-        <p:spPr>
-          <a:xfrm>
-            <a:off x="9695848" y="2239328"/>
-            <a:ext cx="121920" cy="243840"/>
-          </a:xfrm>
-          <a:prstGeom prst="downArrow">
-            <a:avLst/>
-          </a:prstGeom>
-          <a:solidFill>
-            <a:srgbClr val="030A18"/>
-          </a:solidFill>
-          <a:ln w="12700">
-            <a:solidFill>
-              <a:srgbClr val="030A18"/>
-            </a:solidFill>
-            <a:prstDash val="solid"/>
-          </a:ln>
-        </p:spPr>
-        <p:txBody>
-          <a:bodyPr/>
-          <a:lstStyle/>
-          <a:p>
-            <a:endParaRPr sz="2400"/>
-          </a:p>
-        </p:txBody>
-      </p:sp>
-      <p:sp>
-        <p:nvSpPr>
-          <p:cNvPr id="7" name="Shape 5">
-            <a:extLst>
-              <a:ext uri="{FF2B5EF4-FFF2-40B4-BE49-F238E27FC236}">
-                <a16:creationId xmlns:a16="http://schemas.microsoft.com/office/drawing/2014/main" id="{4A2FDA7E-06B0-488A-26CB-28154A4EE924}"/>
-              </a:ext>
-            </a:extLst>
-          </p:cNvPr>
-          <p:cNvSpPr/>
-          <p:nvPr/>
-        </p:nvSpPr>
-        <p:spPr>
-          <a:xfrm>
-            <a:off x="8537608" y="2605088"/>
-            <a:ext cx="2438400" cy="548640"/>
-          </a:xfrm>
-          <a:prstGeom prst="roundRect">
-            <a:avLst>
-              <a:gd name="adj" fmla="val 22222"/>
-            </a:avLst>
-          </a:prstGeom>
-          <a:solidFill>
-            <a:srgbClr val="F5F5F5"/>
-          </a:solidFill>
-          <a:ln w="12700">
-            <a:solidFill>
-              <a:srgbClr val="030A18"/>
-            </a:solidFill>
-            <a:prstDash val="solid"/>
-          </a:ln>
-        </p:spPr>
-        <p:txBody>
-          <a:bodyPr/>
-          <a:lstStyle/>
-          <a:p>
-            <a:endParaRPr sz="2400"/>
-          </a:p>
-        </p:txBody>
-      </p:sp>
-      <p:sp>
-        <p:nvSpPr>
-          <p:cNvPr id="8" name="Text 6">
-            <a:extLst>
-              <a:ext uri="{FF2B5EF4-FFF2-40B4-BE49-F238E27FC236}">
-                <a16:creationId xmlns:a16="http://schemas.microsoft.com/office/drawing/2014/main" id="{972EBB43-C51C-5E2E-ED92-1595C81815CD}"/>
-              </a:ext>
-            </a:extLst>
-          </p:cNvPr>
-          <p:cNvSpPr/>
-          <p:nvPr/>
-        </p:nvSpPr>
-        <p:spPr>
-          <a:xfrm>
-            <a:off x="8537608" y="2751392"/>
-            <a:ext cx="2438400" cy="304800"/>
-          </a:xfrm>
-          <a:prstGeom prst="rect">
-            <a:avLst/>
-          </a:prstGeom>
-          <a:noFill/>
-          <a:ln/>
-        </p:spPr>
-        <p:txBody>
-          <a:bodyPr wrap="square" rtlCol="0" anchor="ctr"/>
-          <a:lstStyle/>
-          <a:p>
-            <a:pPr algn="ctr"/>
-            <a:r>
-              <a:rPr lang="en-US" sz="1200" dirty="0">
-                <a:solidFill>
-                  <a:srgbClr val="030A18"/>
-                </a:solidFill>
-              </a:rPr>
-              <a:t>Conv, ReLU &amp; pool</a:t>
-            </a:r>
-            <a:endParaRPr lang="en-US" sz="1200" dirty="0"/>
-          </a:p>
-        </p:txBody>
-      </p:sp>
-      <p:sp>
-        <p:nvSpPr>
-          <p:cNvPr id="9" name="Shape 7">
-            <a:extLst>
-              <a:ext uri="{FF2B5EF4-FFF2-40B4-BE49-F238E27FC236}">
-                <a16:creationId xmlns:a16="http://schemas.microsoft.com/office/drawing/2014/main" id="{D6393EB7-6AEC-1D64-50E9-1DD06BE61D6B}"/>
-              </a:ext>
-            </a:extLst>
-          </p:cNvPr>
-          <p:cNvSpPr/>
-          <p:nvPr/>
-        </p:nvSpPr>
-        <p:spPr>
-          <a:xfrm>
-            <a:off x="9695848" y="3153728"/>
-            <a:ext cx="121920" cy="243840"/>
-          </a:xfrm>
-          <a:prstGeom prst="downArrow">
-            <a:avLst/>
-          </a:prstGeom>
-          <a:solidFill>
-            <a:srgbClr val="030A18"/>
-          </a:solidFill>
-          <a:ln w="12700">
-            <a:solidFill>
-              <a:srgbClr val="030A18"/>
-            </a:solidFill>
-            <a:prstDash val="solid"/>
-          </a:ln>
-        </p:spPr>
-        <p:txBody>
-          <a:bodyPr/>
-          <a:lstStyle/>
-          <a:p>
-            <a:endParaRPr sz="2400"/>
-          </a:p>
-        </p:txBody>
-      </p:sp>
-      <p:sp>
-        <p:nvSpPr>
-          <p:cNvPr id="10" name="Shape 8">
-            <a:extLst>
-              <a:ext uri="{FF2B5EF4-FFF2-40B4-BE49-F238E27FC236}">
-                <a16:creationId xmlns:a16="http://schemas.microsoft.com/office/drawing/2014/main" id="{A72E7942-E6B7-227E-F4E4-04E5A58D1823}"/>
-              </a:ext>
-            </a:extLst>
-          </p:cNvPr>
-          <p:cNvSpPr/>
-          <p:nvPr/>
-        </p:nvSpPr>
-        <p:spPr>
-          <a:xfrm>
-            <a:off x="8537608" y="3519488"/>
-            <a:ext cx="2438400" cy="548640"/>
-          </a:xfrm>
-          <a:prstGeom prst="roundRect">
-            <a:avLst>
-              <a:gd name="adj" fmla="val 22222"/>
-            </a:avLst>
-          </a:prstGeom>
-          <a:solidFill>
-            <a:srgbClr val="F5F5F5"/>
-          </a:solidFill>
-          <a:ln w="12700">
-            <a:solidFill>
-              <a:srgbClr val="030A18"/>
-            </a:solidFill>
-            <a:prstDash val="solid"/>
-          </a:ln>
-        </p:spPr>
-        <p:txBody>
-          <a:bodyPr/>
-          <a:lstStyle/>
-          <a:p>
-            <a:endParaRPr sz="2400"/>
-          </a:p>
-        </p:txBody>
-      </p:sp>
-      <p:sp>
-        <p:nvSpPr>
-          <p:cNvPr id="11" name="Text 9">
-            <a:extLst>
-              <a:ext uri="{FF2B5EF4-FFF2-40B4-BE49-F238E27FC236}">
-                <a16:creationId xmlns:a16="http://schemas.microsoft.com/office/drawing/2014/main" id="{BB025A97-51AA-2C7B-F767-894867906B54}"/>
-              </a:ext>
-            </a:extLst>
-          </p:cNvPr>
-          <p:cNvSpPr/>
-          <p:nvPr/>
-        </p:nvSpPr>
-        <p:spPr>
-          <a:xfrm>
-            <a:off x="8537608" y="3665792"/>
-            <a:ext cx="2438400" cy="304800"/>
-          </a:xfrm>
-          <a:prstGeom prst="rect">
-            <a:avLst/>
-          </a:prstGeom>
-          <a:noFill/>
-          <a:ln/>
-        </p:spPr>
-        <p:txBody>
-          <a:bodyPr wrap="square" rtlCol="0" anchor="ctr"/>
-          <a:lstStyle/>
-          <a:p>
-            <a:pPr algn="ctr"/>
-            <a:r>
-              <a:rPr lang="en-US" sz="1200" dirty="0">
-                <a:solidFill>
-                  <a:srgbClr val="030A18"/>
-                </a:solidFill>
-              </a:rPr>
-              <a:t>Flatten</a:t>
-            </a:r>
-            <a:endParaRPr lang="en-US" sz="1200" dirty="0"/>
-          </a:p>
-        </p:txBody>
-      </p:sp>
-      <p:sp>
-        <p:nvSpPr>
-          <p:cNvPr id="12" name="Shape 10">
-            <a:extLst>
-              <a:ext uri="{FF2B5EF4-FFF2-40B4-BE49-F238E27FC236}">
-                <a16:creationId xmlns:a16="http://schemas.microsoft.com/office/drawing/2014/main" id="{917B660D-8F2F-4A08-E418-1A3EF1E32328}"/>
-              </a:ext>
-            </a:extLst>
-          </p:cNvPr>
-          <p:cNvSpPr/>
-          <p:nvPr/>
-        </p:nvSpPr>
-        <p:spPr>
-          <a:xfrm>
-            <a:off x="9695848" y="4068128"/>
-            <a:ext cx="121920" cy="243840"/>
-          </a:xfrm>
-          <a:prstGeom prst="downArrow">
-            <a:avLst/>
-          </a:prstGeom>
-          <a:solidFill>
-            <a:srgbClr val="030A18"/>
-          </a:solidFill>
-          <a:ln w="12700">
-            <a:solidFill>
-              <a:srgbClr val="030A18"/>
-            </a:solidFill>
-            <a:prstDash val="solid"/>
-          </a:ln>
-        </p:spPr>
-        <p:txBody>
-          <a:bodyPr/>
-          <a:lstStyle/>
-          <a:p>
-            <a:endParaRPr sz="2400"/>
-          </a:p>
-        </p:txBody>
-      </p:sp>
-      <p:sp>
-        <p:nvSpPr>
-          <p:cNvPr id="13" name="Shape 11">
-            <a:extLst>
-              <a:ext uri="{FF2B5EF4-FFF2-40B4-BE49-F238E27FC236}">
-                <a16:creationId xmlns:a16="http://schemas.microsoft.com/office/drawing/2014/main" id="{95D628C3-35CF-0751-3DE9-2FA67DE74091}"/>
-              </a:ext>
-            </a:extLst>
-          </p:cNvPr>
-          <p:cNvSpPr/>
-          <p:nvPr/>
-        </p:nvSpPr>
-        <p:spPr>
-          <a:xfrm>
-            <a:off x="8537608" y="4433888"/>
-            <a:ext cx="2438400" cy="548640"/>
-          </a:xfrm>
-          <a:prstGeom prst="roundRect">
-            <a:avLst>
-              <a:gd name="adj" fmla="val 22222"/>
-            </a:avLst>
-          </a:prstGeom>
-          <a:solidFill>
-            <a:srgbClr val="F5F5F5"/>
-          </a:solidFill>
-          <a:ln w="12700">
-            <a:solidFill>
-              <a:srgbClr val="030A18"/>
-            </a:solidFill>
-            <a:prstDash val="solid"/>
-          </a:ln>
-        </p:spPr>
-        <p:txBody>
-          <a:bodyPr/>
-          <a:lstStyle/>
-          <a:p>
-            <a:endParaRPr sz="2400"/>
-          </a:p>
-        </p:txBody>
-      </p:sp>
-      <p:sp>
-        <p:nvSpPr>
-          <p:cNvPr id="14" name="Text 12">
-            <a:extLst>
-              <a:ext uri="{FF2B5EF4-FFF2-40B4-BE49-F238E27FC236}">
-                <a16:creationId xmlns:a16="http://schemas.microsoft.com/office/drawing/2014/main" id="{B888C678-2CDF-A711-E278-7C5E1345E1E3}"/>
-              </a:ext>
-            </a:extLst>
-          </p:cNvPr>
-          <p:cNvSpPr/>
-          <p:nvPr/>
-        </p:nvSpPr>
-        <p:spPr>
-          <a:xfrm>
-            <a:off x="8537608" y="4580192"/>
-            <a:ext cx="2438400" cy="304800"/>
-          </a:xfrm>
-          <a:prstGeom prst="rect">
-            <a:avLst/>
-          </a:prstGeom>
-          <a:noFill/>
-          <a:ln/>
-        </p:spPr>
-        <p:txBody>
-          <a:bodyPr wrap="square" rtlCol="0" anchor="ctr"/>
-          <a:lstStyle/>
-          <a:p>
-            <a:pPr algn="ctr"/>
-            <a:r>
-              <a:rPr lang="en-US" sz="1200" dirty="0">
-                <a:solidFill>
-                  <a:srgbClr val="030A18"/>
-                </a:solidFill>
-              </a:rPr>
-              <a:t>Dense→output</a:t>
-            </a:r>
-            <a:endParaRPr lang="en-US" sz="1200" dirty="0"/>
-          </a:p>
-        </p:txBody>
-      </p:sp>
-      <p:sp>
-        <p:nvSpPr>
-          <p:cNvPr id="15" name="Slide Number Placeholder 14">
-            <a:extLst>
-              <a:ext uri="{FF2B5EF4-FFF2-40B4-BE49-F238E27FC236}">
-                <a16:creationId xmlns:a16="http://schemas.microsoft.com/office/drawing/2014/main" id="{EDCEA169-2644-2E44-16E3-8D434292EBC1}"/>
-              </a:ext>
-            </a:extLst>
-          </p:cNvPr>
-          <p:cNvSpPr>
-            <a:spLocks noGrp="1"/>
-          </p:cNvSpPr>
-          <p:nvPr>
-            <p:ph type="sldNum" sz="quarter" idx="12"/>
-          </p:nvPr>
-        </p:nvSpPr>
-        <p:spPr/>
-        <p:txBody>
-          <a:bodyPr/>
-          <a:lstStyle/>
-          <a:p>
-            <a:fld id="{5A064C77-022D-3743-A04E-645624933D1D}" type="slidenum">
-              <a:rPr lang="en-US" smtClean="0"/>
-              <a:t>21</a:t>
-            </a:fld>
-            <a:endParaRPr lang="en-US"/>
-          </a:p>
-        </p:txBody>
-      </p:sp>
-    </p:spTree>
-    <p:extLst>
-      <p:ext uri="{BB962C8B-B14F-4D97-AF65-F5344CB8AC3E}">
-        <p14:creationId xmlns:p14="http://schemas.microsoft.com/office/powerpoint/2010/main" val="3059324801"/>
       </p:ext>
     </p:extLst>
   </p:cSld>
@@ -14023,7 +14193,7 @@
           <p:cNvPr id="2" name="Title 1">
             <a:extLst>
               <a:ext uri="{FF2B5EF4-FFF2-40B4-BE49-F238E27FC236}">
-                <a16:creationId xmlns:a16="http://schemas.microsoft.com/office/drawing/2014/main" id="{617D61C6-6C4E-518A-6C4E-D18813C12B02}"/>
+                <a16:creationId xmlns:a16="http://schemas.microsoft.com/office/drawing/2014/main" id="{559414FB-3615-EBD0-365A-94307CC233B7}"/>
               </a:ext>
             </a:extLst>
           </p:cNvPr>
@@ -14041,7 +14211,7 @@
           <a:p>
             <a:r>
               <a:rPr lang="en-US" dirty="0"/>
-              <a:t>Feature hierarchies</a:t>
+              <a:t>Building a CNN</a:t>
             </a:r>
           </a:p>
         </p:txBody>
@@ -14051,7 +14221,7 @@
           <p:cNvPr id="3" name="Content Placeholder 2">
             <a:extLst>
               <a:ext uri="{FF2B5EF4-FFF2-40B4-BE49-F238E27FC236}">
-                <a16:creationId xmlns:a16="http://schemas.microsoft.com/office/drawing/2014/main" id="{3BF4C7CE-594D-F50C-1F06-5C3B3D97CE52}"/>
+                <a16:creationId xmlns:a16="http://schemas.microsoft.com/office/drawing/2014/main" id="{3FD3359F-809B-1071-CD4F-AE7A27ED707F}"/>
               </a:ext>
             </a:extLst>
           </p:cNvPr>
@@ -14065,43 +14235,44 @@
         <p:spPr>
           <a:xfrm>
             <a:off x="838200" y="1825625"/>
-            <a:ext cx="6091989" cy="4149290"/>
+            <a:ext cx="7150768" cy="4149290"/>
           </a:xfrm>
         </p:spPr>
         <p:txBody>
           <a:bodyPr>
-            <a:normAutofit fontScale="92500" lnSpcReduction="10000"/>
+            <a:normAutofit lnSpcReduction="10000"/>
           </a:bodyPr>
           <a:lstStyle/>
           <a:p>
             <a:r>
               <a:rPr lang="en-US" dirty="0"/>
-              <a:t>Convolutional networks learn hierarchical features:</a:t>
+              <a:t>A basic CNN stacks layers in a chosen order, e.g. convolution → activation → pooling → fully connected</a:t>
             </a:r>
           </a:p>
           <a:p>
             <a:r>
               <a:rPr lang="en-US" dirty="0"/>
-              <a:t>Early layers detect simple edges and textures.</a:t>
+              <a:t>Convolution and pooling reduce spatial dimensions while increasing depth.  After flattening, a dense layer classifies features</a:t>
             </a:r>
           </a:p>
           <a:p>
             <a:r>
               <a:rPr lang="en-US" dirty="0"/>
-              <a:t>Intermediate layers combine edges into motifs (e.g. corners, curves).</a:t>
+              <a:t>The figure on the right tracks the shape of an example input (8×8) through the network</a:t>
             </a:r>
           </a:p>
           <a:p>
             <a:r>
               <a:rPr lang="en-US" dirty="0"/>
-              <a:t>Deeper layers capture high‑level parts and objects.</a:t>
-            </a:r>
-          </a:p>
-          <a:p>
-            <a:r>
-              <a:rPr lang="en-US" dirty="0"/>
-              <a:t>Illustrated on the right are abstract patterns representing different levels of abstraction.</a:t>
-            </a:r>
+              <a:t>Any model with enough layers becomes a </a:t>
+            </a:r>
+            <a:r>
+              <a:rPr lang="en-US" i="1" dirty="0"/>
+              <a:t>deep learning NN</a:t>
+            </a:r>
+          </a:p>
+          <a:p>
+            <a:endParaRPr lang="en-US" dirty="0"/>
           </a:p>
         </p:txBody>
       </p:sp>
@@ -14110,7 +14281,7 @@
           <p:cNvPr id="4" name="Shape 2">
             <a:extLst>
               <a:ext uri="{FF2B5EF4-FFF2-40B4-BE49-F238E27FC236}">
-                <a16:creationId xmlns:a16="http://schemas.microsoft.com/office/drawing/2014/main" id="{94CBA745-99C5-EEB5-831F-06A0D0BC6361}"/>
+                <a16:creationId xmlns:a16="http://schemas.microsoft.com/office/drawing/2014/main" id="{54FEB44B-FBBB-24CD-5220-B821ED2E71FD}"/>
               </a:ext>
             </a:extLst>
           </p:cNvPr>
@@ -14119,11 +14290,13 @@
         </p:nvSpPr>
         <p:spPr>
           <a:xfrm>
-            <a:off x="8046720" y="2194560"/>
-            <a:ext cx="853440" cy="853440"/>
+            <a:off x="8537608" y="1690688"/>
+            <a:ext cx="2438400" cy="548640"/>
           </a:xfrm>
-          <a:prstGeom prst="rect">
-            <a:avLst/>
+          <a:prstGeom prst="roundRect">
+            <a:avLst>
+              <a:gd name="adj" fmla="val 22222"/>
+            </a:avLst>
           </a:prstGeom>
           <a:solidFill>
             <a:srgbClr val="F5F5F5"/>
@@ -14145,10 +14318,10 @@
       </p:sp>
       <p:sp>
         <p:nvSpPr>
-          <p:cNvPr id="5" name="Shape 3">
-            <a:extLst>
-              <a:ext uri="{FF2B5EF4-FFF2-40B4-BE49-F238E27FC236}">
-                <a16:creationId xmlns:a16="http://schemas.microsoft.com/office/drawing/2014/main" id="{2A1A2DA2-AA85-5532-D4AB-29DBD13EE5A9}"/>
+          <p:cNvPr id="5" name="Text 3">
+            <a:extLst>
+              <a:ext uri="{FF2B5EF4-FFF2-40B4-BE49-F238E27FC236}">
+                <a16:creationId xmlns:a16="http://schemas.microsoft.com/office/drawing/2014/main" id="{0CD38DCE-CE07-EC8B-7A11-FE10F2FC6EFE}"/>
               </a:ext>
             </a:extLst>
           </p:cNvPr>
@@ -14157,10 +14330,50 @@
         </p:nvSpPr>
         <p:spPr>
           <a:xfrm>
-            <a:off x="8430768" y="2194560"/>
-            <a:ext cx="170688" cy="853440"/>
+            <a:off x="8537608" y="1836992"/>
+            <a:ext cx="2438400" cy="304800"/>
           </a:xfrm>
           <a:prstGeom prst="rect">
+            <a:avLst/>
+          </a:prstGeom>
+          <a:noFill/>
+          <a:ln/>
+        </p:spPr>
+        <p:txBody>
+          <a:bodyPr wrap="square" rtlCol="0" anchor="ctr"/>
+          <a:lstStyle/>
+          <a:p>
+            <a:pPr algn="ctr"/>
+            <a:r>
+              <a:rPr lang="en-US" sz="1200" dirty="0">
+                <a:solidFill>
+                  <a:srgbClr val="030A18"/>
+                </a:solidFill>
+              </a:rPr>
+              <a:t>8×8 input</a:t>
+            </a:r>
+            <a:endParaRPr lang="en-US" sz="1200" dirty="0"/>
+          </a:p>
+        </p:txBody>
+      </p:sp>
+      <p:sp>
+        <p:nvSpPr>
+          <p:cNvPr id="6" name="Shape 4">
+            <a:extLst>
+              <a:ext uri="{FF2B5EF4-FFF2-40B4-BE49-F238E27FC236}">
+                <a16:creationId xmlns:a16="http://schemas.microsoft.com/office/drawing/2014/main" id="{D44BE87F-AE33-9387-3DF6-318DB3EC47B1}"/>
+              </a:ext>
+            </a:extLst>
+          </p:cNvPr>
+          <p:cNvSpPr/>
+          <p:nvPr/>
+        </p:nvSpPr>
+        <p:spPr>
+          <a:xfrm>
+            <a:off x="9695848" y="2239328"/>
+            <a:ext cx="121920" cy="243840"/>
+          </a:xfrm>
+          <a:prstGeom prst="downArrow">
             <a:avLst/>
           </a:prstGeom>
           <a:solidFill>
@@ -14183,10 +14396,10 @@
       </p:sp>
       <p:sp>
         <p:nvSpPr>
-          <p:cNvPr id="6" name="Text 4">
-            <a:extLst>
-              <a:ext uri="{FF2B5EF4-FFF2-40B4-BE49-F238E27FC236}">
-                <a16:creationId xmlns:a16="http://schemas.microsoft.com/office/drawing/2014/main" id="{7789673D-64FB-AB13-FB3F-661E9498B7A3}"/>
+          <p:cNvPr id="7" name="Shape 5">
+            <a:extLst>
+              <a:ext uri="{FF2B5EF4-FFF2-40B4-BE49-F238E27FC236}">
+                <a16:creationId xmlns:a16="http://schemas.microsoft.com/office/drawing/2014/main" id="{4A2FDA7E-06B0-488A-26CB-28154A4EE924}"/>
               </a:ext>
             </a:extLst>
           </p:cNvPr>
@@ -14195,50 +14408,13 @@
         </p:nvSpPr>
         <p:spPr>
           <a:xfrm>
-            <a:off x="8046720" y="3084576"/>
-            <a:ext cx="853440" cy="304800"/>
+            <a:off x="8537608" y="2605088"/>
+            <a:ext cx="2438400" cy="548640"/>
           </a:xfrm>
-          <a:prstGeom prst="rect">
-            <a:avLst/>
-          </a:prstGeom>
-          <a:noFill/>
-          <a:ln/>
-        </p:spPr>
-        <p:txBody>
-          <a:bodyPr wrap="square" rtlCol="0" anchor="ctr"/>
-          <a:lstStyle/>
-          <a:p>
-            <a:pPr algn="ctr"/>
-            <a:r>
-              <a:rPr lang="en-US" sz="1200" dirty="0">
-                <a:solidFill>
-                  <a:srgbClr val="00427A"/>
-                </a:solidFill>
-              </a:rPr>
-              <a:t>Edges</a:t>
-            </a:r>
-          </a:p>
-        </p:txBody>
-      </p:sp>
-      <p:sp>
-        <p:nvSpPr>
-          <p:cNvPr id="7" name="Shape 5">
-            <a:extLst>
-              <a:ext uri="{FF2B5EF4-FFF2-40B4-BE49-F238E27FC236}">
-                <a16:creationId xmlns:a16="http://schemas.microsoft.com/office/drawing/2014/main" id="{00051597-D4C8-7D63-20AD-8086A519F94D}"/>
-              </a:ext>
-            </a:extLst>
-          </p:cNvPr>
-          <p:cNvSpPr/>
-          <p:nvPr/>
-        </p:nvSpPr>
-        <p:spPr>
-          <a:xfrm>
-            <a:off x="8046720" y="3551872"/>
-            <a:ext cx="853440" cy="853440"/>
-          </a:xfrm>
-          <a:prstGeom prst="rect">
-            <a:avLst/>
+          <a:prstGeom prst="roundRect">
+            <a:avLst>
+              <a:gd name="adj" fmla="val 22222"/>
+            </a:avLst>
           </a:prstGeom>
           <a:solidFill>
             <a:srgbClr val="F5F5F5"/>
@@ -14254,20 +14430,16 @@
           <a:bodyPr/>
           <a:lstStyle/>
           <a:p>
-            <a:endParaRPr sz="2400">
-              <a:solidFill>
-                <a:srgbClr val="00427A"/>
-              </a:solidFill>
-            </a:endParaRPr>
-          </a:p>
-        </p:txBody>
-      </p:sp>
-      <p:sp>
-        <p:nvSpPr>
-          <p:cNvPr id="8" name="Shape 6">
-            <a:extLst>
-              <a:ext uri="{FF2B5EF4-FFF2-40B4-BE49-F238E27FC236}">
-                <a16:creationId xmlns:a16="http://schemas.microsoft.com/office/drawing/2014/main" id="{D8ABC4F2-FDEF-DBDE-9734-EBB13DA6A7DF}"/>
+            <a:endParaRPr sz="2400"/>
+          </a:p>
+        </p:txBody>
+      </p:sp>
+      <p:sp>
+        <p:nvSpPr>
+          <p:cNvPr id="8" name="Text 6">
+            <a:extLst>
+              <a:ext uri="{FF2B5EF4-FFF2-40B4-BE49-F238E27FC236}">
+                <a16:creationId xmlns:a16="http://schemas.microsoft.com/office/drawing/2014/main" id="{972EBB43-C51C-5E2E-ED92-1595C81815CD}"/>
               </a:ext>
             </a:extLst>
           </p:cNvPr>
@@ -14276,10 +14448,50 @@
         </p:nvSpPr>
         <p:spPr>
           <a:xfrm>
-            <a:off x="8046720" y="4149280"/>
-            <a:ext cx="853440" cy="256032"/>
+            <a:off x="8537608" y="2751392"/>
+            <a:ext cx="2438400" cy="304800"/>
           </a:xfrm>
           <a:prstGeom prst="rect">
+            <a:avLst/>
+          </a:prstGeom>
+          <a:noFill/>
+          <a:ln/>
+        </p:spPr>
+        <p:txBody>
+          <a:bodyPr wrap="square" rtlCol="0" anchor="ctr"/>
+          <a:lstStyle/>
+          <a:p>
+            <a:pPr algn="ctr"/>
+            <a:r>
+              <a:rPr lang="en-US" sz="1200" dirty="0">
+                <a:solidFill>
+                  <a:srgbClr val="030A18"/>
+                </a:solidFill>
+              </a:rPr>
+              <a:t>Conv, ReLU &amp; pool</a:t>
+            </a:r>
+            <a:endParaRPr lang="en-US" sz="1200" dirty="0"/>
+          </a:p>
+        </p:txBody>
+      </p:sp>
+      <p:sp>
+        <p:nvSpPr>
+          <p:cNvPr id="9" name="Shape 7">
+            <a:extLst>
+              <a:ext uri="{FF2B5EF4-FFF2-40B4-BE49-F238E27FC236}">
+                <a16:creationId xmlns:a16="http://schemas.microsoft.com/office/drawing/2014/main" id="{D6393EB7-6AEC-1D64-50E9-1DD06BE61D6B}"/>
+              </a:ext>
+            </a:extLst>
+          </p:cNvPr>
+          <p:cNvSpPr/>
+          <p:nvPr/>
+        </p:nvSpPr>
+        <p:spPr>
+          <a:xfrm>
+            <a:off x="9695848" y="3153728"/>
+            <a:ext cx="121920" cy="243840"/>
+          </a:xfrm>
+          <a:prstGeom prst="downArrow">
             <a:avLst/>
           </a:prstGeom>
           <a:solidFill>
@@ -14296,20 +14508,16 @@
           <a:bodyPr/>
           <a:lstStyle/>
           <a:p>
-            <a:endParaRPr sz="2400">
-              <a:solidFill>
-                <a:srgbClr val="00427A"/>
-              </a:solidFill>
-            </a:endParaRPr>
-          </a:p>
-        </p:txBody>
-      </p:sp>
-      <p:sp>
-        <p:nvSpPr>
-          <p:cNvPr id="9" name="Shape 7">
-            <a:extLst>
-              <a:ext uri="{FF2B5EF4-FFF2-40B4-BE49-F238E27FC236}">
-                <a16:creationId xmlns:a16="http://schemas.microsoft.com/office/drawing/2014/main" id="{44C04293-ADC2-A177-B877-3E250AB8A40B}"/>
+            <a:endParaRPr sz="2400"/>
+          </a:p>
+        </p:txBody>
+      </p:sp>
+      <p:sp>
+        <p:nvSpPr>
+          <p:cNvPr id="10" name="Shape 8">
+            <a:extLst>
+              <a:ext uri="{FF2B5EF4-FFF2-40B4-BE49-F238E27FC236}">
+                <a16:creationId xmlns:a16="http://schemas.microsoft.com/office/drawing/2014/main" id="{A72E7942-E6B7-227E-F4E4-04E5A58D1823}"/>
               </a:ext>
             </a:extLst>
           </p:cNvPr>
@@ -14318,10 +14526,90 @@
         </p:nvSpPr>
         <p:spPr>
           <a:xfrm>
-            <a:off x="8046720" y="3551872"/>
-            <a:ext cx="256032" cy="853440"/>
+            <a:off x="8537608" y="3519488"/>
+            <a:ext cx="2438400" cy="548640"/>
+          </a:xfrm>
+          <a:prstGeom prst="roundRect">
+            <a:avLst>
+              <a:gd name="adj" fmla="val 22222"/>
+            </a:avLst>
+          </a:prstGeom>
+          <a:solidFill>
+            <a:srgbClr val="F5F5F5"/>
+          </a:solidFill>
+          <a:ln w="12700">
+            <a:solidFill>
+              <a:srgbClr val="030A18"/>
+            </a:solidFill>
+            <a:prstDash val="solid"/>
+          </a:ln>
+        </p:spPr>
+        <p:txBody>
+          <a:bodyPr/>
+          <a:lstStyle/>
+          <a:p>
+            <a:endParaRPr sz="2400"/>
+          </a:p>
+        </p:txBody>
+      </p:sp>
+      <p:sp>
+        <p:nvSpPr>
+          <p:cNvPr id="11" name="Text 9">
+            <a:extLst>
+              <a:ext uri="{FF2B5EF4-FFF2-40B4-BE49-F238E27FC236}">
+                <a16:creationId xmlns:a16="http://schemas.microsoft.com/office/drawing/2014/main" id="{BB025A97-51AA-2C7B-F767-894867906B54}"/>
+              </a:ext>
+            </a:extLst>
+          </p:cNvPr>
+          <p:cNvSpPr/>
+          <p:nvPr/>
+        </p:nvSpPr>
+        <p:spPr>
+          <a:xfrm>
+            <a:off x="8537608" y="3665792"/>
+            <a:ext cx="2438400" cy="304800"/>
           </a:xfrm>
           <a:prstGeom prst="rect">
+            <a:avLst/>
+          </a:prstGeom>
+          <a:noFill/>
+          <a:ln/>
+        </p:spPr>
+        <p:txBody>
+          <a:bodyPr wrap="square" rtlCol="0" anchor="ctr"/>
+          <a:lstStyle/>
+          <a:p>
+            <a:pPr algn="ctr"/>
+            <a:r>
+              <a:rPr lang="en-US" sz="1200" dirty="0">
+                <a:solidFill>
+                  <a:srgbClr val="030A18"/>
+                </a:solidFill>
+              </a:rPr>
+              <a:t>Flatten</a:t>
+            </a:r>
+            <a:endParaRPr lang="en-US" sz="1200" dirty="0"/>
+          </a:p>
+        </p:txBody>
+      </p:sp>
+      <p:sp>
+        <p:nvSpPr>
+          <p:cNvPr id="12" name="Shape 10">
+            <a:extLst>
+              <a:ext uri="{FF2B5EF4-FFF2-40B4-BE49-F238E27FC236}">
+                <a16:creationId xmlns:a16="http://schemas.microsoft.com/office/drawing/2014/main" id="{917B660D-8F2F-4A08-E418-1A3EF1E32328}"/>
+              </a:ext>
+            </a:extLst>
+          </p:cNvPr>
+          <p:cNvSpPr/>
+          <p:nvPr/>
+        </p:nvSpPr>
+        <p:spPr>
+          <a:xfrm>
+            <a:off x="9695848" y="4068128"/>
+            <a:ext cx="121920" cy="243840"/>
+          </a:xfrm>
+          <a:prstGeom prst="downArrow">
             <a:avLst/>
           </a:prstGeom>
           <a:solidFill>
@@ -14338,20 +14626,16 @@
           <a:bodyPr/>
           <a:lstStyle/>
           <a:p>
-            <a:endParaRPr sz="2400">
-              <a:solidFill>
-                <a:srgbClr val="00427A"/>
-              </a:solidFill>
-            </a:endParaRPr>
-          </a:p>
-        </p:txBody>
-      </p:sp>
-      <p:sp>
-        <p:nvSpPr>
-          <p:cNvPr id="10" name="Text 8">
-            <a:extLst>
-              <a:ext uri="{FF2B5EF4-FFF2-40B4-BE49-F238E27FC236}">
-                <a16:creationId xmlns:a16="http://schemas.microsoft.com/office/drawing/2014/main" id="{A6A2ED08-5ED2-057E-832B-CD04C9F9E95B}"/>
+            <a:endParaRPr sz="2400"/>
+          </a:p>
+        </p:txBody>
+      </p:sp>
+      <p:sp>
+        <p:nvSpPr>
+          <p:cNvPr id="13" name="Shape 11">
+            <a:extLst>
+              <a:ext uri="{FF2B5EF4-FFF2-40B4-BE49-F238E27FC236}">
+                <a16:creationId xmlns:a16="http://schemas.microsoft.com/office/drawing/2014/main" id="{95D628C3-35CF-0751-3DE9-2FA67DE74091}"/>
               </a:ext>
             </a:extLst>
           </p:cNvPr>
@@ -14360,50 +14644,13 @@
         </p:nvSpPr>
         <p:spPr>
           <a:xfrm>
-            <a:off x="8046720" y="4441888"/>
-            <a:ext cx="853440" cy="304800"/>
+            <a:off x="8537608" y="4433888"/>
+            <a:ext cx="2438400" cy="548640"/>
           </a:xfrm>
-          <a:prstGeom prst="rect">
-            <a:avLst/>
-          </a:prstGeom>
-          <a:noFill/>
-          <a:ln/>
-        </p:spPr>
-        <p:txBody>
-          <a:bodyPr wrap="square" rtlCol="0" anchor="ctr"/>
-          <a:lstStyle/>
-          <a:p>
-            <a:pPr algn="ctr"/>
-            <a:r>
-              <a:rPr lang="en-US" sz="1200" dirty="0">
-                <a:solidFill>
-                  <a:srgbClr val="00427A"/>
-                </a:solidFill>
-              </a:rPr>
-              <a:t>Motifs</a:t>
-            </a:r>
-          </a:p>
-        </p:txBody>
-      </p:sp>
-      <p:sp>
-        <p:nvSpPr>
-          <p:cNvPr id="11" name="Shape 9">
-            <a:extLst>
-              <a:ext uri="{FF2B5EF4-FFF2-40B4-BE49-F238E27FC236}">
-                <a16:creationId xmlns:a16="http://schemas.microsoft.com/office/drawing/2014/main" id="{854A4F42-6768-3E09-239A-FF65DF58FD9B}"/>
-              </a:ext>
-            </a:extLst>
-          </p:cNvPr>
-          <p:cNvSpPr/>
-          <p:nvPr/>
-        </p:nvSpPr>
-        <p:spPr>
-          <a:xfrm>
-            <a:off x="8046720" y="4932499"/>
-            <a:ext cx="853440" cy="853440"/>
-          </a:xfrm>
-          <a:prstGeom prst="rect">
-            <a:avLst/>
+          <a:prstGeom prst="roundRect">
+            <a:avLst>
+              <a:gd name="adj" fmla="val 22222"/>
+            </a:avLst>
           </a:prstGeom>
           <a:solidFill>
             <a:srgbClr val="F5F5F5"/>
@@ -14419,20 +14666,16 @@
           <a:bodyPr/>
           <a:lstStyle/>
           <a:p>
-            <a:endParaRPr sz="2400">
-              <a:solidFill>
-                <a:srgbClr val="00427A"/>
-              </a:solidFill>
-            </a:endParaRPr>
-          </a:p>
-        </p:txBody>
-      </p:sp>
-      <p:sp>
-        <p:nvSpPr>
-          <p:cNvPr id="12" name="Shape 10">
-            <a:extLst>
-              <a:ext uri="{FF2B5EF4-FFF2-40B4-BE49-F238E27FC236}">
-                <a16:creationId xmlns:a16="http://schemas.microsoft.com/office/drawing/2014/main" id="{E2386184-55FE-A5A4-0463-9E8AF2F2E8E6}"/>
+            <a:endParaRPr sz="2400"/>
+          </a:p>
+        </p:txBody>
+      </p:sp>
+      <p:sp>
+        <p:nvSpPr>
+          <p:cNvPr id="14" name="Text 12">
+            <a:extLst>
+              <a:ext uri="{FF2B5EF4-FFF2-40B4-BE49-F238E27FC236}">
+                <a16:creationId xmlns:a16="http://schemas.microsoft.com/office/drawing/2014/main" id="{B888C678-2CDF-A711-E278-7C5E1345E1E3}"/>
               </a:ext>
             </a:extLst>
           </p:cNvPr>
@@ -14441,92 +14684,8 @@
         </p:nvSpPr>
         <p:spPr>
           <a:xfrm>
-            <a:off x="8345424" y="5316547"/>
-            <a:ext cx="298704" cy="213360"/>
-          </a:xfrm>
-          <a:prstGeom prst="rect">
-            <a:avLst/>
-          </a:prstGeom>
-          <a:solidFill>
-            <a:srgbClr val="030A18"/>
-          </a:solidFill>
-          <a:ln w="12700">
-            <a:solidFill>
-              <a:srgbClr val="030A18"/>
-            </a:solidFill>
-            <a:prstDash val="solid"/>
-          </a:ln>
-        </p:spPr>
-        <p:txBody>
-          <a:bodyPr/>
-          <a:lstStyle/>
-          <a:p>
-            <a:endParaRPr sz="2400">
-              <a:solidFill>
-                <a:srgbClr val="00427A"/>
-              </a:solidFill>
-            </a:endParaRPr>
-          </a:p>
-        </p:txBody>
-      </p:sp>
-      <p:sp>
-        <p:nvSpPr>
-          <p:cNvPr id="13" name="Shape 11">
-            <a:extLst>
-              <a:ext uri="{FF2B5EF4-FFF2-40B4-BE49-F238E27FC236}">
-                <a16:creationId xmlns:a16="http://schemas.microsoft.com/office/drawing/2014/main" id="{7C7EA9A1-2B89-09BD-F56C-EA6932D3EDDA}"/>
-              </a:ext>
-            </a:extLst>
-          </p:cNvPr>
-          <p:cNvSpPr/>
-          <p:nvPr/>
-        </p:nvSpPr>
-        <p:spPr>
-          <a:xfrm>
-            <a:off x="8516112" y="5145859"/>
-            <a:ext cx="213360" cy="213360"/>
-          </a:xfrm>
-          <a:prstGeom prst="ellipse">
-            <a:avLst/>
-          </a:prstGeom>
-          <a:solidFill>
-            <a:srgbClr val="030A18"/>
-          </a:solidFill>
-          <a:ln w="12700">
-            <a:solidFill>
-              <a:srgbClr val="030A18"/>
-            </a:solidFill>
-            <a:prstDash val="solid"/>
-          </a:ln>
-        </p:spPr>
-        <p:txBody>
-          <a:bodyPr/>
-          <a:lstStyle/>
-          <a:p>
-            <a:endParaRPr sz="2400">
-              <a:solidFill>
-                <a:srgbClr val="00427A"/>
-              </a:solidFill>
-            </a:endParaRPr>
-          </a:p>
-        </p:txBody>
-      </p:sp>
-      <p:sp>
-        <p:nvSpPr>
-          <p:cNvPr id="14" name="Text 12">
-            <a:extLst>
-              <a:ext uri="{FF2B5EF4-FFF2-40B4-BE49-F238E27FC236}">
-                <a16:creationId xmlns:a16="http://schemas.microsoft.com/office/drawing/2014/main" id="{CA1029C0-1C99-D493-E76F-0C3B8D91CF10}"/>
-              </a:ext>
-            </a:extLst>
-          </p:cNvPr>
-          <p:cNvSpPr/>
-          <p:nvPr/>
-        </p:nvSpPr>
-        <p:spPr>
-          <a:xfrm>
-            <a:off x="8046720" y="5822515"/>
-            <a:ext cx="853440" cy="304800"/>
+            <a:off x="8537608" y="4580192"/>
+            <a:ext cx="2438400" cy="304800"/>
           </a:xfrm>
           <a:prstGeom prst="rect">
             <a:avLst/>
@@ -14542,11 +14701,12 @@
             <a:r>
               <a:rPr lang="en-US" sz="1200" dirty="0">
                 <a:solidFill>
-                  <a:srgbClr val="00427A"/>
+                  <a:srgbClr val="030A18"/>
                 </a:solidFill>
               </a:rPr>
-              <a:t>Objects</a:t>
-            </a:r>
+              <a:t>Dense→output</a:t>
+            </a:r>
+            <a:endParaRPr lang="en-US" sz="1200" dirty="0"/>
           </a:p>
         </p:txBody>
       </p:sp>
@@ -14555,7 +14715,7 @@
           <p:cNvPr id="15" name="Slide Number Placeholder 14">
             <a:extLst>
               <a:ext uri="{FF2B5EF4-FFF2-40B4-BE49-F238E27FC236}">
-                <a16:creationId xmlns:a16="http://schemas.microsoft.com/office/drawing/2014/main" id="{FF574FC4-659F-CD18-8BCB-439750497D62}"/>
+                <a16:creationId xmlns:a16="http://schemas.microsoft.com/office/drawing/2014/main" id="{EDCEA169-2644-2E44-16E3-8D434292EBC1}"/>
               </a:ext>
             </a:extLst>
           </p:cNvPr>
@@ -14582,7 +14742,7 @@
     </p:spTree>
     <p:extLst>
       <p:ext uri="{BB962C8B-B14F-4D97-AF65-F5344CB8AC3E}">
-        <p14:creationId xmlns:p14="http://schemas.microsoft.com/office/powerpoint/2010/main" val="1469555029"/>
+        <p14:creationId xmlns:p14="http://schemas.microsoft.com/office/powerpoint/2010/main" val="3059324801"/>
       </p:ext>
     </p:extLst>
   </p:cSld>
@@ -14614,7 +14774,7 @@
           <p:cNvPr id="2" name="Title 1">
             <a:extLst>
               <a:ext uri="{FF2B5EF4-FFF2-40B4-BE49-F238E27FC236}">
-                <a16:creationId xmlns:a16="http://schemas.microsoft.com/office/drawing/2014/main" id="{09033F2D-C47D-4AF9-BFD2-12588C0BF940}"/>
+                <a16:creationId xmlns:a16="http://schemas.microsoft.com/office/drawing/2014/main" id="{6EA08234-21BB-7B51-C9F1-B72B7503D452}"/>
               </a:ext>
             </a:extLst>
           </p:cNvPr>
@@ -14622,7 +14782,7 @@
             <a:spLocks noGrp="1"/>
           </p:cNvSpPr>
           <p:nvPr>
-            <p:ph type="title"/>
+            <p:ph type="ctrTitle"/>
           </p:nvPr>
         </p:nvSpPr>
         <p:spPr/>
@@ -14630,19 +14790,16 @@
           <a:bodyPr/>
           <a:lstStyle/>
           <a:p>
-            <a:r>
-              <a:rPr lang="en-US" dirty="0"/>
-              <a:t>Stitching ideas together</a:t>
-            </a:r>
-          </a:p>
-        </p:txBody>
-      </p:sp>
-      <p:sp>
-        <p:nvSpPr>
-          <p:cNvPr id="3" name="Content Placeholder 2">
-            <a:extLst>
-              <a:ext uri="{FF2B5EF4-FFF2-40B4-BE49-F238E27FC236}">
-                <a16:creationId xmlns:a16="http://schemas.microsoft.com/office/drawing/2014/main" id="{3FCECF5E-10F8-FEA0-30F4-B9A3E7E7B1A9}"/>
+            <a:endParaRPr lang="en-US"/>
+          </a:p>
+        </p:txBody>
+      </p:sp>
+      <p:sp>
+        <p:nvSpPr>
+          <p:cNvPr id="3" name="Subtitle 2">
+            <a:extLst>
+              <a:ext uri="{FF2B5EF4-FFF2-40B4-BE49-F238E27FC236}">
+                <a16:creationId xmlns:a16="http://schemas.microsoft.com/office/drawing/2014/main" id="{DA256048-8641-41D4-2061-F351C2384EEE}"/>
               </a:ext>
             </a:extLst>
           </p:cNvPr>
@@ -14650,82 +14807,15 @@
             <a:spLocks noGrp="1"/>
           </p:cNvSpPr>
           <p:nvPr>
-            <p:ph idx="1"/>
+            <p:ph type="subTitle" idx="1"/>
           </p:nvPr>
         </p:nvSpPr>
         <p:spPr/>
         <p:txBody>
-          <a:bodyPr>
-            <a:normAutofit fontScale="92500" lnSpcReduction="10000"/>
-          </a:bodyPr>
-          <a:lstStyle/>
-          <a:p>
-            <a:r>
-              <a:rPr lang="en-US" dirty="0"/>
-              <a:t>Dropout: mitigates over‑fitting by randomly deactivating units.</a:t>
-            </a:r>
-          </a:p>
-          <a:p>
-            <a:r>
-              <a:rPr lang="en-US" dirty="0"/>
-              <a:t>Weight decay (also known L2 </a:t>
-            </a:r>
-            <a:r>
-              <a:rPr lang="en-US" dirty="0" err="1"/>
-              <a:t>regularisation</a:t>
-            </a:r>
-            <a:r>
-              <a:rPr lang="en-US" dirty="0"/>
-              <a:t> or dilution): </a:t>
-            </a:r>
-            <a:r>
-              <a:rPr lang="en-US" dirty="0" err="1"/>
-              <a:t>penalises</a:t>
-            </a:r>
-            <a:r>
-              <a:rPr lang="en-US" dirty="0"/>
-              <a:t> large weights to encourage smoother models.</a:t>
-            </a:r>
-          </a:p>
-          <a:p>
-            <a:r>
-              <a:rPr lang="en-US" dirty="0"/>
-              <a:t>Data augmentation: synthetically enlarge datasets by random cropping, flipping, scaling.</a:t>
-            </a:r>
-          </a:p>
-          <a:p>
-            <a:r>
-              <a:rPr lang="en-US" dirty="0"/>
-              <a:t>Mini‑batch training &amp; </a:t>
-            </a:r>
-            <a:r>
-              <a:rPr lang="en-US" dirty="0" err="1"/>
-              <a:t>optimisation</a:t>
-            </a:r>
-            <a:r>
-              <a:rPr lang="en-US" dirty="0"/>
-              <a:t>: stochastic gradient descent (SGD) with Adam </a:t>
-            </a:r>
-            <a:r>
-              <a:rPr lang="en-US" dirty="0" err="1"/>
-              <a:t>optimiser</a:t>
-            </a:r>
-            <a:r>
-              <a:rPr lang="en-US" dirty="0"/>
-              <a:t> improves convergence.</a:t>
-            </a:r>
-          </a:p>
-          <a:p>
-            <a:r>
-              <a:rPr lang="en-US" dirty="0"/>
-              <a:t>Early stopping: monitor validation loss and stop training when performance no longer improves.</a:t>
-            </a:r>
-          </a:p>
-          <a:p>
-            <a:endParaRPr lang="en-US" dirty="0"/>
-          </a:p>
-          <a:p>
-            <a:endParaRPr lang="en-US" dirty="0"/>
+          <a:bodyPr/>
+          <a:lstStyle/>
+          <a:p>
+            <a:endParaRPr lang="en-US"/>
           </a:p>
         </p:txBody>
       </p:sp>
@@ -14734,7 +14824,7 @@
           <p:cNvPr id="4" name="Slide Number Placeholder 3">
             <a:extLst>
               <a:ext uri="{FF2B5EF4-FFF2-40B4-BE49-F238E27FC236}">
-                <a16:creationId xmlns:a16="http://schemas.microsoft.com/office/drawing/2014/main" id="{5C32A0D1-1AF9-E4C4-6C69-DB524BB19650}"/>
+                <a16:creationId xmlns:a16="http://schemas.microsoft.com/office/drawing/2014/main" id="{173B0FED-D207-A594-32A2-30BFE6B8DAD6}"/>
               </a:ext>
             </a:extLst>
           </p:cNvPr>
@@ -14742,7 +14832,7 @@
             <a:spLocks noGrp="1"/>
           </p:cNvSpPr>
           <p:nvPr>
-            <p:ph type="sldNum" sz="quarter" idx="12"/>
+            <p:ph type="sldNum" sz="quarter" idx="11"/>
           </p:nvPr>
         </p:nvSpPr>
         <p:spPr/>
@@ -14758,10 +14848,40 @@
           </a:p>
         </p:txBody>
       </p:sp>
+      <p:pic>
+        <p:nvPicPr>
+          <p:cNvPr id="6" name="slide.url=https://www.polleverywhere.com/multiple_choice_polls/P5YHvumIcxuIb8NyWtIP2?state=opened&amp;flow=Default&amp;onscreen=persist">
+            <a:extLst>
+              <a:ext uri="{FF2B5EF4-FFF2-40B4-BE49-F238E27FC236}">
+                <a16:creationId xmlns:a16="http://schemas.microsoft.com/office/drawing/2014/main" id="{DA67F691-8E96-D2EE-F691-72A344B369E4}"/>
+              </a:ext>
+            </a:extLst>
+          </p:cNvPr>
+          <p:cNvPicPr>
+            <a:picLocks/>
+          </p:cNvPicPr>
+          <p:nvPr/>
+        </p:nvPicPr>
+        <p:blipFill>
+          <a:blip r:embed="rId3"/>
+          <a:stretch>
+            <a:fillRect/>
+          </a:stretch>
+        </p:blipFill>
+        <p:spPr>
+          <a:xfrm>
+            <a:off x="63500" y="63500"/>
+            <a:ext cx="12065000" cy="6731000"/>
+          </a:xfrm>
+          <a:prstGeom prst="rect">
+            <a:avLst/>
+          </a:prstGeom>
+        </p:spPr>
+      </p:pic>
     </p:spTree>
     <p:extLst>
       <p:ext uri="{BB962C8B-B14F-4D97-AF65-F5344CB8AC3E}">
-        <p14:creationId xmlns:p14="http://schemas.microsoft.com/office/powerpoint/2010/main" val="803217096"/>
+        <p14:creationId xmlns:p14="http://schemas.microsoft.com/office/powerpoint/2010/main" val="1413387481"/>
       </p:ext>
     </p:extLst>
   </p:cSld>
@@ -14793,7 +14913,7 @@
           <p:cNvPr id="2" name="Title 1">
             <a:extLst>
               <a:ext uri="{FF2B5EF4-FFF2-40B4-BE49-F238E27FC236}">
-                <a16:creationId xmlns:a16="http://schemas.microsoft.com/office/drawing/2014/main" id="{5B7920AC-7FAF-06B9-D7F6-A82DC8FA001E}"/>
+                <a16:creationId xmlns:a16="http://schemas.microsoft.com/office/drawing/2014/main" id="{617D61C6-6C4E-518A-6C4E-D18813C12B02}"/>
               </a:ext>
             </a:extLst>
           </p:cNvPr>
@@ -14811,7 +14931,7 @@
           <a:p>
             <a:r>
               <a:rPr lang="en-US" dirty="0"/>
-              <a:t>Some cool NN variants</a:t>
+              <a:t>Feature hierarchies</a:t>
             </a:r>
           </a:p>
         </p:txBody>
@@ -14821,7 +14941,7 @@
           <p:cNvPr id="3" name="Content Placeholder 2">
             <a:extLst>
               <a:ext uri="{FF2B5EF4-FFF2-40B4-BE49-F238E27FC236}">
-                <a16:creationId xmlns:a16="http://schemas.microsoft.com/office/drawing/2014/main" id="{8F2EECDC-D536-D628-1D76-7765F5B3CE69}"/>
+                <a16:creationId xmlns:a16="http://schemas.microsoft.com/office/drawing/2014/main" id="{3BF4C7CE-594D-F50C-1F06-5C3B3D97CE52}"/>
               </a:ext>
             </a:extLst>
           </p:cNvPr>
@@ -14832,80 +14952,500 @@
             <p:ph idx="1"/>
           </p:nvPr>
         </p:nvSpPr>
-        <p:spPr/>
+        <p:spPr>
+          <a:xfrm>
+            <a:off x="838200" y="1825625"/>
+            <a:ext cx="6091989" cy="4149290"/>
+          </a:xfrm>
+        </p:spPr>
         <p:txBody>
           <a:bodyPr>
-            <a:normAutofit lnSpcReduction="10000"/>
+            <a:normAutofit fontScale="92500" lnSpcReduction="10000"/>
           </a:bodyPr>
           <a:lstStyle/>
           <a:p>
             <a:r>
               <a:rPr lang="en-US" dirty="0"/>
-              <a:t>Activation variants: Leaky </a:t>
-            </a:r>
-            <a:r>
-              <a:rPr lang="en-US" dirty="0" err="1"/>
-              <a:t>ReLU</a:t>
-            </a:r>
+              <a:t>Convolutional networks learn hierarchical features</a:t>
+            </a:r>
+          </a:p>
+          <a:p>
             <a:r>
               <a:rPr lang="en-US" dirty="0"/>
-              <a:t> allows a small gradient for negative inputs; ELU and SELU reduce vanishing gradients; </a:t>
-            </a:r>
-            <a:r>
-              <a:rPr lang="en-US" dirty="0" err="1"/>
-              <a:t>Softmax</a:t>
-            </a:r>
+              <a:t>Early layers detect simple edges and textures</a:t>
+            </a:r>
+          </a:p>
+          <a:p>
             <a:r>
               <a:rPr lang="en-US" dirty="0"/>
-              <a:t> maps outputs to a probability distribution for classification.</a:t>
-            </a:r>
-          </a:p>
-          <a:p>
-            <a:r>
-              <a:rPr lang="en-US" dirty="0" err="1"/>
-              <a:t>Normalisation</a:t>
-            </a:r>
+              <a:t>Intermediate layers combine edges into motifs (e.g. corners, curves)</a:t>
+            </a:r>
+          </a:p>
+          <a:p>
             <a:r>
               <a:rPr lang="en-US" dirty="0"/>
-              <a:t> variants: Layer norm </a:t>
-            </a:r>
-            <a:r>
-              <a:rPr lang="en-US" dirty="0" err="1"/>
-              <a:t>normalises</a:t>
-            </a:r>
+              <a:t>Deeper layers capture high‑level parts and objects</a:t>
+            </a:r>
+          </a:p>
+          <a:p>
             <a:r>
               <a:rPr lang="en-US" dirty="0"/>
-              <a:t> across features within one example; Group norm </a:t>
-            </a:r>
-            <a:r>
-              <a:rPr lang="en-US" dirty="0" err="1"/>
-              <a:t>normalises</a:t>
-            </a:r>
-            <a:r>
-              <a:rPr lang="en-US" dirty="0"/>
-              <a:t> within groups of channels; Instance norm for style transfer tasks.</a:t>
-            </a:r>
-          </a:p>
-          <a:p>
-            <a:r>
-              <a:rPr lang="en-US" dirty="0"/>
-              <a:t>Dropout variants: Spatial dropout drops entire feature maps; Shake‑Drop perturbs activations stochastically.</a:t>
-            </a:r>
-          </a:p>
-          <a:p>
-            <a:endParaRPr lang="en-US" dirty="0"/>
-          </a:p>
-          <a:p>
-            <a:endParaRPr lang="en-US" dirty="0"/>
-          </a:p>
-        </p:txBody>
-      </p:sp>
-      <p:sp>
-        <p:nvSpPr>
-          <p:cNvPr id="4" name="Slide Number Placeholder 3">
-            <a:extLst>
-              <a:ext uri="{FF2B5EF4-FFF2-40B4-BE49-F238E27FC236}">
-                <a16:creationId xmlns:a16="http://schemas.microsoft.com/office/drawing/2014/main" id="{B3CF63BE-D315-3838-3CF8-05BCF94A8588}"/>
+              <a:t>Illustrated on the right are abstract patterns representing different levels of abstraction</a:t>
+            </a:r>
+          </a:p>
+        </p:txBody>
+      </p:sp>
+      <p:sp>
+        <p:nvSpPr>
+          <p:cNvPr id="4" name="Shape 2">
+            <a:extLst>
+              <a:ext uri="{FF2B5EF4-FFF2-40B4-BE49-F238E27FC236}">
+                <a16:creationId xmlns:a16="http://schemas.microsoft.com/office/drawing/2014/main" id="{94CBA745-99C5-EEB5-831F-06A0D0BC6361}"/>
+              </a:ext>
+            </a:extLst>
+          </p:cNvPr>
+          <p:cNvSpPr/>
+          <p:nvPr/>
+        </p:nvSpPr>
+        <p:spPr>
+          <a:xfrm>
+            <a:off x="8046720" y="2194560"/>
+            <a:ext cx="853440" cy="853440"/>
+          </a:xfrm>
+          <a:prstGeom prst="rect">
+            <a:avLst/>
+          </a:prstGeom>
+          <a:solidFill>
+            <a:srgbClr val="F5F5F5"/>
+          </a:solidFill>
+          <a:ln w="12700">
+            <a:solidFill>
+              <a:srgbClr val="030A18"/>
+            </a:solidFill>
+            <a:prstDash val="solid"/>
+          </a:ln>
+        </p:spPr>
+        <p:txBody>
+          <a:bodyPr/>
+          <a:lstStyle/>
+          <a:p>
+            <a:endParaRPr sz="2400"/>
+          </a:p>
+        </p:txBody>
+      </p:sp>
+      <p:sp>
+        <p:nvSpPr>
+          <p:cNvPr id="5" name="Shape 3">
+            <a:extLst>
+              <a:ext uri="{FF2B5EF4-FFF2-40B4-BE49-F238E27FC236}">
+                <a16:creationId xmlns:a16="http://schemas.microsoft.com/office/drawing/2014/main" id="{2A1A2DA2-AA85-5532-D4AB-29DBD13EE5A9}"/>
+              </a:ext>
+            </a:extLst>
+          </p:cNvPr>
+          <p:cNvSpPr/>
+          <p:nvPr/>
+        </p:nvSpPr>
+        <p:spPr>
+          <a:xfrm>
+            <a:off x="8430768" y="2194560"/>
+            <a:ext cx="170688" cy="853440"/>
+          </a:xfrm>
+          <a:prstGeom prst="rect">
+            <a:avLst/>
+          </a:prstGeom>
+          <a:solidFill>
+            <a:srgbClr val="030A18"/>
+          </a:solidFill>
+          <a:ln w="12700">
+            <a:solidFill>
+              <a:srgbClr val="030A18"/>
+            </a:solidFill>
+            <a:prstDash val="solid"/>
+          </a:ln>
+        </p:spPr>
+        <p:txBody>
+          <a:bodyPr/>
+          <a:lstStyle/>
+          <a:p>
+            <a:endParaRPr sz="2400"/>
+          </a:p>
+        </p:txBody>
+      </p:sp>
+      <p:sp>
+        <p:nvSpPr>
+          <p:cNvPr id="6" name="Text 4">
+            <a:extLst>
+              <a:ext uri="{FF2B5EF4-FFF2-40B4-BE49-F238E27FC236}">
+                <a16:creationId xmlns:a16="http://schemas.microsoft.com/office/drawing/2014/main" id="{7789673D-64FB-AB13-FB3F-661E9498B7A3}"/>
+              </a:ext>
+            </a:extLst>
+          </p:cNvPr>
+          <p:cNvSpPr/>
+          <p:nvPr/>
+        </p:nvSpPr>
+        <p:spPr>
+          <a:xfrm>
+            <a:off x="8046720" y="3084576"/>
+            <a:ext cx="853440" cy="304800"/>
+          </a:xfrm>
+          <a:prstGeom prst="rect">
+            <a:avLst/>
+          </a:prstGeom>
+          <a:noFill/>
+          <a:ln/>
+        </p:spPr>
+        <p:txBody>
+          <a:bodyPr wrap="square" rtlCol="0" anchor="ctr"/>
+          <a:lstStyle/>
+          <a:p>
+            <a:pPr algn="ctr"/>
+            <a:r>
+              <a:rPr lang="en-US" sz="1200" dirty="0">
+                <a:solidFill>
+                  <a:srgbClr val="00427A"/>
+                </a:solidFill>
+              </a:rPr>
+              <a:t>Edges</a:t>
+            </a:r>
+          </a:p>
+        </p:txBody>
+      </p:sp>
+      <p:sp>
+        <p:nvSpPr>
+          <p:cNvPr id="7" name="Shape 5">
+            <a:extLst>
+              <a:ext uri="{FF2B5EF4-FFF2-40B4-BE49-F238E27FC236}">
+                <a16:creationId xmlns:a16="http://schemas.microsoft.com/office/drawing/2014/main" id="{00051597-D4C8-7D63-20AD-8086A519F94D}"/>
+              </a:ext>
+            </a:extLst>
+          </p:cNvPr>
+          <p:cNvSpPr/>
+          <p:nvPr/>
+        </p:nvSpPr>
+        <p:spPr>
+          <a:xfrm>
+            <a:off x="8046720" y="3551872"/>
+            <a:ext cx="853440" cy="853440"/>
+          </a:xfrm>
+          <a:prstGeom prst="rect">
+            <a:avLst/>
+          </a:prstGeom>
+          <a:solidFill>
+            <a:srgbClr val="F5F5F5"/>
+          </a:solidFill>
+          <a:ln w="12700">
+            <a:solidFill>
+              <a:srgbClr val="030A18"/>
+            </a:solidFill>
+            <a:prstDash val="solid"/>
+          </a:ln>
+        </p:spPr>
+        <p:txBody>
+          <a:bodyPr/>
+          <a:lstStyle/>
+          <a:p>
+            <a:endParaRPr sz="2400">
+              <a:solidFill>
+                <a:srgbClr val="00427A"/>
+              </a:solidFill>
+            </a:endParaRPr>
+          </a:p>
+        </p:txBody>
+      </p:sp>
+      <p:sp>
+        <p:nvSpPr>
+          <p:cNvPr id="8" name="Shape 6">
+            <a:extLst>
+              <a:ext uri="{FF2B5EF4-FFF2-40B4-BE49-F238E27FC236}">
+                <a16:creationId xmlns:a16="http://schemas.microsoft.com/office/drawing/2014/main" id="{D8ABC4F2-FDEF-DBDE-9734-EBB13DA6A7DF}"/>
+              </a:ext>
+            </a:extLst>
+          </p:cNvPr>
+          <p:cNvSpPr/>
+          <p:nvPr/>
+        </p:nvSpPr>
+        <p:spPr>
+          <a:xfrm>
+            <a:off x="8046720" y="4149280"/>
+            <a:ext cx="853440" cy="256032"/>
+          </a:xfrm>
+          <a:prstGeom prst="rect">
+            <a:avLst/>
+          </a:prstGeom>
+          <a:solidFill>
+            <a:srgbClr val="030A18"/>
+          </a:solidFill>
+          <a:ln w="12700">
+            <a:solidFill>
+              <a:srgbClr val="030A18"/>
+            </a:solidFill>
+            <a:prstDash val="solid"/>
+          </a:ln>
+        </p:spPr>
+        <p:txBody>
+          <a:bodyPr/>
+          <a:lstStyle/>
+          <a:p>
+            <a:endParaRPr sz="2400">
+              <a:solidFill>
+                <a:srgbClr val="00427A"/>
+              </a:solidFill>
+            </a:endParaRPr>
+          </a:p>
+        </p:txBody>
+      </p:sp>
+      <p:sp>
+        <p:nvSpPr>
+          <p:cNvPr id="9" name="Shape 7">
+            <a:extLst>
+              <a:ext uri="{FF2B5EF4-FFF2-40B4-BE49-F238E27FC236}">
+                <a16:creationId xmlns:a16="http://schemas.microsoft.com/office/drawing/2014/main" id="{44C04293-ADC2-A177-B877-3E250AB8A40B}"/>
+              </a:ext>
+            </a:extLst>
+          </p:cNvPr>
+          <p:cNvSpPr/>
+          <p:nvPr/>
+        </p:nvSpPr>
+        <p:spPr>
+          <a:xfrm>
+            <a:off x="8046720" y="3551872"/>
+            <a:ext cx="256032" cy="853440"/>
+          </a:xfrm>
+          <a:prstGeom prst="rect">
+            <a:avLst/>
+          </a:prstGeom>
+          <a:solidFill>
+            <a:srgbClr val="030A18"/>
+          </a:solidFill>
+          <a:ln w="12700">
+            <a:solidFill>
+              <a:srgbClr val="030A18"/>
+            </a:solidFill>
+            <a:prstDash val="solid"/>
+          </a:ln>
+        </p:spPr>
+        <p:txBody>
+          <a:bodyPr/>
+          <a:lstStyle/>
+          <a:p>
+            <a:endParaRPr sz="2400">
+              <a:solidFill>
+                <a:srgbClr val="00427A"/>
+              </a:solidFill>
+            </a:endParaRPr>
+          </a:p>
+        </p:txBody>
+      </p:sp>
+      <p:sp>
+        <p:nvSpPr>
+          <p:cNvPr id="10" name="Text 8">
+            <a:extLst>
+              <a:ext uri="{FF2B5EF4-FFF2-40B4-BE49-F238E27FC236}">
+                <a16:creationId xmlns:a16="http://schemas.microsoft.com/office/drawing/2014/main" id="{A6A2ED08-5ED2-057E-832B-CD04C9F9E95B}"/>
+              </a:ext>
+            </a:extLst>
+          </p:cNvPr>
+          <p:cNvSpPr/>
+          <p:nvPr/>
+        </p:nvSpPr>
+        <p:spPr>
+          <a:xfrm>
+            <a:off x="8046720" y="4441888"/>
+            <a:ext cx="853440" cy="304800"/>
+          </a:xfrm>
+          <a:prstGeom prst="rect">
+            <a:avLst/>
+          </a:prstGeom>
+          <a:noFill/>
+          <a:ln/>
+        </p:spPr>
+        <p:txBody>
+          <a:bodyPr wrap="square" rtlCol="0" anchor="ctr"/>
+          <a:lstStyle/>
+          <a:p>
+            <a:pPr algn="ctr"/>
+            <a:r>
+              <a:rPr lang="en-US" sz="1200" dirty="0">
+                <a:solidFill>
+                  <a:srgbClr val="00427A"/>
+                </a:solidFill>
+              </a:rPr>
+              <a:t>Motifs</a:t>
+            </a:r>
+          </a:p>
+        </p:txBody>
+      </p:sp>
+      <p:sp>
+        <p:nvSpPr>
+          <p:cNvPr id="11" name="Shape 9">
+            <a:extLst>
+              <a:ext uri="{FF2B5EF4-FFF2-40B4-BE49-F238E27FC236}">
+                <a16:creationId xmlns:a16="http://schemas.microsoft.com/office/drawing/2014/main" id="{854A4F42-6768-3E09-239A-FF65DF58FD9B}"/>
+              </a:ext>
+            </a:extLst>
+          </p:cNvPr>
+          <p:cNvSpPr/>
+          <p:nvPr/>
+        </p:nvSpPr>
+        <p:spPr>
+          <a:xfrm>
+            <a:off x="8046720" y="4932499"/>
+            <a:ext cx="853440" cy="853440"/>
+          </a:xfrm>
+          <a:prstGeom prst="rect">
+            <a:avLst/>
+          </a:prstGeom>
+          <a:solidFill>
+            <a:srgbClr val="F5F5F5"/>
+          </a:solidFill>
+          <a:ln w="12700">
+            <a:solidFill>
+              <a:srgbClr val="030A18"/>
+            </a:solidFill>
+            <a:prstDash val="solid"/>
+          </a:ln>
+        </p:spPr>
+        <p:txBody>
+          <a:bodyPr/>
+          <a:lstStyle/>
+          <a:p>
+            <a:endParaRPr sz="2400">
+              <a:solidFill>
+                <a:srgbClr val="00427A"/>
+              </a:solidFill>
+            </a:endParaRPr>
+          </a:p>
+        </p:txBody>
+      </p:sp>
+      <p:sp>
+        <p:nvSpPr>
+          <p:cNvPr id="12" name="Shape 10">
+            <a:extLst>
+              <a:ext uri="{FF2B5EF4-FFF2-40B4-BE49-F238E27FC236}">
+                <a16:creationId xmlns:a16="http://schemas.microsoft.com/office/drawing/2014/main" id="{E2386184-55FE-A5A4-0463-9E8AF2F2E8E6}"/>
+              </a:ext>
+            </a:extLst>
+          </p:cNvPr>
+          <p:cNvSpPr/>
+          <p:nvPr/>
+        </p:nvSpPr>
+        <p:spPr>
+          <a:xfrm>
+            <a:off x="8345424" y="5316547"/>
+            <a:ext cx="298704" cy="213360"/>
+          </a:xfrm>
+          <a:prstGeom prst="rect">
+            <a:avLst/>
+          </a:prstGeom>
+          <a:solidFill>
+            <a:srgbClr val="030A18"/>
+          </a:solidFill>
+          <a:ln w="12700">
+            <a:solidFill>
+              <a:srgbClr val="030A18"/>
+            </a:solidFill>
+            <a:prstDash val="solid"/>
+          </a:ln>
+        </p:spPr>
+        <p:txBody>
+          <a:bodyPr/>
+          <a:lstStyle/>
+          <a:p>
+            <a:endParaRPr sz="2400">
+              <a:solidFill>
+                <a:srgbClr val="00427A"/>
+              </a:solidFill>
+            </a:endParaRPr>
+          </a:p>
+        </p:txBody>
+      </p:sp>
+      <p:sp>
+        <p:nvSpPr>
+          <p:cNvPr id="13" name="Shape 11">
+            <a:extLst>
+              <a:ext uri="{FF2B5EF4-FFF2-40B4-BE49-F238E27FC236}">
+                <a16:creationId xmlns:a16="http://schemas.microsoft.com/office/drawing/2014/main" id="{7C7EA9A1-2B89-09BD-F56C-EA6932D3EDDA}"/>
+              </a:ext>
+            </a:extLst>
+          </p:cNvPr>
+          <p:cNvSpPr/>
+          <p:nvPr/>
+        </p:nvSpPr>
+        <p:spPr>
+          <a:xfrm>
+            <a:off x="8516112" y="5145859"/>
+            <a:ext cx="213360" cy="213360"/>
+          </a:xfrm>
+          <a:prstGeom prst="ellipse">
+            <a:avLst/>
+          </a:prstGeom>
+          <a:solidFill>
+            <a:srgbClr val="030A18"/>
+          </a:solidFill>
+          <a:ln w="12700">
+            <a:solidFill>
+              <a:srgbClr val="030A18"/>
+            </a:solidFill>
+            <a:prstDash val="solid"/>
+          </a:ln>
+        </p:spPr>
+        <p:txBody>
+          <a:bodyPr/>
+          <a:lstStyle/>
+          <a:p>
+            <a:endParaRPr sz="2400">
+              <a:solidFill>
+                <a:srgbClr val="00427A"/>
+              </a:solidFill>
+            </a:endParaRPr>
+          </a:p>
+        </p:txBody>
+      </p:sp>
+      <p:sp>
+        <p:nvSpPr>
+          <p:cNvPr id="14" name="Text 12">
+            <a:extLst>
+              <a:ext uri="{FF2B5EF4-FFF2-40B4-BE49-F238E27FC236}">
+                <a16:creationId xmlns:a16="http://schemas.microsoft.com/office/drawing/2014/main" id="{CA1029C0-1C99-D493-E76F-0C3B8D91CF10}"/>
+              </a:ext>
+            </a:extLst>
+          </p:cNvPr>
+          <p:cNvSpPr/>
+          <p:nvPr/>
+        </p:nvSpPr>
+        <p:spPr>
+          <a:xfrm>
+            <a:off x="8046720" y="5822515"/>
+            <a:ext cx="853440" cy="304800"/>
+          </a:xfrm>
+          <a:prstGeom prst="rect">
+            <a:avLst/>
+          </a:prstGeom>
+          <a:noFill/>
+          <a:ln/>
+        </p:spPr>
+        <p:txBody>
+          <a:bodyPr wrap="square" rtlCol="0" anchor="ctr"/>
+          <a:lstStyle/>
+          <a:p>
+            <a:pPr algn="ctr"/>
+            <a:r>
+              <a:rPr lang="en-US" sz="1200" dirty="0">
+                <a:solidFill>
+                  <a:srgbClr val="00427A"/>
+                </a:solidFill>
+              </a:rPr>
+              <a:t>Objects</a:t>
+            </a:r>
+          </a:p>
+        </p:txBody>
+      </p:sp>
+      <p:sp>
+        <p:nvSpPr>
+          <p:cNvPr id="15" name="Slide Number Placeholder 14">
+            <a:extLst>
+              <a:ext uri="{FF2B5EF4-FFF2-40B4-BE49-F238E27FC236}">
+                <a16:creationId xmlns:a16="http://schemas.microsoft.com/office/drawing/2014/main" id="{FF574FC4-659F-CD18-8BCB-439750497D62}"/>
               </a:ext>
             </a:extLst>
           </p:cNvPr>
@@ -14932,7 +15472,7 @@
     </p:spTree>
     <p:extLst>
       <p:ext uri="{BB962C8B-B14F-4D97-AF65-F5344CB8AC3E}">
-        <p14:creationId xmlns:p14="http://schemas.microsoft.com/office/powerpoint/2010/main" val="3259240191"/>
+        <p14:creationId xmlns:p14="http://schemas.microsoft.com/office/powerpoint/2010/main" val="1469555029"/>
       </p:ext>
     </p:extLst>
   </p:cSld>
@@ -14964,7 +15504,7 @@
           <p:cNvPr id="2" name="Title 1">
             <a:extLst>
               <a:ext uri="{FF2B5EF4-FFF2-40B4-BE49-F238E27FC236}">
-                <a16:creationId xmlns:a16="http://schemas.microsoft.com/office/drawing/2014/main" id="{5921105E-4802-3AAF-ED65-7E5AC18791D7}"/>
+                <a16:creationId xmlns:a16="http://schemas.microsoft.com/office/drawing/2014/main" id="{09033F2D-C47D-4AF9-BFD2-12588C0BF940}"/>
               </a:ext>
             </a:extLst>
           </p:cNvPr>
@@ -14982,7 +15522,7 @@
           <a:p>
             <a:r>
               <a:rPr lang="en-US" dirty="0"/>
-              <a:t>Pooling variants</a:t>
+              <a:t>Stitching ideas together</a:t>
             </a:r>
           </a:p>
         </p:txBody>
@@ -14992,7 +15532,7 @@
           <p:cNvPr id="3" name="Content Placeholder 2">
             <a:extLst>
               <a:ext uri="{FF2B5EF4-FFF2-40B4-BE49-F238E27FC236}">
-                <a16:creationId xmlns:a16="http://schemas.microsoft.com/office/drawing/2014/main" id="{64A16EEF-DC4A-3322-0000-6BB6E938A959}"/>
+                <a16:creationId xmlns:a16="http://schemas.microsoft.com/office/drawing/2014/main" id="{3FCECF5E-10F8-FEA0-30F4-B9A3E7E7B1A9}"/>
               </a:ext>
             </a:extLst>
           </p:cNvPr>
@@ -15006,44 +15546,76 @@
         <p:spPr/>
         <p:txBody>
           <a:bodyPr>
-            <a:normAutofit fontScale="92500"/>
+            <a:normAutofit fontScale="92500" lnSpcReduction="10000"/>
           </a:bodyPr>
           <a:lstStyle/>
           <a:p>
             <a:r>
               <a:rPr lang="en-US" dirty="0"/>
-              <a:t>Average pooling: computes the mean of each patch, reducing noise.</a:t>
+              <a:t>Dropout: mitigates over‑fitting by randomly deactivating units</a:t>
             </a:r>
           </a:p>
           <a:p>
             <a:r>
               <a:rPr lang="en-US" dirty="0"/>
-              <a:t>Global average pooling: replaces the fully connected layer by averaging over the entire spatial dimension per channel.</a:t>
-            </a:r>
-          </a:p>
-          <a:p>
+              <a:t>Weight decay (also known L2 </a:t>
+            </a:r>
             <a:r>
               <a:rPr lang="en-US" dirty="0" err="1"/>
-              <a:t>Strided</a:t>
+              <a:t>regularisation</a:t>
             </a:r>
             <a:r>
               <a:rPr lang="en-US" dirty="0"/>
-              <a:t> convolution: </a:t>
+              <a:t> or dilution): </a:t>
             </a:r>
             <a:r>
               <a:rPr lang="en-US" dirty="0" err="1"/>
-              <a:t>downsampling</a:t>
+              <a:t>penalises</a:t>
             </a:r>
             <a:r>
               <a:rPr lang="en-US" dirty="0"/>
-              <a:t> can also be achieved by using a stride &gt; 1 instead of separate pooling layers.</a:t>
+              <a:t> large weights to encourage smoother models</a:t>
             </a:r>
           </a:p>
           <a:p>
             <a:r>
               <a:rPr lang="en-US" dirty="0"/>
-              <a:t>Adaptive pooling: output size is specified instead of window size, automatically choosing kernel size and stride.</a:t>
-            </a:r>
+              <a:t>Data augmentation: synthetically enlarge datasets by random cropping, flipping, scaling</a:t>
+            </a:r>
+          </a:p>
+          <a:p>
+            <a:r>
+              <a:rPr lang="en-US" dirty="0"/>
+              <a:t>Mini‑batch training &amp; </a:t>
+            </a:r>
+            <a:r>
+              <a:rPr lang="en-US" dirty="0" err="1"/>
+              <a:t>optimisation</a:t>
+            </a:r>
+            <a:r>
+              <a:rPr lang="en-US" dirty="0"/>
+              <a:t>: stochastic gradient descent (SGD) with Adam </a:t>
+            </a:r>
+            <a:r>
+              <a:rPr lang="en-US" dirty="0" err="1"/>
+              <a:t>optimiser</a:t>
+            </a:r>
+            <a:r>
+              <a:rPr lang="en-US" dirty="0"/>
+              <a:t> improves convergence</a:t>
+            </a:r>
+          </a:p>
+          <a:p>
+            <a:r>
+              <a:rPr lang="en-US" dirty="0"/>
+              <a:t>Early stopping: monitor validation loss and stop training when performance no longer improves</a:t>
+            </a:r>
+          </a:p>
+          <a:p>
+            <a:endParaRPr lang="en-US" dirty="0"/>
+          </a:p>
+          <a:p>
+            <a:endParaRPr lang="en-US" dirty="0"/>
           </a:p>
         </p:txBody>
       </p:sp>
@@ -15052,7 +15624,7 @@
           <p:cNvPr id="4" name="Slide Number Placeholder 3">
             <a:extLst>
               <a:ext uri="{FF2B5EF4-FFF2-40B4-BE49-F238E27FC236}">
-                <a16:creationId xmlns:a16="http://schemas.microsoft.com/office/drawing/2014/main" id="{49B84884-F9A9-E021-64DF-956BC59DFAAD}"/>
+                <a16:creationId xmlns:a16="http://schemas.microsoft.com/office/drawing/2014/main" id="{5C32A0D1-1AF9-E4C4-6C69-DB524BB19650}"/>
               </a:ext>
             </a:extLst>
           </p:cNvPr>
@@ -15079,7 +15651,7 @@
     </p:spTree>
     <p:extLst>
       <p:ext uri="{BB962C8B-B14F-4D97-AF65-F5344CB8AC3E}">
-        <p14:creationId xmlns:p14="http://schemas.microsoft.com/office/powerpoint/2010/main" val="846030282"/>
+        <p14:creationId xmlns:p14="http://schemas.microsoft.com/office/powerpoint/2010/main" val="803217096"/>
       </p:ext>
     </p:extLst>
   </p:cSld>
@@ -15111,7 +15683,7 @@
           <p:cNvPr id="2" name="Title 1">
             <a:extLst>
               <a:ext uri="{FF2B5EF4-FFF2-40B4-BE49-F238E27FC236}">
-                <a16:creationId xmlns:a16="http://schemas.microsoft.com/office/drawing/2014/main" id="{B761C42A-DC3C-8F84-D9EA-D908CA8882E4}"/>
+                <a16:creationId xmlns:a16="http://schemas.microsoft.com/office/drawing/2014/main" id="{5B7920AC-7FAF-06B9-D7F6-A82DC8FA001E}"/>
               </a:ext>
             </a:extLst>
           </p:cNvPr>
@@ -15129,7 +15701,7 @@
           <a:p>
             <a:r>
               <a:rPr lang="en-US" dirty="0"/>
-              <a:t>A technical aside</a:t>
+              <a:t>Some cool NN variants</a:t>
             </a:r>
           </a:p>
         </p:txBody>
@@ -15139,7 +15711,7 @@
           <p:cNvPr id="3" name="Content Placeholder 2">
             <a:extLst>
               <a:ext uri="{FF2B5EF4-FFF2-40B4-BE49-F238E27FC236}">
-                <a16:creationId xmlns:a16="http://schemas.microsoft.com/office/drawing/2014/main" id="{4078E805-D582-84E7-4540-D73589D39C17}"/>
+                <a16:creationId xmlns:a16="http://schemas.microsoft.com/office/drawing/2014/main" id="{8F2EECDC-D536-D628-1D76-7765F5B3CE69}"/>
               </a:ext>
             </a:extLst>
           </p:cNvPr>
@@ -15159,37 +15731,55 @@
           <a:p>
             <a:r>
               <a:rPr lang="en-US" dirty="0"/>
-              <a:t>Convolution can be reinterpreted as a matrix multiplication by unrolling the input into patches (im2col) and flattening the filter.</a:t>
-            </a:r>
-          </a:p>
-          <a:p>
+              <a:t>Activation variants: Leaky </a:t>
+            </a:r>
+            <a:r>
+              <a:rPr lang="en-US" dirty="0" err="1"/>
+              <a:t>ReLU</a:t>
+            </a:r>
             <a:r>
               <a:rPr lang="en-US" dirty="0"/>
-              <a:t>This representation allows us to leverage highly </a:t>
+              <a:t> allows a small gradient for negative inputs; ELU and SELU reduce vanishing gradients; </a:t>
             </a:r>
             <a:r>
               <a:rPr lang="en-US" dirty="0" err="1"/>
-              <a:t>optimised</a:t>
+              <a:t>Softmax</a:t>
             </a:r>
             <a:r>
               <a:rPr lang="en-US" dirty="0"/>
-              <a:t> matrix multiplication routines (e.g. BLAS) but at the cost of increased memory.</a:t>
-            </a:r>
-          </a:p>
-          <a:p>
+              <a:t> maps outputs to a probability distribution for classification</a:t>
+            </a:r>
+          </a:p>
+          <a:p>
+            <a:r>
+              <a:rPr lang="en-US" dirty="0" err="1"/>
+              <a:t>Normalisation</a:t>
+            </a:r>
             <a:r>
               <a:rPr lang="en-US" dirty="0"/>
-              <a:t>Illustration: 2×2 filter applied to a 3×3 input yields a Toeplitz matrix of size 4×9 multiplied by the flattened filter vector.</a:t>
-            </a:r>
-          </a:p>
-          <a:p>
-            <a:r>
-              <a:rPr lang="en-US" dirty="0">
-                <a:solidFill>
-                  <a:srgbClr val="009749"/>
-                </a:solidFill>
-              </a:rPr>
-              <a:t>Illustration on board</a:t>
+              <a:t> variants: Layer norm </a:t>
+            </a:r>
+            <a:r>
+              <a:rPr lang="en-US" dirty="0" err="1"/>
+              <a:t>normalises</a:t>
+            </a:r>
+            <a:r>
+              <a:rPr lang="en-US" dirty="0"/>
+              <a:t> across features within one example; Group norm </a:t>
+            </a:r>
+            <a:r>
+              <a:rPr lang="en-US" dirty="0" err="1"/>
+              <a:t>normalises</a:t>
+            </a:r>
+            <a:r>
+              <a:rPr lang="en-US" dirty="0"/>
+              <a:t> within groups of channels; Instance norm for style transfer tasks</a:t>
+            </a:r>
+          </a:p>
+          <a:p>
+            <a:r>
+              <a:rPr lang="en-US" dirty="0"/>
+              <a:t>Dropout variants: Spatial dropout drops entire feature maps; Shake‑Drop perturbs activations stochastically</a:t>
             </a:r>
           </a:p>
           <a:p>
@@ -15205,7 +15795,7 @@
           <p:cNvPr id="4" name="Slide Number Placeholder 3">
             <a:extLst>
               <a:ext uri="{FF2B5EF4-FFF2-40B4-BE49-F238E27FC236}">
-                <a16:creationId xmlns:a16="http://schemas.microsoft.com/office/drawing/2014/main" id="{7E8A90A1-9F4B-BC6D-3A51-08EDE68CBDDA}"/>
+                <a16:creationId xmlns:a16="http://schemas.microsoft.com/office/drawing/2014/main" id="{B3CF63BE-D315-3838-3CF8-05BCF94A8588}"/>
               </a:ext>
             </a:extLst>
           </p:cNvPr>
@@ -15232,7 +15822,7 @@
     </p:spTree>
     <p:extLst>
       <p:ext uri="{BB962C8B-B14F-4D97-AF65-F5344CB8AC3E}">
-        <p14:creationId xmlns:p14="http://schemas.microsoft.com/office/powerpoint/2010/main" val="2238259497"/>
+        <p14:creationId xmlns:p14="http://schemas.microsoft.com/office/powerpoint/2010/main" val="3259240191"/>
       </p:ext>
     </p:extLst>
   </p:cSld>
@@ -15264,7 +15854,7 @@
           <p:cNvPr id="2" name="Title 1">
             <a:extLst>
               <a:ext uri="{FF2B5EF4-FFF2-40B4-BE49-F238E27FC236}">
-                <a16:creationId xmlns:a16="http://schemas.microsoft.com/office/drawing/2014/main" id="{37130E69-6564-DD3E-DE48-26F95E13A718}"/>
+                <a16:creationId xmlns:a16="http://schemas.microsoft.com/office/drawing/2014/main" id="{5921105E-4802-3AAF-ED65-7E5AC18791D7}"/>
               </a:ext>
             </a:extLst>
           </p:cNvPr>
@@ -15282,13 +15872,8 @@
           <a:p>
             <a:r>
               <a:rPr lang="en-US" dirty="0"/>
-              <a:t>Implementation in </a:t>
-            </a:r>
-            <a:r>
-              <a:rPr lang="en-US" dirty="0" err="1"/>
-              <a:t>Pytorch</a:t>
-            </a:r>
-            <a:endParaRPr lang="en-US" dirty="0"/>
+              <a:t>Pooling variants</a:t>
+            </a:r>
           </a:p>
         </p:txBody>
       </p:sp>
@@ -15297,7 +15882,7 @@
           <p:cNvPr id="3" name="Content Placeholder 2">
             <a:extLst>
               <a:ext uri="{FF2B5EF4-FFF2-40B4-BE49-F238E27FC236}">
-                <a16:creationId xmlns:a16="http://schemas.microsoft.com/office/drawing/2014/main" id="{FC377FCB-D93F-4907-2229-7E8EE0824A81}"/>
+                <a16:creationId xmlns:a16="http://schemas.microsoft.com/office/drawing/2014/main" id="{64A16EEF-DC4A-3322-0000-6BB6E938A959}"/>
               </a:ext>
             </a:extLst>
           </p:cNvPr>
@@ -15308,602 +15893,47 @@
             <p:ph idx="1"/>
           </p:nvPr>
         </p:nvSpPr>
-        <p:spPr>
-          <a:xfrm>
-            <a:off x="838200" y="1825625"/>
-            <a:ext cx="8348602" cy="4667250"/>
-          </a:xfrm>
-        </p:spPr>
+        <p:spPr/>
         <p:txBody>
           <a:bodyPr>
-            <a:normAutofit fontScale="47500" lnSpcReduction="20000"/>
+            <a:normAutofit fontScale="92500"/>
           </a:bodyPr>
           <a:lstStyle/>
           <a:p>
             <a:r>
-              <a:rPr lang="en-US" sz="4400" dirty="0" err="1"/>
-              <a:t>Vectorised</a:t>
-            </a:r>
-            <a:r>
-              <a:rPr lang="en-US" sz="4400" dirty="0"/>
-              <a:t> code is critical for efficient deep learning.  Use established frameworks (e.g. </a:t>
-            </a:r>
-            <a:r>
-              <a:rPr lang="en-US" sz="4400" dirty="0" err="1"/>
-              <a:t>PyTorch</a:t>
-            </a:r>
-            <a:r>
-              <a:rPr lang="en-US" sz="4400" dirty="0"/>
-              <a:t>) that implement convolutions with GPU acceleration.</a:t>
-            </a:r>
-          </a:p>
-          <a:p>
-            <a:pPr marL="0" indent="0">
-              <a:buNone/>
-            </a:pPr>
-            <a:r>
-              <a:rPr lang="en-US" sz="2800" dirty="0">
-                <a:solidFill>
-                  <a:srgbClr val="030A18"/>
-                </a:solidFill>
-                <a:latin typeface="Courier New" pitchFamily="34" charset="0"/>
-                <a:ea typeface="Courier New" pitchFamily="34" charset="-122"/>
-                <a:cs typeface="Courier New" pitchFamily="34" charset="-120"/>
-              </a:rPr>
-              <a:t>import </a:t>
-            </a:r>
-            <a:r>
-              <a:rPr lang="en-US" sz="2800" dirty="0" err="1">
-                <a:solidFill>
-                  <a:srgbClr val="030A18"/>
-                </a:solidFill>
-                <a:latin typeface="Courier New" pitchFamily="34" charset="0"/>
-                <a:ea typeface="Courier New" pitchFamily="34" charset="-122"/>
-                <a:cs typeface="Courier New" pitchFamily="34" charset="-120"/>
-              </a:rPr>
-              <a:t>torch.nn</a:t>
-            </a:r>
-            <a:r>
-              <a:rPr lang="en-US" sz="2800" dirty="0">
-                <a:solidFill>
-                  <a:srgbClr val="030A18"/>
-                </a:solidFill>
-                <a:latin typeface="Courier New" pitchFamily="34" charset="0"/>
-                <a:ea typeface="Courier New" pitchFamily="34" charset="-122"/>
-                <a:cs typeface="Courier New" pitchFamily="34" charset="-120"/>
-              </a:rPr>
-              <a:t> as </a:t>
-            </a:r>
-            <a:r>
-              <a:rPr lang="en-US" sz="2800" dirty="0" err="1">
-                <a:solidFill>
-                  <a:srgbClr val="030A18"/>
-                </a:solidFill>
-                <a:latin typeface="Courier New" pitchFamily="34" charset="0"/>
-                <a:ea typeface="Courier New" pitchFamily="34" charset="-122"/>
-                <a:cs typeface="Courier New" pitchFamily="34" charset="-120"/>
-              </a:rPr>
-              <a:t>nn</a:t>
-            </a:r>
-            <a:endParaRPr lang="en-US" sz="2800" dirty="0"/>
-          </a:p>
-          <a:p>
-            <a:pPr marL="0" indent="0">
-              <a:buNone/>
-            </a:pPr>
-            <a:r>
-              <a:rPr lang="en-US" sz="2800" dirty="0">
-                <a:solidFill>
-                  <a:srgbClr val="030A18"/>
-                </a:solidFill>
-                <a:latin typeface="Courier New" pitchFamily="34" charset="0"/>
-                <a:ea typeface="Courier New" pitchFamily="34" charset="-122"/>
-                <a:cs typeface="Courier New" pitchFamily="34" charset="-120"/>
-              </a:rPr>
-              <a:t>class </a:t>
-            </a:r>
-            <a:r>
-              <a:rPr lang="en-US" sz="2800" dirty="0" err="1">
-                <a:solidFill>
-                  <a:srgbClr val="030A18"/>
-                </a:solidFill>
-                <a:latin typeface="Courier New" pitchFamily="34" charset="0"/>
-                <a:ea typeface="Courier New" pitchFamily="34" charset="-122"/>
-                <a:cs typeface="Courier New" pitchFamily="34" charset="-120"/>
-              </a:rPr>
-              <a:t>SimpleCNN</a:t>
-            </a:r>
-            <a:r>
-              <a:rPr lang="en-US" sz="2800" dirty="0">
-                <a:solidFill>
-                  <a:srgbClr val="030A18"/>
-                </a:solidFill>
-                <a:latin typeface="Courier New" pitchFamily="34" charset="0"/>
-                <a:ea typeface="Courier New" pitchFamily="34" charset="-122"/>
-                <a:cs typeface="Courier New" pitchFamily="34" charset="-120"/>
-              </a:rPr>
-              <a:t>(</a:t>
-            </a:r>
-            <a:r>
-              <a:rPr lang="en-US" sz="2800" dirty="0" err="1">
-                <a:solidFill>
-                  <a:srgbClr val="030A18"/>
-                </a:solidFill>
-                <a:latin typeface="Courier New" pitchFamily="34" charset="0"/>
-                <a:ea typeface="Courier New" pitchFamily="34" charset="-122"/>
-                <a:cs typeface="Courier New" pitchFamily="34" charset="-120"/>
-              </a:rPr>
-              <a:t>nn.Module</a:t>
-            </a:r>
-            <a:r>
-              <a:rPr lang="en-US" sz="2800" dirty="0">
-                <a:solidFill>
-                  <a:srgbClr val="030A18"/>
-                </a:solidFill>
-                <a:latin typeface="Courier New" pitchFamily="34" charset="0"/>
-                <a:ea typeface="Courier New" pitchFamily="34" charset="-122"/>
-                <a:cs typeface="Courier New" pitchFamily="34" charset="-120"/>
-              </a:rPr>
-              <a:t>):</a:t>
-            </a:r>
-            <a:endParaRPr lang="en-US" sz="2800" dirty="0"/>
-          </a:p>
-          <a:p>
-            <a:pPr marL="0" indent="0">
-              <a:buNone/>
-            </a:pPr>
-            <a:r>
-              <a:rPr lang="en-US" sz="2800" dirty="0">
-                <a:solidFill>
-                  <a:srgbClr val="030A18"/>
-                </a:solidFill>
-                <a:latin typeface="Courier New" pitchFamily="34" charset="0"/>
-                <a:ea typeface="Courier New" pitchFamily="34" charset="-122"/>
-                <a:cs typeface="Courier New" pitchFamily="34" charset="-120"/>
-              </a:rPr>
-              <a:t>    def __</a:t>
-            </a:r>
-            <a:r>
-              <a:rPr lang="en-US" sz="2800" dirty="0" err="1">
-                <a:solidFill>
-                  <a:srgbClr val="030A18"/>
-                </a:solidFill>
-                <a:latin typeface="Courier New" pitchFamily="34" charset="0"/>
-                <a:ea typeface="Courier New" pitchFamily="34" charset="-122"/>
-                <a:cs typeface="Courier New" pitchFamily="34" charset="-120"/>
-              </a:rPr>
-              <a:t>init</a:t>
-            </a:r>
-            <a:r>
-              <a:rPr lang="en-US" sz="2800" dirty="0">
-                <a:solidFill>
-                  <a:srgbClr val="030A18"/>
-                </a:solidFill>
-                <a:latin typeface="Courier New" pitchFamily="34" charset="0"/>
-                <a:ea typeface="Courier New" pitchFamily="34" charset="-122"/>
-                <a:cs typeface="Courier New" pitchFamily="34" charset="-120"/>
-              </a:rPr>
-              <a:t>__(self):</a:t>
-            </a:r>
-            <a:endParaRPr lang="en-US" sz="2800" dirty="0"/>
-          </a:p>
-          <a:p>
-            <a:pPr marL="0" indent="0">
-              <a:buNone/>
-            </a:pPr>
-            <a:r>
-              <a:rPr lang="en-US" sz="2800" dirty="0">
-                <a:solidFill>
-                  <a:srgbClr val="030A18"/>
-                </a:solidFill>
-                <a:latin typeface="Courier New" pitchFamily="34" charset="0"/>
-                <a:ea typeface="Courier New" pitchFamily="34" charset="-122"/>
-                <a:cs typeface="Courier New" pitchFamily="34" charset="-120"/>
-              </a:rPr>
-              <a:t>        super().__</a:t>
-            </a:r>
-            <a:r>
-              <a:rPr lang="en-US" sz="2800" dirty="0" err="1">
-                <a:solidFill>
-                  <a:srgbClr val="030A18"/>
-                </a:solidFill>
-                <a:latin typeface="Courier New" pitchFamily="34" charset="0"/>
-                <a:ea typeface="Courier New" pitchFamily="34" charset="-122"/>
-                <a:cs typeface="Courier New" pitchFamily="34" charset="-120"/>
-              </a:rPr>
-              <a:t>init</a:t>
-            </a:r>
-            <a:r>
-              <a:rPr lang="en-US" sz="2800" dirty="0">
-                <a:solidFill>
-                  <a:srgbClr val="030A18"/>
-                </a:solidFill>
-                <a:latin typeface="Courier New" pitchFamily="34" charset="0"/>
-                <a:ea typeface="Courier New" pitchFamily="34" charset="-122"/>
-                <a:cs typeface="Courier New" pitchFamily="34" charset="-120"/>
-              </a:rPr>
-              <a:t>__()</a:t>
-            </a:r>
-            <a:endParaRPr lang="en-US" sz="2800" dirty="0"/>
-          </a:p>
-          <a:p>
-            <a:pPr marL="0" indent="0">
-              <a:buNone/>
-            </a:pPr>
-            <a:r>
-              <a:rPr lang="en-US" sz="2800" dirty="0">
-                <a:solidFill>
-                  <a:srgbClr val="030A18"/>
-                </a:solidFill>
-                <a:latin typeface="Courier New" pitchFamily="34" charset="0"/>
-                <a:ea typeface="Courier New" pitchFamily="34" charset="-122"/>
-                <a:cs typeface="Courier New" pitchFamily="34" charset="-120"/>
-              </a:rPr>
-              <a:t>        self.conv1 = nn.Conv2d(</a:t>
-            </a:r>
-            <a:r>
-              <a:rPr lang="en-US" sz="2800" dirty="0" err="1">
-                <a:solidFill>
-                  <a:srgbClr val="030A18"/>
-                </a:solidFill>
-                <a:latin typeface="Courier New" pitchFamily="34" charset="0"/>
-                <a:ea typeface="Courier New" pitchFamily="34" charset="-122"/>
-                <a:cs typeface="Courier New" pitchFamily="34" charset="-120"/>
-              </a:rPr>
-              <a:t>in_channels</a:t>
-            </a:r>
-            <a:r>
-              <a:rPr lang="en-US" sz="2800" dirty="0">
-                <a:solidFill>
-                  <a:srgbClr val="030A18"/>
-                </a:solidFill>
-                <a:latin typeface="Courier New" pitchFamily="34" charset="0"/>
-                <a:ea typeface="Courier New" pitchFamily="34" charset="-122"/>
-                <a:cs typeface="Courier New" pitchFamily="34" charset="-120"/>
-              </a:rPr>
-              <a:t>=1, </a:t>
-            </a:r>
-            <a:r>
-              <a:rPr lang="en-US" sz="2800" dirty="0" err="1">
-                <a:solidFill>
-                  <a:srgbClr val="030A18"/>
-                </a:solidFill>
-                <a:latin typeface="Courier New" pitchFamily="34" charset="0"/>
-                <a:ea typeface="Courier New" pitchFamily="34" charset="-122"/>
-                <a:cs typeface="Courier New" pitchFamily="34" charset="-120"/>
-              </a:rPr>
-              <a:t>out_channels</a:t>
-            </a:r>
-            <a:r>
-              <a:rPr lang="en-US" sz="2800" dirty="0">
-                <a:solidFill>
-                  <a:srgbClr val="030A18"/>
-                </a:solidFill>
-                <a:latin typeface="Courier New" pitchFamily="34" charset="0"/>
-                <a:ea typeface="Courier New" pitchFamily="34" charset="-122"/>
-                <a:cs typeface="Courier New" pitchFamily="34" charset="-120"/>
-              </a:rPr>
-              <a:t>=8, </a:t>
-            </a:r>
-            <a:r>
-              <a:rPr lang="en-US" sz="2800" dirty="0" err="1">
-                <a:solidFill>
-                  <a:srgbClr val="030A18"/>
-                </a:solidFill>
-                <a:latin typeface="Courier New" pitchFamily="34" charset="0"/>
-                <a:ea typeface="Courier New" pitchFamily="34" charset="-122"/>
-                <a:cs typeface="Courier New" pitchFamily="34" charset="-120"/>
-              </a:rPr>
-              <a:t>kernel_size</a:t>
-            </a:r>
-            <a:r>
-              <a:rPr lang="en-US" sz="2800" dirty="0">
-                <a:solidFill>
-                  <a:srgbClr val="030A18"/>
-                </a:solidFill>
-                <a:latin typeface="Courier New" pitchFamily="34" charset="0"/>
-                <a:ea typeface="Courier New" pitchFamily="34" charset="-122"/>
-                <a:cs typeface="Courier New" pitchFamily="34" charset="-120"/>
-              </a:rPr>
-              <a:t>=3)</a:t>
-            </a:r>
-            <a:endParaRPr lang="en-US" sz="2800" dirty="0"/>
-          </a:p>
-          <a:p>
-            <a:pPr marL="0" indent="0">
-              <a:buNone/>
-            </a:pPr>
-            <a:r>
-              <a:rPr lang="en-US" sz="2800" dirty="0">
-                <a:solidFill>
-                  <a:srgbClr val="030A18"/>
-                </a:solidFill>
-                <a:latin typeface="Courier New" pitchFamily="34" charset="0"/>
-                <a:ea typeface="Courier New" pitchFamily="34" charset="-122"/>
-                <a:cs typeface="Courier New" pitchFamily="34" charset="-120"/>
-              </a:rPr>
-              <a:t>        </a:t>
-            </a:r>
-            <a:r>
-              <a:rPr lang="en-US" sz="2800" dirty="0" err="1">
-                <a:solidFill>
-                  <a:srgbClr val="030A18"/>
-                </a:solidFill>
-                <a:latin typeface="Courier New" pitchFamily="34" charset="0"/>
-                <a:ea typeface="Courier New" pitchFamily="34" charset="-122"/>
-                <a:cs typeface="Courier New" pitchFamily="34" charset="-120"/>
-              </a:rPr>
-              <a:t>self.pool</a:t>
-            </a:r>
-            <a:r>
-              <a:rPr lang="en-US" sz="2800" dirty="0">
-                <a:solidFill>
-                  <a:srgbClr val="030A18"/>
-                </a:solidFill>
-                <a:latin typeface="Courier New" pitchFamily="34" charset="0"/>
-                <a:ea typeface="Courier New" pitchFamily="34" charset="-122"/>
-                <a:cs typeface="Courier New" pitchFamily="34" charset="-120"/>
-              </a:rPr>
-              <a:t> = nn.MaxPool2d(</a:t>
-            </a:r>
-            <a:r>
-              <a:rPr lang="en-US" sz="2800" dirty="0" err="1">
-                <a:solidFill>
-                  <a:srgbClr val="030A18"/>
-                </a:solidFill>
-                <a:latin typeface="Courier New" pitchFamily="34" charset="0"/>
-                <a:ea typeface="Courier New" pitchFamily="34" charset="-122"/>
-                <a:cs typeface="Courier New" pitchFamily="34" charset="-120"/>
-              </a:rPr>
-              <a:t>kernel_size</a:t>
-            </a:r>
-            <a:r>
-              <a:rPr lang="en-US" sz="2800" dirty="0">
-                <a:solidFill>
-                  <a:srgbClr val="030A18"/>
-                </a:solidFill>
-                <a:latin typeface="Courier New" pitchFamily="34" charset="0"/>
-                <a:ea typeface="Courier New" pitchFamily="34" charset="-122"/>
-                <a:cs typeface="Courier New" pitchFamily="34" charset="-120"/>
-              </a:rPr>
-              <a:t>=2, stride=2)</a:t>
-            </a:r>
-            <a:endParaRPr lang="en-US" sz="2800" dirty="0"/>
-          </a:p>
-          <a:p>
-            <a:pPr marL="0" indent="0">
-              <a:buNone/>
-            </a:pPr>
-            <a:r>
-              <a:rPr lang="en-US" sz="2800" dirty="0">
-                <a:solidFill>
-                  <a:srgbClr val="030A18"/>
-                </a:solidFill>
-                <a:latin typeface="Courier New" pitchFamily="34" charset="0"/>
-                <a:ea typeface="Courier New" pitchFamily="34" charset="-122"/>
-                <a:cs typeface="Courier New" pitchFamily="34" charset="-120"/>
-              </a:rPr>
-              <a:t>        self.fc1 = </a:t>
-            </a:r>
-            <a:r>
-              <a:rPr lang="en-US" sz="2800" dirty="0" err="1">
-                <a:solidFill>
-                  <a:srgbClr val="030A18"/>
-                </a:solidFill>
-                <a:latin typeface="Courier New" pitchFamily="34" charset="0"/>
-                <a:ea typeface="Courier New" pitchFamily="34" charset="-122"/>
-                <a:cs typeface="Courier New" pitchFamily="34" charset="-120"/>
-              </a:rPr>
-              <a:t>nn.Linear</a:t>
-            </a:r>
-            <a:r>
-              <a:rPr lang="en-US" sz="2800" dirty="0">
-                <a:solidFill>
-                  <a:srgbClr val="030A18"/>
-                </a:solidFill>
-                <a:latin typeface="Courier New" pitchFamily="34" charset="0"/>
-                <a:ea typeface="Courier New" pitchFamily="34" charset="-122"/>
-                <a:cs typeface="Courier New" pitchFamily="34" charset="-120"/>
-              </a:rPr>
-              <a:t>(8 * 3 * 3, 10)</a:t>
-            </a:r>
-            <a:endParaRPr lang="en-US" sz="2800" dirty="0"/>
-          </a:p>
-          <a:p>
-            <a:pPr marL="0" indent="0">
-              <a:buNone/>
-            </a:pPr>
-            <a:r>
-              <a:rPr lang="en-US" sz="2800" dirty="0">
-                <a:solidFill>
-                  <a:srgbClr val="030A18"/>
-                </a:solidFill>
-                <a:latin typeface="Courier New" pitchFamily="34" charset="0"/>
-                <a:ea typeface="Courier New" pitchFamily="34" charset="-122"/>
-                <a:cs typeface="Courier New" pitchFamily="34" charset="-120"/>
-              </a:rPr>
-              <a:t>    def forward(self, x):</a:t>
-            </a:r>
-            <a:endParaRPr lang="en-US" sz="2800" dirty="0"/>
-          </a:p>
-          <a:p>
-            <a:pPr marL="0" indent="0">
-              <a:buNone/>
-            </a:pPr>
-            <a:r>
-              <a:rPr lang="en-US" sz="2800" dirty="0">
-                <a:solidFill>
-                  <a:srgbClr val="030A18"/>
-                </a:solidFill>
-                <a:latin typeface="Courier New" pitchFamily="34" charset="0"/>
-                <a:ea typeface="Courier New" pitchFamily="34" charset="-122"/>
-                <a:cs typeface="Courier New" pitchFamily="34" charset="-120"/>
-              </a:rPr>
-              <a:t>        x = </a:t>
-            </a:r>
-            <a:r>
-              <a:rPr lang="en-US" sz="2800" dirty="0" err="1">
-                <a:solidFill>
-                  <a:srgbClr val="030A18"/>
-                </a:solidFill>
-                <a:latin typeface="Courier New" pitchFamily="34" charset="0"/>
-                <a:ea typeface="Courier New" pitchFamily="34" charset="-122"/>
-                <a:cs typeface="Courier New" pitchFamily="34" charset="-120"/>
-              </a:rPr>
-              <a:t>nn.functional.relu</a:t>
-            </a:r>
-            <a:r>
-              <a:rPr lang="en-US" sz="2800" dirty="0">
-                <a:solidFill>
-                  <a:srgbClr val="030A18"/>
-                </a:solidFill>
-                <a:latin typeface="Courier New" pitchFamily="34" charset="0"/>
-                <a:ea typeface="Courier New" pitchFamily="34" charset="-122"/>
-                <a:cs typeface="Courier New" pitchFamily="34" charset="-120"/>
-              </a:rPr>
-              <a:t>(self.conv1(x))</a:t>
-            </a:r>
-            <a:endParaRPr lang="en-US" sz="2800" dirty="0"/>
-          </a:p>
-          <a:p>
-            <a:pPr marL="0" indent="0">
-              <a:buNone/>
-            </a:pPr>
-            <a:r>
-              <a:rPr lang="en-US" sz="2800" dirty="0">
-                <a:solidFill>
-                  <a:srgbClr val="030A18"/>
-                </a:solidFill>
-                <a:latin typeface="Courier New" pitchFamily="34" charset="0"/>
-                <a:ea typeface="Courier New" pitchFamily="34" charset="-122"/>
-                <a:cs typeface="Courier New" pitchFamily="34" charset="-120"/>
-              </a:rPr>
-              <a:t>        x = </a:t>
-            </a:r>
-            <a:r>
-              <a:rPr lang="en-US" sz="2800" dirty="0" err="1">
-                <a:solidFill>
-                  <a:srgbClr val="030A18"/>
-                </a:solidFill>
-                <a:latin typeface="Courier New" pitchFamily="34" charset="0"/>
-                <a:ea typeface="Courier New" pitchFamily="34" charset="-122"/>
-                <a:cs typeface="Courier New" pitchFamily="34" charset="-120"/>
-              </a:rPr>
-              <a:t>self.pool</a:t>
-            </a:r>
-            <a:r>
-              <a:rPr lang="en-US" sz="2800" dirty="0">
-                <a:solidFill>
-                  <a:srgbClr val="030A18"/>
-                </a:solidFill>
-                <a:latin typeface="Courier New" pitchFamily="34" charset="0"/>
-                <a:ea typeface="Courier New" pitchFamily="34" charset="-122"/>
-                <a:cs typeface="Courier New" pitchFamily="34" charset="-120"/>
-              </a:rPr>
-              <a:t>(x)</a:t>
-            </a:r>
-            <a:endParaRPr lang="en-US" sz="2800" dirty="0"/>
-          </a:p>
-          <a:p>
-            <a:pPr marL="0" indent="0">
-              <a:buNone/>
-            </a:pPr>
-            <a:r>
-              <a:rPr lang="en-US" sz="2800" dirty="0">
-                <a:solidFill>
-                  <a:srgbClr val="030A18"/>
-                </a:solidFill>
-                <a:latin typeface="Courier New" pitchFamily="34" charset="0"/>
-                <a:ea typeface="Courier New" pitchFamily="34" charset="-122"/>
-                <a:cs typeface="Courier New" pitchFamily="34" charset="-120"/>
-              </a:rPr>
-              <a:t>        x = </a:t>
-            </a:r>
-            <a:r>
-              <a:rPr lang="en-US" sz="2800" dirty="0" err="1">
-                <a:solidFill>
-                  <a:srgbClr val="030A18"/>
-                </a:solidFill>
-                <a:latin typeface="Courier New" pitchFamily="34" charset="0"/>
-                <a:ea typeface="Courier New" pitchFamily="34" charset="-122"/>
-                <a:cs typeface="Courier New" pitchFamily="34" charset="-120"/>
-              </a:rPr>
-              <a:t>x.view</a:t>
-            </a:r>
-            <a:r>
-              <a:rPr lang="en-US" sz="2800" dirty="0">
-                <a:solidFill>
-                  <a:srgbClr val="030A18"/>
-                </a:solidFill>
-                <a:latin typeface="Courier New" pitchFamily="34" charset="0"/>
-                <a:ea typeface="Courier New" pitchFamily="34" charset="-122"/>
-                <a:cs typeface="Courier New" pitchFamily="34" charset="-120"/>
-              </a:rPr>
-              <a:t>(</a:t>
-            </a:r>
-            <a:r>
-              <a:rPr lang="en-US" sz="2800" dirty="0" err="1">
-                <a:solidFill>
-                  <a:srgbClr val="030A18"/>
-                </a:solidFill>
-                <a:latin typeface="Courier New" pitchFamily="34" charset="0"/>
-                <a:ea typeface="Courier New" pitchFamily="34" charset="-122"/>
-                <a:cs typeface="Courier New" pitchFamily="34" charset="-120"/>
-              </a:rPr>
-              <a:t>x.size</a:t>
-            </a:r>
-            <a:r>
-              <a:rPr lang="en-US" sz="2800" dirty="0">
-                <a:solidFill>
-                  <a:srgbClr val="030A18"/>
-                </a:solidFill>
-                <a:latin typeface="Courier New" pitchFamily="34" charset="0"/>
-                <a:ea typeface="Courier New" pitchFamily="34" charset="-122"/>
-                <a:cs typeface="Courier New" pitchFamily="34" charset="-120"/>
-              </a:rPr>
-              <a:t>(0), -1)</a:t>
-            </a:r>
-            <a:endParaRPr lang="en-US" sz="2800" dirty="0"/>
-          </a:p>
-          <a:p>
-            <a:pPr marL="0" indent="0">
-              <a:buNone/>
-            </a:pPr>
-            <a:r>
-              <a:rPr lang="en-US" sz="2800" dirty="0">
-                <a:solidFill>
-                  <a:srgbClr val="030A18"/>
-                </a:solidFill>
-                <a:latin typeface="Courier New" pitchFamily="34" charset="0"/>
-                <a:ea typeface="Courier New" pitchFamily="34" charset="-122"/>
-                <a:cs typeface="Courier New" pitchFamily="34" charset="-120"/>
-              </a:rPr>
-              <a:t>        x = self.fc1(x)</a:t>
-            </a:r>
-            <a:endParaRPr lang="en-US" sz="2800" dirty="0"/>
-          </a:p>
-          <a:p>
-            <a:pPr marL="0" indent="0">
-              <a:buNone/>
-            </a:pPr>
-            <a:r>
-              <a:rPr lang="en-US" sz="2800" dirty="0">
-                <a:solidFill>
-                  <a:srgbClr val="030A18"/>
-                </a:solidFill>
-                <a:latin typeface="Courier New" pitchFamily="34" charset="0"/>
-                <a:ea typeface="Courier New" pitchFamily="34" charset="-122"/>
-                <a:cs typeface="Courier New" pitchFamily="34" charset="-120"/>
-              </a:rPr>
-              <a:t>        return x</a:t>
-            </a:r>
-            <a:endParaRPr lang="en-US" dirty="0"/>
-          </a:p>
-          <a:p>
-            <a:endParaRPr lang="en-US" dirty="0"/>
-          </a:p>
-          <a:p>
-            <a:endParaRPr lang="en-US" dirty="0"/>
+              <a:rPr lang="en-US" dirty="0"/>
+              <a:t>Average pooling: computes the mean of each patch, reducing noise</a:t>
+            </a:r>
+          </a:p>
+          <a:p>
+            <a:r>
+              <a:rPr lang="en-US" dirty="0"/>
+              <a:t>Global average pooling: replaces the fully connected layer by averaging over the entire spatial dimension per channel</a:t>
+            </a:r>
+          </a:p>
+          <a:p>
+            <a:r>
+              <a:rPr lang="en-US" dirty="0" err="1"/>
+              <a:t>Strided</a:t>
+            </a:r>
+            <a:r>
+              <a:rPr lang="en-US" dirty="0"/>
+              <a:t> convolution: </a:t>
+            </a:r>
+            <a:r>
+              <a:rPr lang="en-US" dirty="0" err="1"/>
+              <a:t>downsampling</a:t>
+            </a:r>
+            <a:r>
+              <a:rPr lang="en-US" dirty="0"/>
+              <a:t> can also be achieved by using a stride &gt; 1 instead of separate pooling layers</a:t>
+            </a:r>
+          </a:p>
+          <a:p>
+            <a:r>
+              <a:rPr lang="en-US" dirty="0"/>
+              <a:t>Adaptive pooling: output size is specified instead of window size, automatically choosing kernel size and stride</a:t>
+            </a:r>
           </a:p>
         </p:txBody>
       </p:sp>
@@ -15912,7 +15942,7 @@
           <p:cNvPr id="4" name="Slide Number Placeholder 3">
             <a:extLst>
               <a:ext uri="{FF2B5EF4-FFF2-40B4-BE49-F238E27FC236}">
-                <a16:creationId xmlns:a16="http://schemas.microsoft.com/office/drawing/2014/main" id="{20C4D6B3-73C3-284A-E4EA-7403E514D76B}"/>
+                <a16:creationId xmlns:a16="http://schemas.microsoft.com/office/drawing/2014/main" id="{49B84884-F9A9-E021-64DF-956BC59DFAAD}"/>
               </a:ext>
             </a:extLst>
           </p:cNvPr>
@@ -15939,7 +15969,7 @@
     </p:spTree>
     <p:extLst>
       <p:ext uri="{BB962C8B-B14F-4D97-AF65-F5344CB8AC3E}">
-        <p14:creationId xmlns:p14="http://schemas.microsoft.com/office/powerpoint/2010/main" val="743238056"/>
+        <p14:creationId xmlns:p14="http://schemas.microsoft.com/office/powerpoint/2010/main" val="846030282"/>
       </p:ext>
     </p:extLst>
   </p:cSld>
@@ -15971,7 +16001,7 @@
           <p:cNvPr id="2" name="Title 1">
             <a:extLst>
               <a:ext uri="{FF2B5EF4-FFF2-40B4-BE49-F238E27FC236}">
-                <a16:creationId xmlns:a16="http://schemas.microsoft.com/office/drawing/2014/main" id="{BB088283-06E7-18B1-03DC-B445852C3E06}"/>
+                <a16:creationId xmlns:a16="http://schemas.microsoft.com/office/drawing/2014/main" id="{B761C42A-DC3C-8F84-D9EA-D908CA8882E4}"/>
               </a:ext>
             </a:extLst>
           </p:cNvPr>
@@ -15989,7 +16019,7 @@
           <a:p>
             <a:r>
               <a:rPr lang="en-US" dirty="0"/>
-              <a:t>Common CNN architectures</a:t>
+              <a:t>A technical aside</a:t>
             </a:r>
           </a:p>
         </p:txBody>
@@ -15999,7 +16029,7 @@
           <p:cNvPr id="3" name="Content Placeholder 2">
             <a:extLst>
               <a:ext uri="{FF2B5EF4-FFF2-40B4-BE49-F238E27FC236}">
-                <a16:creationId xmlns:a16="http://schemas.microsoft.com/office/drawing/2014/main" id="{9942B748-4DFC-1C22-B21A-2C6CD4EBEDC6}"/>
+                <a16:creationId xmlns:a16="http://schemas.microsoft.com/office/drawing/2014/main" id="{4078E805-D582-84E7-4540-D73589D39C17}"/>
               </a:ext>
             </a:extLst>
           </p:cNvPr>
@@ -16013,80 +16043,51 @@
         <p:spPr/>
         <p:txBody>
           <a:bodyPr>
-            <a:normAutofit/>
+            <a:normAutofit lnSpcReduction="10000"/>
           </a:bodyPr>
           <a:lstStyle/>
           <a:p>
             <a:r>
+              <a:rPr lang="en-US" dirty="0"/>
+              <a:t>Convolution can be reinterpreted as a matrix multiplication by unrolling the input into patches (im2col) and flattening the filter</a:t>
+            </a:r>
+          </a:p>
+          <a:p>
+            <a:r>
+              <a:rPr lang="en-US" dirty="0"/>
+              <a:t>This representation allows us to leverage highly </a:t>
+            </a:r>
+            <a:r>
               <a:rPr lang="en-US" dirty="0" err="1"/>
-              <a:t>LeNet</a:t>
+              <a:t>optimised</a:t>
             </a:r>
             <a:r>
               <a:rPr lang="en-US" dirty="0"/>
-              <a:t> (1998): early handwritten digit </a:t>
-            </a:r>
-            <a:r>
-              <a:rPr lang="en-US" dirty="0" err="1"/>
-              <a:t>recogniser</a:t>
-            </a:r>
+              <a:t> matrix multiplication routines (e.g. BLAS) but at the cost of increased memory</a:t>
+            </a:r>
+          </a:p>
+          <a:p>
             <a:r>
               <a:rPr lang="en-US" dirty="0"/>
-              <a:t>; 5×5 filters, tanh activations.</a:t>
-            </a:r>
-          </a:p>
-          <a:p>
-            <a:r>
-              <a:rPr lang="en-US" dirty="0" err="1"/>
-              <a:t>AlexNet</a:t>
-            </a:r>
-            <a:r>
-              <a:rPr lang="en-US" dirty="0"/>
-              <a:t> (2012): deeper nets with </a:t>
-            </a:r>
-            <a:r>
-              <a:rPr lang="en-US" dirty="0" err="1"/>
-              <a:t>ReLU</a:t>
-            </a:r>
-            <a:r>
-              <a:rPr lang="en-US" dirty="0"/>
-              <a:t>, dropout and 3×3 / 11×11 conv layers; won ImageNet competition.</a:t>
-            </a:r>
-          </a:p>
-          <a:p>
-            <a:r>
-              <a:rPr lang="en-US" dirty="0"/>
-              <a:t>VGG (2014): very deep (16–19 layers) using only 3×3 </a:t>
-            </a:r>
-            <a:r>
-              <a:rPr lang="en-US" dirty="0" err="1"/>
-              <a:t>convs</a:t>
-            </a:r>
-            <a:r>
-              <a:rPr lang="en-US" dirty="0"/>
-              <a:t> and 2×2 pooling.</a:t>
-            </a:r>
-          </a:p>
-          <a:p>
-            <a:r>
-              <a:rPr lang="en-US" dirty="0" err="1"/>
-              <a:t>ResNet</a:t>
-            </a:r>
-            <a:r>
-              <a:rPr lang="en-US" dirty="0"/>
-              <a:t> (2015): introduces </a:t>
-            </a:r>
-            <a:r>
-              <a:rPr lang="en-US" b="1" dirty="0"/>
-              <a:t>skip connections </a:t>
-            </a:r>
-            <a:r>
-              <a:rPr lang="en-US" dirty="0"/>
-              <a:t>to ease training very deep networks (up to hundreds of layers).</a:t>
+              <a:t>Illustration: 2×2 filter applied to a 3×3 input yields a Toeplitz matrix of size 4×9 multiplied by the flattened filter vector</a:t>
+            </a:r>
+          </a:p>
+          <a:p>
+            <a:r>
+              <a:rPr lang="en-US" dirty="0">
+                <a:solidFill>
+                  <a:srgbClr val="009749"/>
+                </a:solidFill>
+              </a:rPr>
+              <a:t>Illustration on board</a:t>
             </a:r>
           </a:p>
           <a:p>
             <a:endParaRPr lang="en-US" dirty="0"/>
           </a:p>
+          <a:p>
+            <a:endParaRPr lang="en-US" dirty="0"/>
+          </a:p>
         </p:txBody>
       </p:sp>
       <p:sp>
@@ -16094,7 +16095,7 @@
           <p:cNvPr id="4" name="Slide Number Placeholder 3">
             <a:extLst>
               <a:ext uri="{FF2B5EF4-FFF2-40B4-BE49-F238E27FC236}">
-                <a16:creationId xmlns:a16="http://schemas.microsoft.com/office/drawing/2014/main" id="{6688F466-418A-C019-6F3F-610FD4E77298}"/>
+                <a16:creationId xmlns:a16="http://schemas.microsoft.com/office/drawing/2014/main" id="{7E8A90A1-9F4B-BC6D-3A51-08EDE68CBDDA}"/>
               </a:ext>
             </a:extLst>
           </p:cNvPr>
@@ -16121,7 +16122,7 @@
     </p:spTree>
     <p:extLst>
       <p:ext uri="{BB962C8B-B14F-4D97-AF65-F5344CB8AC3E}">
-        <p14:creationId xmlns:p14="http://schemas.microsoft.com/office/powerpoint/2010/main" val="1874886"/>
+        <p14:creationId xmlns:p14="http://schemas.microsoft.com/office/powerpoint/2010/main" val="2238259497"/>
       </p:ext>
     </p:extLst>
   </p:cSld>
@@ -16153,7 +16154,7 @@
           <p:cNvPr id="2" name="Title 1">
             <a:extLst>
               <a:ext uri="{FF2B5EF4-FFF2-40B4-BE49-F238E27FC236}">
-                <a16:creationId xmlns:a16="http://schemas.microsoft.com/office/drawing/2014/main" id="{5052E3C7-E02A-F443-93FF-99B0D12844EC}"/>
+                <a16:creationId xmlns:a16="http://schemas.microsoft.com/office/drawing/2014/main" id="{37130E69-6564-DD3E-DE48-26F95E13A718}"/>
               </a:ext>
             </a:extLst>
           </p:cNvPr>
@@ -16171,8 +16172,13 @@
           <a:p>
             <a:r>
               <a:rPr lang="en-US" dirty="0"/>
-              <a:t>Summary</a:t>
-            </a:r>
+              <a:t>Implementation in </a:t>
+            </a:r>
+            <a:r>
+              <a:rPr lang="en-US" dirty="0" err="1"/>
+              <a:t>Pytorch</a:t>
+            </a:r>
+            <a:endParaRPr lang="en-US" dirty="0"/>
           </a:p>
         </p:txBody>
       </p:sp>
@@ -16181,7 +16187,7 @@
           <p:cNvPr id="3" name="Content Placeholder 2">
             <a:extLst>
               <a:ext uri="{FF2B5EF4-FFF2-40B4-BE49-F238E27FC236}">
-                <a16:creationId xmlns:a16="http://schemas.microsoft.com/office/drawing/2014/main" id="{92B1495C-38DD-F9F0-478E-D16C6E4C61EA}"/>
+                <a16:creationId xmlns:a16="http://schemas.microsoft.com/office/drawing/2014/main" id="{FC377FCB-D93F-4907-2229-7E8EE0824A81}"/>
               </a:ext>
             </a:extLst>
           </p:cNvPr>
@@ -16192,100 +16198,638 @@
             <p:ph idx="1"/>
           </p:nvPr>
         </p:nvSpPr>
+        <p:spPr>
+          <a:xfrm>
+            <a:off x="838200" y="1825625"/>
+            <a:ext cx="8348602" cy="4667250"/>
+          </a:xfrm>
+        </p:spPr>
+        <p:txBody>
+          <a:bodyPr>
+            <a:normAutofit fontScale="47500" lnSpcReduction="20000"/>
+          </a:bodyPr>
+          <a:lstStyle/>
+          <a:p>
+            <a:r>
+              <a:rPr lang="en-US" sz="4400" dirty="0" err="1"/>
+              <a:t>Vectorised</a:t>
+            </a:r>
+            <a:r>
+              <a:rPr lang="en-US" sz="4400" dirty="0"/>
+              <a:t> code is critical for efficient deep learning.  Use established frameworks (e.g. </a:t>
+            </a:r>
+            <a:r>
+              <a:rPr lang="en-US" sz="4400" dirty="0" err="1"/>
+              <a:t>PyTorch</a:t>
+            </a:r>
+            <a:r>
+              <a:rPr lang="en-US" sz="4400" dirty="0"/>
+              <a:t>) that implement convolutions with GPU acceleration</a:t>
+            </a:r>
+          </a:p>
+          <a:p>
+            <a:pPr marL="0" indent="0">
+              <a:buNone/>
+            </a:pPr>
+            <a:r>
+              <a:rPr lang="en-US" sz="2800" dirty="0">
+                <a:solidFill>
+                  <a:srgbClr val="030A18"/>
+                </a:solidFill>
+                <a:latin typeface="Courier New" pitchFamily="34" charset="0"/>
+                <a:ea typeface="Courier New" pitchFamily="34" charset="-122"/>
+                <a:cs typeface="Courier New" pitchFamily="34" charset="-120"/>
+              </a:rPr>
+              <a:t>import </a:t>
+            </a:r>
+            <a:r>
+              <a:rPr lang="en-US" sz="2800" dirty="0" err="1">
+                <a:solidFill>
+                  <a:srgbClr val="030A18"/>
+                </a:solidFill>
+                <a:latin typeface="Courier New" pitchFamily="34" charset="0"/>
+                <a:ea typeface="Courier New" pitchFamily="34" charset="-122"/>
+                <a:cs typeface="Courier New" pitchFamily="34" charset="-120"/>
+              </a:rPr>
+              <a:t>torch.nn</a:t>
+            </a:r>
+            <a:r>
+              <a:rPr lang="en-US" sz="2800" dirty="0">
+                <a:solidFill>
+                  <a:srgbClr val="030A18"/>
+                </a:solidFill>
+                <a:latin typeface="Courier New" pitchFamily="34" charset="0"/>
+                <a:ea typeface="Courier New" pitchFamily="34" charset="-122"/>
+                <a:cs typeface="Courier New" pitchFamily="34" charset="-120"/>
+              </a:rPr>
+              <a:t> as </a:t>
+            </a:r>
+            <a:r>
+              <a:rPr lang="en-US" sz="2800" dirty="0" err="1">
+                <a:solidFill>
+                  <a:srgbClr val="030A18"/>
+                </a:solidFill>
+                <a:latin typeface="Courier New" pitchFamily="34" charset="0"/>
+                <a:ea typeface="Courier New" pitchFamily="34" charset="-122"/>
+                <a:cs typeface="Courier New" pitchFamily="34" charset="-120"/>
+              </a:rPr>
+              <a:t>nn</a:t>
+            </a:r>
+            <a:endParaRPr lang="en-US" sz="2800" dirty="0"/>
+          </a:p>
+          <a:p>
+            <a:pPr marL="0" indent="0">
+              <a:buNone/>
+            </a:pPr>
+            <a:r>
+              <a:rPr lang="en-US" sz="2800" dirty="0">
+                <a:solidFill>
+                  <a:srgbClr val="030A18"/>
+                </a:solidFill>
+                <a:latin typeface="Courier New" pitchFamily="34" charset="0"/>
+                <a:ea typeface="Courier New" pitchFamily="34" charset="-122"/>
+                <a:cs typeface="Courier New" pitchFamily="34" charset="-120"/>
+              </a:rPr>
+              <a:t>class </a:t>
+            </a:r>
+            <a:r>
+              <a:rPr lang="en-US" sz="2800" dirty="0" err="1">
+                <a:solidFill>
+                  <a:srgbClr val="030A18"/>
+                </a:solidFill>
+                <a:latin typeface="Courier New" pitchFamily="34" charset="0"/>
+                <a:ea typeface="Courier New" pitchFamily="34" charset="-122"/>
+                <a:cs typeface="Courier New" pitchFamily="34" charset="-120"/>
+              </a:rPr>
+              <a:t>SimpleCNN</a:t>
+            </a:r>
+            <a:r>
+              <a:rPr lang="en-US" sz="2800" dirty="0">
+                <a:solidFill>
+                  <a:srgbClr val="030A18"/>
+                </a:solidFill>
+                <a:latin typeface="Courier New" pitchFamily="34" charset="0"/>
+                <a:ea typeface="Courier New" pitchFamily="34" charset="-122"/>
+                <a:cs typeface="Courier New" pitchFamily="34" charset="-120"/>
+              </a:rPr>
+              <a:t>(</a:t>
+            </a:r>
+            <a:r>
+              <a:rPr lang="en-US" sz="2800" dirty="0" err="1">
+                <a:solidFill>
+                  <a:srgbClr val="030A18"/>
+                </a:solidFill>
+                <a:latin typeface="Courier New" pitchFamily="34" charset="0"/>
+                <a:ea typeface="Courier New" pitchFamily="34" charset="-122"/>
+                <a:cs typeface="Courier New" pitchFamily="34" charset="-120"/>
+              </a:rPr>
+              <a:t>nn.Module</a:t>
+            </a:r>
+            <a:r>
+              <a:rPr lang="en-US" sz="2800" dirty="0">
+                <a:solidFill>
+                  <a:srgbClr val="030A18"/>
+                </a:solidFill>
+                <a:latin typeface="Courier New" pitchFamily="34" charset="0"/>
+                <a:ea typeface="Courier New" pitchFamily="34" charset="-122"/>
+                <a:cs typeface="Courier New" pitchFamily="34" charset="-120"/>
+              </a:rPr>
+              <a:t>):</a:t>
+            </a:r>
+            <a:endParaRPr lang="en-US" sz="2800" dirty="0"/>
+          </a:p>
+          <a:p>
+            <a:pPr marL="0" indent="0">
+              <a:buNone/>
+            </a:pPr>
+            <a:r>
+              <a:rPr lang="en-US" sz="2800" dirty="0">
+                <a:solidFill>
+                  <a:srgbClr val="030A18"/>
+                </a:solidFill>
+                <a:latin typeface="Courier New" pitchFamily="34" charset="0"/>
+                <a:ea typeface="Courier New" pitchFamily="34" charset="-122"/>
+                <a:cs typeface="Courier New" pitchFamily="34" charset="-120"/>
+              </a:rPr>
+              <a:t>    def __</a:t>
+            </a:r>
+            <a:r>
+              <a:rPr lang="en-US" sz="2800" dirty="0" err="1">
+                <a:solidFill>
+                  <a:srgbClr val="030A18"/>
+                </a:solidFill>
+                <a:latin typeface="Courier New" pitchFamily="34" charset="0"/>
+                <a:ea typeface="Courier New" pitchFamily="34" charset="-122"/>
+                <a:cs typeface="Courier New" pitchFamily="34" charset="-120"/>
+              </a:rPr>
+              <a:t>init</a:t>
+            </a:r>
+            <a:r>
+              <a:rPr lang="en-US" sz="2800" dirty="0">
+                <a:solidFill>
+                  <a:srgbClr val="030A18"/>
+                </a:solidFill>
+                <a:latin typeface="Courier New" pitchFamily="34" charset="0"/>
+                <a:ea typeface="Courier New" pitchFamily="34" charset="-122"/>
+                <a:cs typeface="Courier New" pitchFamily="34" charset="-120"/>
+              </a:rPr>
+              <a:t>__(self):</a:t>
+            </a:r>
+            <a:endParaRPr lang="en-US" sz="2800" dirty="0"/>
+          </a:p>
+          <a:p>
+            <a:pPr marL="0" indent="0">
+              <a:buNone/>
+            </a:pPr>
+            <a:r>
+              <a:rPr lang="en-US" sz="2800" dirty="0">
+                <a:solidFill>
+                  <a:srgbClr val="030A18"/>
+                </a:solidFill>
+                <a:latin typeface="Courier New" pitchFamily="34" charset="0"/>
+                <a:ea typeface="Courier New" pitchFamily="34" charset="-122"/>
+                <a:cs typeface="Courier New" pitchFamily="34" charset="-120"/>
+              </a:rPr>
+              <a:t>        super().__</a:t>
+            </a:r>
+            <a:r>
+              <a:rPr lang="en-US" sz="2800" dirty="0" err="1">
+                <a:solidFill>
+                  <a:srgbClr val="030A18"/>
+                </a:solidFill>
+                <a:latin typeface="Courier New" pitchFamily="34" charset="0"/>
+                <a:ea typeface="Courier New" pitchFamily="34" charset="-122"/>
+                <a:cs typeface="Courier New" pitchFamily="34" charset="-120"/>
+              </a:rPr>
+              <a:t>init</a:t>
+            </a:r>
+            <a:r>
+              <a:rPr lang="en-US" sz="2800" dirty="0">
+                <a:solidFill>
+                  <a:srgbClr val="030A18"/>
+                </a:solidFill>
+                <a:latin typeface="Courier New" pitchFamily="34" charset="0"/>
+                <a:ea typeface="Courier New" pitchFamily="34" charset="-122"/>
+                <a:cs typeface="Courier New" pitchFamily="34" charset="-120"/>
+              </a:rPr>
+              <a:t>__()</a:t>
+            </a:r>
+            <a:endParaRPr lang="en-US" sz="2800" dirty="0"/>
+          </a:p>
+          <a:p>
+            <a:pPr marL="0" indent="0">
+              <a:buNone/>
+            </a:pPr>
+            <a:r>
+              <a:rPr lang="en-US" sz="2800" dirty="0">
+                <a:solidFill>
+                  <a:srgbClr val="030A18"/>
+                </a:solidFill>
+                <a:latin typeface="Courier New" pitchFamily="34" charset="0"/>
+                <a:ea typeface="Courier New" pitchFamily="34" charset="-122"/>
+                <a:cs typeface="Courier New" pitchFamily="34" charset="-120"/>
+              </a:rPr>
+              <a:t>        self.conv1 = nn.Conv2d(</a:t>
+            </a:r>
+            <a:r>
+              <a:rPr lang="en-US" sz="2800" dirty="0" err="1">
+                <a:solidFill>
+                  <a:srgbClr val="030A18"/>
+                </a:solidFill>
+                <a:latin typeface="Courier New" pitchFamily="34" charset="0"/>
+                <a:ea typeface="Courier New" pitchFamily="34" charset="-122"/>
+                <a:cs typeface="Courier New" pitchFamily="34" charset="-120"/>
+              </a:rPr>
+              <a:t>in_channels</a:t>
+            </a:r>
+            <a:r>
+              <a:rPr lang="en-US" sz="2800" dirty="0">
+                <a:solidFill>
+                  <a:srgbClr val="030A18"/>
+                </a:solidFill>
+                <a:latin typeface="Courier New" pitchFamily="34" charset="0"/>
+                <a:ea typeface="Courier New" pitchFamily="34" charset="-122"/>
+                <a:cs typeface="Courier New" pitchFamily="34" charset="-120"/>
+              </a:rPr>
+              <a:t>=1, </a:t>
+            </a:r>
+            <a:r>
+              <a:rPr lang="en-US" sz="2800" dirty="0" err="1">
+                <a:solidFill>
+                  <a:srgbClr val="030A18"/>
+                </a:solidFill>
+                <a:latin typeface="Courier New" pitchFamily="34" charset="0"/>
+                <a:ea typeface="Courier New" pitchFamily="34" charset="-122"/>
+                <a:cs typeface="Courier New" pitchFamily="34" charset="-120"/>
+              </a:rPr>
+              <a:t>out_channels</a:t>
+            </a:r>
+            <a:r>
+              <a:rPr lang="en-US" sz="2800" dirty="0">
+                <a:solidFill>
+                  <a:srgbClr val="030A18"/>
+                </a:solidFill>
+                <a:latin typeface="Courier New" pitchFamily="34" charset="0"/>
+                <a:ea typeface="Courier New" pitchFamily="34" charset="-122"/>
+                <a:cs typeface="Courier New" pitchFamily="34" charset="-120"/>
+              </a:rPr>
+              <a:t>=8, </a:t>
+            </a:r>
+            <a:r>
+              <a:rPr lang="en-US" sz="2800" dirty="0" err="1">
+                <a:solidFill>
+                  <a:srgbClr val="030A18"/>
+                </a:solidFill>
+                <a:latin typeface="Courier New" pitchFamily="34" charset="0"/>
+                <a:ea typeface="Courier New" pitchFamily="34" charset="-122"/>
+                <a:cs typeface="Courier New" pitchFamily="34" charset="-120"/>
+              </a:rPr>
+              <a:t>kernel_size</a:t>
+            </a:r>
+            <a:r>
+              <a:rPr lang="en-US" sz="2800" dirty="0">
+                <a:solidFill>
+                  <a:srgbClr val="030A18"/>
+                </a:solidFill>
+                <a:latin typeface="Courier New" pitchFamily="34" charset="0"/>
+                <a:ea typeface="Courier New" pitchFamily="34" charset="-122"/>
+                <a:cs typeface="Courier New" pitchFamily="34" charset="-120"/>
+              </a:rPr>
+              <a:t>=3)</a:t>
+            </a:r>
+            <a:endParaRPr lang="en-US" sz="2800" dirty="0"/>
+          </a:p>
+          <a:p>
+            <a:pPr marL="0" indent="0">
+              <a:buNone/>
+            </a:pPr>
+            <a:r>
+              <a:rPr lang="en-US" sz="2800" dirty="0">
+                <a:solidFill>
+                  <a:srgbClr val="030A18"/>
+                </a:solidFill>
+                <a:latin typeface="Courier New" pitchFamily="34" charset="0"/>
+                <a:ea typeface="Courier New" pitchFamily="34" charset="-122"/>
+                <a:cs typeface="Courier New" pitchFamily="34" charset="-120"/>
+              </a:rPr>
+              <a:t>        </a:t>
+            </a:r>
+            <a:r>
+              <a:rPr lang="en-US" sz="2800" dirty="0" err="1">
+                <a:solidFill>
+                  <a:srgbClr val="030A18"/>
+                </a:solidFill>
+                <a:latin typeface="Courier New" pitchFamily="34" charset="0"/>
+                <a:ea typeface="Courier New" pitchFamily="34" charset="-122"/>
+                <a:cs typeface="Courier New" pitchFamily="34" charset="-120"/>
+              </a:rPr>
+              <a:t>self.pool</a:t>
+            </a:r>
+            <a:r>
+              <a:rPr lang="en-US" sz="2800" dirty="0">
+                <a:solidFill>
+                  <a:srgbClr val="030A18"/>
+                </a:solidFill>
+                <a:latin typeface="Courier New" pitchFamily="34" charset="0"/>
+                <a:ea typeface="Courier New" pitchFamily="34" charset="-122"/>
+                <a:cs typeface="Courier New" pitchFamily="34" charset="-120"/>
+              </a:rPr>
+              <a:t> = nn.MaxPool2d(</a:t>
+            </a:r>
+            <a:r>
+              <a:rPr lang="en-US" sz="2800" dirty="0" err="1">
+                <a:solidFill>
+                  <a:srgbClr val="030A18"/>
+                </a:solidFill>
+                <a:latin typeface="Courier New" pitchFamily="34" charset="0"/>
+                <a:ea typeface="Courier New" pitchFamily="34" charset="-122"/>
+                <a:cs typeface="Courier New" pitchFamily="34" charset="-120"/>
+              </a:rPr>
+              <a:t>kernel_size</a:t>
+            </a:r>
+            <a:r>
+              <a:rPr lang="en-US" sz="2800" dirty="0">
+                <a:solidFill>
+                  <a:srgbClr val="030A18"/>
+                </a:solidFill>
+                <a:latin typeface="Courier New" pitchFamily="34" charset="0"/>
+                <a:ea typeface="Courier New" pitchFamily="34" charset="-122"/>
+                <a:cs typeface="Courier New" pitchFamily="34" charset="-120"/>
+              </a:rPr>
+              <a:t>=2, stride=2)</a:t>
+            </a:r>
+            <a:endParaRPr lang="en-US" sz="2800" dirty="0"/>
+          </a:p>
+          <a:p>
+            <a:pPr marL="0" indent="0">
+              <a:buNone/>
+            </a:pPr>
+            <a:r>
+              <a:rPr lang="en-US" sz="2800" dirty="0">
+                <a:solidFill>
+                  <a:srgbClr val="030A18"/>
+                </a:solidFill>
+                <a:latin typeface="Courier New" pitchFamily="34" charset="0"/>
+                <a:ea typeface="Courier New" pitchFamily="34" charset="-122"/>
+                <a:cs typeface="Courier New" pitchFamily="34" charset="-120"/>
+              </a:rPr>
+              <a:t>        self.fc1 = </a:t>
+            </a:r>
+            <a:r>
+              <a:rPr lang="en-US" sz="2800" dirty="0" err="1">
+                <a:solidFill>
+                  <a:srgbClr val="030A18"/>
+                </a:solidFill>
+                <a:latin typeface="Courier New" pitchFamily="34" charset="0"/>
+                <a:ea typeface="Courier New" pitchFamily="34" charset="-122"/>
+                <a:cs typeface="Courier New" pitchFamily="34" charset="-120"/>
+              </a:rPr>
+              <a:t>nn.Linear</a:t>
+            </a:r>
+            <a:r>
+              <a:rPr lang="en-US" sz="2800" dirty="0">
+                <a:solidFill>
+                  <a:srgbClr val="030A18"/>
+                </a:solidFill>
+                <a:latin typeface="Courier New" pitchFamily="34" charset="0"/>
+                <a:ea typeface="Courier New" pitchFamily="34" charset="-122"/>
+                <a:cs typeface="Courier New" pitchFamily="34" charset="-120"/>
+              </a:rPr>
+              <a:t>(8 * 3 * 3, 10)</a:t>
+            </a:r>
+            <a:endParaRPr lang="en-US" sz="2800" dirty="0"/>
+          </a:p>
+          <a:p>
+            <a:pPr marL="0" indent="0">
+              <a:buNone/>
+            </a:pPr>
+            <a:r>
+              <a:rPr lang="en-US" sz="2800" dirty="0">
+                <a:solidFill>
+                  <a:srgbClr val="030A18"/>
+                </a:solidFill>
+                <a:latin typeface="Courier New" pitchFamily="34" charset="0"/>
+                <a:ea typeface="Courier New" pitchFamily="34" charset="-122"/>
+                <a:cs typeface="Courier New" pitchFamily="34" charset="-120"/>
+              </a:rPr>
+              <a:t>    def forward(self, x):</a:t>
+            </a:r>
+            <a:endParaRPr lang="en-US" sz="2800" dirty="0"/>
+          </a:p>
+          <a:p>
+            <a:pPr marL="0" indent="0">
+              <a:buNone/>
+            </a:pPr>
+            <a:r>
+              <a:rPr lang="en-US" sz="2800" dirty="0">
+                <a:solidFill>
+                  <a:srgbClr val="030A18"/>
+                </a:solidFill>
+                <a:latin typeface="Courier New" pitchFamily="34" charset="0"/>
+                <a:ea typeface="Courier New" pitchFamily="34" charset="-122"/>
+                <a:cs typeface="Courier New" pitchFamily="34" charset="-120"/>
+              </a:rPr>
+              <a:t>        x = </a:t>
+            </a:r>
+            <a:r>
+              <a:rPr lang="en-US" sz="2800" dirty="0" err="1">
+                <a:solidFill>
+                  <a:srgbClr val="030A18"/>
+                </a:solidFill>
+                <a:latin typeface="Courier New" pitchFamily="34" charset="0"/>
+                <a:ea typeface="Courier New" pitchFamily="34" charset="-122"/>
+                <a:cs typeface="Courier New" pitchFamily="34" charset="-120"/>
+              </a:rPr>
+              <a:t>nn.functional.relu</a:t>
+            </a:r>
+            <a:r>
+              <a:rPr lang="en-US" sz="2800" dirty="0">
+                <a:solidFill>
+                  <a:srgbClr val="030A18"/>
+                </a:solidFill>
+                <a:latin typeface="Courier New" pitchFamily="34" charset="0"/>
+                <a:ea typeface="Courier New" pitchFamily="34" charset="-122"/>
+                <a:cs typeface="Courier New" pitchFamily="34" charset="-120"/>
+              </a:rPr>
+              <a:t>(self.conv1(x))</a:t>
+            </a:r>
+            <a:endParaRPr lang="en-US" sz="2800" dirty="0"/>
+          </a:p>
+          <a:p>
+            <a:pPr marL="0" indent="0">
+              <a:buNone/>
+            </a:pPr>
+            <a:r>
+              <a:rPr lang="en-US" sz="2800" dirty="0">
+                <a:solidFill>
+                  <a:srgbClr val="030A18"/>
+                </a:solidFill>
+                <a:latin typeface="Courier New" pitchFamily="34" charset="0"/>
+                <a:ea typeface="Courier New" pitchFamily="34" charset="-122"/>
+                <a:cs typeface="Courier New" pitchFamily="34" charset="-120"/>
+              </a:rPr>
+              <a:t>        x = </a:t>
+            </a:r>
+            <a:r>
+              <a:rPr lang="en-US" sz="2800" dirty="0" err="1">
+                <a:solidFill>
+                  <a:srgbClr val="030A18"/>
+                </a:solidFill>
+                <a:latin typeface="Courier New" pitchFamily="34" charset="0"/>
+                <a:ea typeface="Courier New" pitchFamily="34" charset="-122"/>
+                <a:cs typeface="Courier New" pitchFamily="34" charset="-120"/>
+              </a:rPr>
+              <a:t>self.pool</a:t>
+            </a:r>
+            <a:r>
+              <a:rPr lang="en-US" sz="2800" dirty="0">
+                <a:solidFill>
+                  <a:srgbClr val="030A18"/>
+                </a:solidFill>
+                <a:latin typeface="Courier New" pitchFamily="34" charset="0"/>
+                <a:ea typeface="Courier New" pitchFamily="34" charset="-122"/>
+                <a:cs typeface="Courier New" pitchFamily="34" charset="-120"/>
+              </a:rPr>
+              <a:t>(x)</a:t>
+            </a:r>
+            <a:endParaRPr lang="en-US" sz="2800" dirty="0"/>
+          </a:p>
+          <a:p>
+            <a:pPr marL="0" indent="0">
+              <a:buNone/>
+            </a:pPr>
+            <a:r>
+              <a:rPr lang="en-US" sz="2800" dirty="0">
+                <a:solidFill>
+                  <a:srgbClr val="030A18"/>
+                </a:solidFill>
+                <a:latin typeface="Courier New" pitchFamily="34" charset="0"/>
+                <a:ea typeface="Courier New" pitchFamily="34" charset="-122"/>
+                <a:cs typeface="Courier New" pitchFamily="34" charset="-120"/>
+              </a:rPr>
+              <a:t>        x = </a:t>
+            </a:r>
+            <a:r>
+              <a:rPr lang="en-US" sz="2800" dirty="0" err="1">
+                <a:solidFill>
+                  <a:srgbClr val="030A18"/>
+                </a:solidFill>
+                <a:latin typeface="Courier New" pitchFamily="34" charset="0"/>
+                <a:ea typeface="Courier New" pitchFamily="34" charset="-122"/>
+                <a:cs typeface="Courier New" pitchFamily="34" charset="-120"/>
+              </a:rPr>
+              <a:t>x.view</a:t>
+            </a:r>
+            <a:r>
+              <a:rPr lang="en-US" sz="2800" dirty="0">
+                <a:solidFill>
+                  <a:srgbClr val="030A18"/>
+                </a:solidFill>
+                <a:latin typeface="Courier New" pitchFamily="34" charset="0"/>
+                <a:ea typeface="Courier New" pitchFamily="34" charset="-122"/>
+                <a:cs typeface="Courier New" pitchFamily="34" charset="-120"/>
+              </a:rPr>
+              <a:t>(</a:t>
+            </a:r>
+            <a:r>
+              <a:rPr lang="en-US" sz="2800" dirty="0" err="1">
+                <a:solidFill>
+                  <a:srgbClr val="030A18"/>
+                </a:solidFill>
+                <a:latin typeface="Courier New" pitchFamily="34" charset="0"/>
+                <a:ea typeface="Courier New" pitchFamily="34" charset="-122"/>
+                <a:cs typeface="Courier New" pitchFamily="34" charset="-120"/>
+              </a:rPr>
+              <a:t>x.size</a:t>
+            </a:r>
+            <a:r>
+              <a:rPr lang="en-US" sz="2800" dirty="0">
+                <a:solidFill>
+                  <a:srgbClr val="030A18"/>
+                </a:solidFill>
+                <a:latin typeface="Courier New" pitchFamily="34" charset="0"/>
+                <a:ea typeface="Courier New" pitchFamily="34" charset="-122"/>
+                <a:cs typeface="Courier New" pitchFamily="34" charset="-120"/>
+              </a:rPr>
+              <a:t>(0), -1)</a:t>
+            </a:r>
+            <a:endParaRPr lang="en-US" sz="2800" dirty="0"/>
+          </a:p>
+          <a:p>
+            <a:pPr marL="0" indent="0">
+              <a:buNone/>
+            </a:pPr>
+            <a:r>
+              <a:rPr lang="en-US" sz="2800" dirty="0">
+                <a:solidFill>
+                  <a:srgbClr val="030A18"/>
+                </a:solidFill>
+                <a:latin typeface="Courier New" pitchFamily="34" charset="0"/>
+                <a:ea typeface="Courier New" pitchFamily="34" charset="-122"/>
+                <a:cs typeface="Courier New" pitchFamily="34" charset="-120"/>
+              </a:rPr>
+              <a:t>        x = self.fc1(x)</a:t>
+            </a:r>
+            <a:endParaRPr lang="en-US" sz="2800" dirty="0"/>
+          </a:p>
+          <a:p>
+            <a:pPr marL="0" indent="0">
+              <a:buNone/>
+            </a:pPr>
+            <a:r>
+              <a:rPr lang="en-US" sz="2800" dirty="0">
+                <a:solidFill>
+                  <a:srgbClr val="030A18"/>
+                </a:solidFill>
+                <a:latin typeface="Courier New" pitchFamily="34" charset="0"/>
+                <a:ea typeface="Courier New" pitchFamily="34" charset="-122"/>
+                <a:cs typeface="Courier New" pitchFamily="34" charset="-120"/>
+              </a:rPr>
+              <a:t>        return x</a:t>
+            </a:r>
+            <a:endParaRPr lang="en-US" dirty="0"/>
+          </a:p>
+          <a:p>
+            <a:endParaRPr lang="en-US" dirty="0"/>
+          </a:p>
+          <a:p>
+            <a:endParaRPr lang="en-US" dirty="0"/>
+          </a:p>
+        </p:txBody>
+      </p:sp>
+      <p:sp>
+        <p:nvSpPr>
+          <p:cNvPr id="4" name="Slide Number Placeholder 3">
+            <a:extLst>
+              <a:ext uri="{FF2B5EF4-FFF2-40B4-BE49-F238E27FC236}">
+                <a16:creationId xmlns:a16="http://schemas.microsoft.com/office/drawing/2014/main" id="{20C4D6B3-73C3-284A-E4EA-7403E514D76B}"/>
+              </a:ext>
+            </a:extLst>
+          </p:cNvPr>
+          <p:cNvSpPr>
+            <a:spLocks noGrp="1"/>
+          </p:cNvSpPr>
+          <p:nvPr>
+            <p:ph type="sldNum" sz="quarter" idx="12"/>
+          </p:nvPr>
+        </p:nvSpPr>
         <p:spPr/>
         <p:txBody>
-          <a:bodyPr>
-            <a:normAutofit fontScale="77500" lnSpcReduction="20000"/>
-          </a:bodyPr>
-          <a:lstStyle/>
-          <a:p>
-            <a:pPr marL="457200" indent="-457200">
-              <a:buFont typeface="Arial" panose="020B0604020202020204" pitchFamily="34" charset="0"/>
-              <a:buChar char="•"/>
-            </a:pPr>
-            <a:r>
-              <a:rPr lang="en-US" dirty="0"/>
-              <a:t>Dense networks connect everything, but convolutions exploit locality and sharing to scale to high‑dimensional inputs.</a:t>
-            </a:r>
-          </a:p>
-          <a:p>
-            <a:pPr marL="457200" indent="-457200">
-              <a:buFont typeface="Arial" panose="020B0604020202020204" pitchFamily="34" charset="0"/>
-              <a:buChar char="•"/>
-            </a:pPr>
-            <a:r>
-              <a:rPr lang="en-US" dirty="0"/>
-              <a:t>Layer types such as dropout, batch norm, activations and pooling enable training deeper networks, </a:t>
-            </a:r>
-            <a:r>
-              <a:rPr lang="en-US" dirty="0" err="1"/>
-              <a:t>stabilise</a:t>
-            </a:r>
-            <a:r>
-              <a:rPr lang="en-US" dirty="0"/>
-              <a:t> learning and improve </a:t>
-            </a:r>
-            <a:r>
-              <a:rPr lang="en-US" dirty="0" err="1"/>
-              <a:t>generalisation</a:t>
-            </a:r>
-            <a:r>
-              <a:rPr lang="en-US" dirty="0"/>
-              <a:t>.</a:t>
-            </a:r>
-          </a:p>
-          <a:p>
-            <a:pPr marL="457200" indent="-457200">
-              <a:buFont typeface="Arial" panose="020B0604020202020204" pitchFamily="34" charset="0"/>
-              <a:buChar char="•"/>
-            </a:pPr>
-            <a:r>
-              <a:rPr lang="en-US" dirty="0"/>
-              <a:t>Convolution extends naturally to 2D inputs with multi‑channel filters; stride and padding control output shapes.</a:t>
-            </a:r>
-          </a:p>
-          <a:p>
-            <a:pPr marL="457200" indent="-457200">
-              <a:buFont typeface="Arial" panose="020B0604020202020204" pitchFamily="34" charset="0"/>
-              <a:buChar char="•"/>
-            </a:pPr>
-            <a:r>
-              <a:rPr lang="en-US" dirty="0"/>
-              <a:t>Building blocks combine to form deep CNNs capable of </a:t>
-            </a:r>
-            <a:r>
-              <a:rPr lang="en-US" dirty="0" err="1"/>
-              <a:t>recognising</a:t>
-            </a:r>
-            <a:r>
-              <a:rPr lang="en-US" dirty="0"/>
-              <a:t> complex patterns in images, speech and beyond.</a:t>
-            </a:r>
-          </a:p>
-          <a:p>
-            <a:pPr marL="457200" indent="-457200">
-              <a:buFont typeface="Arial" panose="020B0604020202020204" pitchFamily="34" charset="0"/>
-              <a:buChar char="•"/>
-            </a:pPr>
-            <a:r>
-              <a:rPr lang="en-US" dirty="0"/>
-              <a:t>Continuous innovation (activations, normalization, architectures) and </a:t>
-            </a:r>
-            <a:r>
-              <a:rPr lang="en-US" dirty="0" err="1"/>
-              <a:t>regularisation</a:t>
-            </a:r>
-            <a:r>
-              <a:rPr lang="en-US" dirty="0"/>
-              <a:t> are key to advancing the state of the art.</a:t>
-            </a:r>
+          <a:bodyPr/>
+          <a:lstStyle/>
+          <a:p>
+            <a:fld id="{5A064C77-022D-3743-A04E-645624933D1D}" type="slidenum">
+              <a:rPr lang="en-US" smtClean="0"/>
+              <a:t>29</a:t>
+            </a:fld>
+            <a:endParaRPr lang="en-US"/>
           </a:p>
         </p:txBody>
       </p:sp>
     </p:spTree>
     <p:extLst>
       <p:ext uri="{BB962C8B-B14F-4D97-AF65-F5344CB8AC3E}">
-        <p14:creationId xmlns:p14="http://schemas.microsoft.com/office/powerpoint/2010/main" val="2902375257"/>
+        <p14:creationId xmlns:p14="http://schemas.microsoft.com/office/powerpoint/2010/main" val="743238056"/>
       </p:ext>
     </p:extLst>
   </p:cSld>
@@ -18081,6 +18625,345 @@
           <p:cNvPr id="2" name="Title 1">
             <a:extLst>
               <a:ext uri="{FF2B5EF4-FFF2-40B4-BE49-F238E27FC236}">
+                <a16:creationId xmlns:a16="http://schemas.microsoft.com/office/drawing/2014/main" id="{BB088283-06E7-18B1-03DC-B445852C3E06}"/>
+              </a:ext>
+            </a:extLst>
+          </p:cNvPr>
+          <p:cNvSpPr>
+            <a:spLocks noGrp="1"/>
+          </p:cNvSpPr>
+          <p:nvPr>
+            <p:ph type="title"/>
+          </p:nvPr>
+        </p:nvSpPr>
+        <p:spPr/>
+        <p:txBody>
+          <a:bodyPr/>
+          <a:lstStyle/>
+          <a:p>
+            <a:r>
+              <a:rPr lang="en-US" dirty="0"/>
+              <a:t>Common CNN architectures</a:t>
+            </a:r>
+          </a:p>
+        </p:txBody>
+      </p:sp>
+      <p:sp>
+        <p:nvSpPr>
+          <p:cNvPr id="3" name="Content Placeholder 2">
+            <a:extLst>
+              <a:ext uri="{FF2B5EF4-FFF2-40B4-BE49-F238E27FC236}">
+                <a16:creationId xmlns:a16="http://schemas.microsoft.com/office/drawing/2014/main" id="{9942B748-4DFC-1C22-B21A-2C6CD4EBEDC6}"/>
+              </a:ext>
+            </a:extLst>
+          </p:cNvPr>
+          <p:cNvSpPr>
+            <a:spLocks noGrp="1"/>
+          </p:cNvSpPr>
+          <p:nvPr>
+            <p:ph idx="1"/>
+          </p:nvPr>
+        </p:nvSpPr>
+        <p:spPr/>
+        <p:txBody>
+          <a:bodyPr>
+            <a:normAutofit/>
+          </a:bodyPr>
+          <a:lstStyle/>
+          <a:p>
+            <a:r>
+              <a:rPr lang="en-US" dirty="0"/>
+              <a:t>LeNet (1998): early handwritten digit </a:t>
+            </a:r>
+            <a:r>
+              <a:rPr lang="en-US" dirty="0" err="1"/>
+              <a:t>recogniser</a:t>
+            </a:r>
+            <a:r>
+              <a:rPr lang="en-US" dirty="0"/>
+              <a:t>; 5×5 filters, tanh activations</a:t>
+            </a:r>
+          </a:p>
+          <a:p>
+            <a:r>
+              <a:rPr lang="en-US" dirty="0" err="1"/>
+              <a:t>AlexNet</a:t>
+            </a:r>
+            <a:r>
+              <a:rPr lang="en-US" dirty="0"/>
+              <a:t> (2012): deeper nets with </a:t>
+            </a:r>
+            <a:r>
+              <a:rPr lang="en-US" dirty="0" err="1"/>
+              <a:t>ReLU</a:t>
+            </a:r>
+            <a:r>
+              <a:rPr lang="en-US" dirty="0"/>
+              <a:t>, dropout and 3×3 / 11×11 conv layers; won ImageNet competition</a:t>
+            </a:r>
+          </a:p>
+          <a:p>
+            <a:r>
+              <a:rPr lang="en-US" dirty="0"/>
+              <a:t>VGG (2014): very deep (16–19 layers) using only 3×3 </a:t>
+            </a:r>
+            <a:r>
+              <a:rPr lang="en-US" dirty="0" err="1"/>
+              <a:t>convs</a:t>
+            </a:r>
+            <a:r>
+              <a:rPr lang="en-US" dirty="0"/>
+              <a:t> and 2×2 pooling</a:t>
+            </a:r>
+          </a:p>
+          <a:p>
+            <a:r>
+              <a:rPr lang="en-US" dirty="0" err="1"/>
+              <a:t>ResNet</a:t>
+            </a:r>
+            <a:r>
+              <a:rPr lang="en-US" dirty="0"/>
+              <a:t> (2015): introduces </a:t>
+            </a:r>
+            <a:r>
+              <a:rPr lang="en-US" b="1" dirty="0"/>
+              <a:t>skip connections </a:t>
+            </a:r>
+            <a:r>
+              <a:rPr lang="en-US" dirty="0"/>
+              <a:t>to ease training very deep networks (up to hundreds of layers)</a:t>
+            </a:r>
+          </a:p>
+          <a:p>
+            <a:endParaRPr lang="en-US" dirty="0"/>
+          </a:p>
+        </p:txBody>
+      </p:sp>
+      <p:sp>
+        <p:nvSpPr>
+          <p:cNvPr id="4" name="Slide Number Placeholder 3">
+            <a:extLst>
+              <a:ext uri="{FF2B5EF4-FFF2-40B4-BE49-F238E27FC236}">
+                <a16:creationId xmlns:a16="http://schemas.microsoft.com/office/drawing/2014/main" id="{6688F466-418A-C019-6F3F-610FD4E77298}"/>
+              </a:ext>
+            </a:extLst>
+          </p:cNvPr>
+          <p:cNvSpPr>
+            <a:spLocks noGrp="1"/>
+          </p:cNvSpPr>
+          <p:nvPr>
+            <p:ph type="sldNum" sz="quarter" idx="12"/>
+          </p:nvPr>
+        </p:nvSpPr>
+        <p:spPr/>
+        <p:txBody>
+          <a:bodyPr/>
+          <a:lstStyle/>
+          <a:p>
+            <a:fld id="{5A064C77-022D-3743-A04E-645624933D1D}" type="slidenum">
+              <a:rPr lang="en-US" smtClean="0"/>
+              <a:t>30</a:t>
+            </a:fld>
+            <a:endParaRPr lang="en-US"/>
+          </a:p>
+        </p:txBody>
+      </p:sp>
+    </p:spTree>
+    <p:extLst>
+      <p:ext uri="{BB962C8B-B14F-4D97-AF65-F5344CB8AC3E}">
+        <p14:creationId xmlns:p14="http://schemas.microsoft.com/office/powerpoint/2010/main" val="1874886"/>
+      </p:ext>
+    </p:extLst>
+  </p:cSld>
+  <p:clrMapOvr>
+    <a:masterClrMapping/>
+  </p:clrMapOvr>
+</p:sld>
+</file>
+
+<file path=ppt/slides/slide31.xml><?xml version="1.0" encoding="utf-8"?>
+<p:sld xmlns:a="http://schemas.openxmlformats.org/drawingml/2006/main" xmlns:r="http://schemas.openxmlformats.org/officeDocument/2006/relationships" xmlns:p="http://schemas.openxmlformats.org/presentationml/2006/main">
+  <p:cSld>
+    <p:spTree>
+      <p:nvGrpSpPr>
+        <p:cNvPr id="1" name=""/>
+        <p:cNvGrpSpPr/>
+        <p:nvPr/>
+      </p:nvGrpSpPr>
+      <p:grpSpPr>
+        <a:xfrm>
+          <a:off x="0" y="0"/>
+          <a:ext cx="0" cy="0"/>
+          <a:chOff x="0" y="0"/>
+          <a:chExt cx="0" cy="0"/>
+        </a:xfrm>
+      </p:grpSpPr>
+      <p:sp>
+        <p:nvSpPr>
+          <p:cNvPr id="2" name="Title 1">
+            <a:extLst>
+              <a:ext uri="{FF2B5EF4-FFF2-40B4-BE49-F238E27FC236}">
+                <a16:creationId xmlns:a16="http://schemas.microsoft.com/office/drawing/2014/main" id="{5052E3C7-E02A-F443-93FF-99B0D12844EC}"/>
+              </a:ext>
+            </a:extLst>
+          </p:cNvPr>
+          <p:cNvSpPr>
+            <a:spLocks noGrp="1"/>
+          </p:cNvSpPr>
+          <p:nvPr>
+            <p:ph type="title"/>
+          </p:nvPr>
+        </p:nvSpPr>
+        <p:spPr/>
+        <p:txBody>
+          <a:bodyPr/>
+          <a:lstStyle/>
+          <a:p>
+            <a:r>
+              <a:rPr lang="en-US" dirty="0"/>
+              <a:t>Summary</a:t>
+            </a:r>
+          </a:p>
+        </p:txBody>
+      </p:sp>
+      <p:sp>
+        <p:nvSpPr>
+          <p:cNvPr id="3" name="Content Placeholder 2">
+            <a:extLst>
+              <a:ext uri="{FF2B5EF4-FFF2-40B4-BE49-F238E27FC236}">
+                <a16:creationId xmlns:a16="http://schemas.microsoft.com/office/drawing/2014/main" id="{92B1495C-38DD-F9F0-478E-D16C6E4C61EA}"/>
+              </a:ext>
+            </a:extLst>
+          </p:cNvPr>
+          <p:cNvSpPr>
+            <a:spLocks noGrp="1"/>
+          </p:cNvSpPr>
+          <p:nvPr>
+            <p:ph idx="1"/>
+          </p:nvPr>
+        </p:nvSpPr>
+        <p:spPr/>
+        <p:txBody>
+          <a:bodyPr>
+            <a:normAutofit fontScale="77500" lnSpcReduction="20000"/>
+          </a:bodyPr>
+          <a:lstStyle/>
+          <a:p>
+            <a:pPr marL="457200" indent="-457200">
+              <a:buFont typeface="Arial" panose="020B0604020202020204" pitchFamily="34" charset="0"/>
+              <a:buChar char="•"/>
+            </a:pPr>
+            <a:r>
+              <a:rPr lang="en-US" dirty="0"/>
+              <a:t>Dense networks connect everything, but convolutions exploit locality and sharing to scale to high‑dimensional inputs</a:t>
+            </a:r>
+          </a:p>
+          <a:p>
+            <a:pPr marL="457200" indent="-457200">
+              <a:buFont typeface="Arial" panose="020B0604020202020204" pitchFamily="34" charset="0"/>
+              <a:buChar char="•"/>
+            </a:pPr>
+            <a:r>
+              <a:rPr lang="en-US" dirty="0"/>
+              <a:t>Layer types such as dropout, batch norm, activations and pooling enable training deeper networks, </a:t>
+            </a:r>
+            <a:r>
+              <a:rPr lang="en-US" dirty="0" err="1"/>
+              <a:t>stabilise</a:t>
+            </a:r>
+            <a:r>
+              <a:rPr lang="en-US" dirty="0"/>
+              <a:t> learning and improve </a:t>
+            </a:r>
+            <a:r>
+              <a:rPr lang="en-US" dirty="0" err="1"/>
+              <a:t>generalisation</a:t>
+            </a:r>
+            <a:endParaRPr lang="en-US" dirty="0"/>
+          </a:p>
+          <a:p>
+            <a:pPr marL="457200" indent="-457200">
+              <a:buFont typeface="Arial" panose="020B0604020202020204" pitchFamily="34" charset="0"/>
+              <a:buChar char="•"/>
+            </a:pPr>
+            <a:r>
+              <a:rPr lang="en-US" dirty="0"/>
+              <a:t>Convolution extends naturally to 2D inputs with multi‑channel filters; stride and padding control output shapes</a:t>
+            </a:r>
+          </a:p>
+          <a:p>
+            <a:pPr marL="457200" indent="-457200">
+              <a:buFont typeface="Arial" panose="020B0604020202020204" pitchFamily="34" charset="0"/>
+              <a:buChar char="•"/>
+            </a:pPr>
+            <a:r>
+              <a:rPr lang="en-US" dirty="0"/>
+              <a:t>Building blocks combine to form deep CNNs capable of </a:t>
+            </a:r>
+            <a:r>
+              <a:rPr lang="en-US" dirty="0" err="1"/>
+              <a:t>recognising</a:t>
+            </a:r>
+            <a:r>
+              <a:rPr lang="en-US" dirty="0"/>
+              <a:t> complex patterns in images, speech and beyond</a:t>
+            </a:r>
+          </a:p>
+          <a:p>
+            <a:pPr marL="457200" indent="-457200">
+              <a:buFont typeface="Arial" panose="020B0604020202020204" pitchFamily="34" charset="0"/>
+              <a:buChar char="•"/>
+            </a:pPr>
+            <a:r>
+              <a:rPr lang="en-US" dirty="0"/>
+              <a:t>Continuous innovation (activations, normalization, architectures) and </a:t>
+            </a:r>
+            <a:r>
+              <a:rPr lang="en-US" dirty="0" err="1"/>
+              <a:t>regularisation</a:t>
+            </a:r>
+            <a:r>
+              <a:rPr lang="en-US" dirty="0"/>
+              <a:t> are key to advancing the state of the art</a:t>
+            </a:r>
+          </a:p>
+        </p:txBody>
+      </p:sp>
+    </p:spTree>
+    <p:extLst>
+      <p:ext uri="{BB962C8B-B14F-4D97-AF65-F5344CB8AC3E}">
+        <p14:creationId xmlns:p14="http://schemas.microsoft.com/office/powerpoint/2010/main" val="2902375257"/>
+      </p:ext>
+    </p:extLst>
+  </p:cSld>
+  <p:clrMapOvr>
+    <a:masterClrMapping/>
+  </p:clrMapOvr>
+</p:sld>
+</file>
+
+<file path=ppt/slides/slide32.xml><?xml version="1.0" encoding="utf-8"?>
+<p:sld xmlns:a="http://schemas.openxmlformats.org/drawingml/2006/main" xmlns:r="http://schemas.openxmlformats.org/officeDocument/2006/relationships" xmlns:p="http://schemas.openxmlformats.org/presentationml/2006/main">
+  <p:cSld>
+    <p:spTree>
+      <p:nvGrpSpPr>
+        <p:cNvPr id="1" name=""/>
+        <p:cNvGrpSpPr/>
+        <p:nvPr/>
+      </p:nvGrpSpPr>
+      <p:grpSpPr>
+        <a:xfrm>
+          <a:off x="0" y="0"/>
+          <a:ext cx="0" cy="0"/>
+          <a:chOff x="0" y="0"/>
+          <a:chExt cx="0" cy="0"/>
+        </a:xfrm>
+      </p:grpSpPr>
+      <p:sp>
+        <p:nvSpPr>
+          <p:cNvPr id="2" name="Title 1">
+            <a:extLst>
+              <a:ext uri="{FF2B5EF4-FFF2-40B4-BE49-F238E27FC236}">
                 <a16:creationId xmlns:a16="http://schemas.microsoft.com/office/drawing/2014/main" id="{5272E10E-525F-42F7-F943-C6C1FF1B7CC1}"/>
               </a:ext>
             </a:extLst>
@@ -18152,7 +19035,7 @@
 </p:sld>
 </file>
 
-<file path=ppt/slides/slide31.xml><?xml version="1.0" encoding="utf-8"?>
+<file path=ppt/slides/slide33.xml><?xml version="1.0" encoding="utf-8"?>
 <p:sld xmlns:a="http://schemas.openxmlformats.org/drawingml/2006/main" xmlns:r="http://schemas.openxmlformats.org/officeDocument/2006/relationships" xmlns:p="http://schemas.openxmlformats.org/presentationml/2006/main">
   <p:cSld>
     <p:spTree>
@@ -18281,15 +19164,15 @@
             </a:pPr>
             <a:r>
               <a:rPr lang="en-US" dirty="0"/>
-              <a:t>(Advanced: try to find some satellite images of Ireland (Lough Neigh?) over time and see if you can see changes in the </a:t>
+              <a:t>(Advanced: try to find some satellite images of Ireland (use </a:t>
             </a:r>
             <a:r>
               <a:rPr lang="en-US" dirty="0" err="1"/>
-              <a:t>colours</a:t>
+              <a:t>EUMetSat</a:t>
             </a:r>
             <a:r>
               <a:rPr lang="en-US" dirty="0"/>
-              <a:t> </a:t>
+              <a:t>?) over time and see if you can use a model identify changes</a:t>
             </a:r>
           </a:p>
           <a:p>
@@ -18487,7 +19370,7 @@
             <a:r>
               <a:rPr lang="en-US" sz="2800" dirty="0"/>
               <a:t>Example input: x = [1, 0.5, -1]
-Weights W₁ (3×2) and W₂ (2×1) chosen for illustration. Biases are zeros for simplicity.</a:t>
+Weights W₁ (3×2) and W₂ (2×1) chosen for illustration. Biases are zeros for simplicity</a:t>
             </a:r>
           </a:p>
           <a:p>
@@ -18501,7 +19384,7 @@
             </a:r>
             <a:r>
               <a:rPr lang="en-US" sz="2800" dirty="0"/>
-              <a:t> to produce non‑negative activations.</a:t>
+              <a:t> to produce non‑negative activations</a:t>
             </a:r>
           </a:p>
         </p:txBody>
@@ -20606,7 +21489,7 @@
             </a:r>
             <a:r>
               <a:rPr lang="en-US" dirty="0"/>
-              <a:t>, sigmoid, and tanh activation functions, but there are many other ways to play with hidden neurons.</a:t>
+              <a:t>, sigmoid, and tanh activation functions, but there are many other ways to play with hidden neurons</a:t>
             </a:r>
           </a:p>
           <a:p>
@@ -20616,7 +21499,7 @@
             </a:r>
             <a:r>
               <a:rPr lang="en-US" dirty="0"/>
-              <a:t>: randomly deactivate neurons during training to prevent over‑fitting and scale survivors to keep expectations.</a:t>
+              <a:t>: randomly deactivate neurons during training to prevent over‑fitting and scale survivors to keep expectations</a:t>
             </a:r>
           </a:p>
           <a:p>
@@ -20638,7 +21521,7 @@
             </a:r>
             <a:r>
               <a:rPr lang="en-US" dirty="0"/>
-              <a:t> activations to zero mean and unit variance, then scale and shift with learnable parameters.</a:t>
+              <a:t> activations to zero mean and unit variance, then scale and shift with learnable parameters</a:t>
             </a:r>
           </a:p>
           <a:p>
@@ -20664,7 +21547,7 @@
             </a:r>
             <a:r>
               <a:rPr lang="en-US" dirty="0"/>
-              <a:t> local regions and introduce invariance (most useful for convolutions – later in class).</a:t>
+              <a:t> local regions and introduce invariance (most useful for convolutions – later in class)</a:t>
             </a:r>
           </a:p>
         </p:txBody>
@@ -20802,7 +21685,7 @@
                 </a14:m>
                 <a:r>
                   <a:rPr lang="en-US" dirty="0"/>
-                  <a:t> of activations to zero during training.</a:t>
+                  <a:t> of activations to zero during training</a:t>
                 </a:r>
               </a:p>
               <a:p>
@@ -20834,7 +21717,7 @@
                 </a14:m>
                 <a:r>
                   <a:rPr lang="en-US" dirty="0"/>
-                  <a:t> so that the expected value for each neuron is preserved.</a:t>
+                  <a:t> so that the expected value for each neuron is preserved</a:t>
                 </a:r>
               </a:p>
               <a:p>
@@ -20901,10 +21784,7 @@
                     </m:r>
                   </m:oMath>
                 </a14:m>
-                <a:r>
-                  <a:rPr lang="en-US" dirty="0"/>
-                  <a:t>.</a:t>
-                </a:r>
+                <a:endParaRPr lang="en-US" dirty="0"/>
               </a:p>
               <a:p>
                 <a:r>
@@ -20975,7 +21855,7 @@
                 </a14:m>
                 <a:r>
                   <a:rPr lang="en-US" dirty="0"/>
-                  <a:t>, i.e. multiplied by 2.</a:t>
+                  <a:t>, i.e. multiplied by 2</a:t>
                 </a:r>
               </a:p>
               <a:p>
@@ -22446,7 +23326,7 @@
                 </a:r>
                 <a:r>
                   <a:rPr lang="en-US" dirty="0"/>
-                  <a:t> activations over each mini‑batch of training data.</a:t>
+                  <a:t> activations over each mini‑batch of training data</a:t>
                 </a:r>
               </a:p>
               <a:p>
@@ -22502,10 +23382,6 @@
                     </m:r>
                   </m:oMath>
                 </a14:m>
-                <a:r>
-                  <a:rPr lang="el-GR" dirty="0"/>
-                  <a:t>. </a:t>
-                </a:r>
                 <a:endParaRPr lang="en-IE" dirty="0"/>
               </a:p>
               <a:p>
@@ -22627,10 +23503,7 @@
                     </m:r>
                   </m:oMath>
                 </a14:m>
-                <a:r>
-                  <a:rPr lang="el-GR" dirty="0"/>
-                  <a:t>.</a:t>
-                </a:r>
+                <a:endParaRPr lang="el-GR" dirty="0"/>
               </a:p>
               <a:p>
                 <a:endParaRPr lang="el-GR" dirty="0"/>
@@ -24844,7 +25717,7 @@
             </a:r>
             <a:r>
               <a:rPr lang="en-US" sz="2800" dirty="0"/>
-              <a:t> the roles of each layer type, the number of learnable parameters they add, and how they transform activations during the forward pass.</a:t>
+              <a:t> the roles of each layer type, the number of learnable parameters they add, and how they transform activations during the forward pass</a:t>
             </a:r>
           </a:p>
           <a:p>
